--- a/Доклад_красивый.pptx
+++ b/Доклад_красивый.pptx
@@ -1230,7 +1230,7 @@
             <a:r>
               <a:rPr lang="en-US" dirty="0"/>
               <a:t>NIKITA:
-Why is this topic important? At cruising level, radiation is 11 to 22 times higher than on the ground. Since 1990, international experts have treated this exposure as part of the job. Special sanitary rules for aircrew were cancelled in 2021 and 2025. And with 900 flight hours a year, the dose can reach about 3.6 millisieverts. That is more than 70 percent of the limit. So our question is simple: does the law really protect each crew member?</a:t>
+Why is this topic important? At cruising level, radiation is 11 to 22 times higher than on the ground. Since 1990, international experts have treated this exposure as part of the job. We checked this with our own measurements on board. Special sanitary rules for aircrew were cancelled in 2021 and 2025. And with 900 flight hours a year, the dose can reach about 3.6 millisieverts. That is more than 70 percent of the limit. So our question is simple: does the law really protect each crew member?</a:t>
             </a:r>
             <a:endParaRPr lang="en-US" dirty="0"/>
           </a:p>
@@ -1408,7 +1408,7 @@
             <a:r>
               <a:rPr lang="en-US" dirty="0"/>
               <a:t>NIKITA:
-First, a few facts from my previous work. I measured radiation on two flights with a home-made Geiger counter. Near the ground the device showed about 8 to 15 microroentgens per hour. At cruising level it showed 170 to 184. But a Geiger counter does not see neutrons, and neutrons give a large part of the dose. So the real annual dose must be calculated, not just measured.</a:t>
+First, our measurements. We measured radiation on two flights with a home-made Geiger counter. Near the ground the device showed about 8 to 15 microroentgens per hour. At cruising level it showed 170 to 184. But a Geiger counter does not see neutrons, and neutrons give a large part of the dose. So the real annual dose must be calculated, not just measured.</a:t>
             </a:r>
             <a:endParaRPr lang="en-US" dirty="0"/>
           </a:p>
@@ -2013,7 +2013,7 @@
         </p:nvSpPr>
         <p:spPr>
           <a:xfrm>
-            <a:off x="1325880" y="1207008"/>
+            <a:off x="1325880" y="1115568"/>
             <a:ext cx="10317175" cy="0"/>
           </a:xfrm>
           <a:prstGeom prst="line">
@@ -2215,7 +2215,7 @@
         </p:nvSpPr>
         <p:spPr>
           <a:xfrm>
-            <a:off x="1325880" y="1207008"/>
+            <a:off x="1325880" y="1115568"/>
             <a:ext cx="10317175" cy="0"/>
           </a:xfrm>
           <a:prstGeom prst="line">
@@ -3348,7 +3348,7 @@
                           <a:ea typeface="Calibri" pitchFamily="34" charset="-122"/>
                           <a:cs typeface="Calibri" pitchFamily="34" charset="-120"/>
                         </a:rPr>
-                        <a:t>ЕС (Директива 2013/59/Евратом) [13]</a:t>
+                        <a:t>ЕС (Директива 2013/59/Евратом) [12]</a:t>
                       </a:r>
                       <a:endParaRPr lang="ru-RU" sz="1800" dirty="0">
                         <a:latin typeface="Calibri" charset="0"/>
@@ -3416,7 +3416,7 @@
                           <a:ea typeface="Calibri" pitchFamily="34" charset="-122"/>
                           <a:cs typeface="Calibri" pitchFamily="34" charset="-120"/>
                         </a:rPr>
-                        <a:t>Германия [14, 15]</a:t>
+                        <a:t>Германия [13, 14]</a:t>
                       </a:r>
                       <a:endParaRPr lang="ru-RU" sz="1800" dirty="0">
                         <a:latin typeface="Calibri" charset="0"/>
@@ -5630,25 +5630,6 @@
                   <a:schemeClr val="tx1"/>
                 </a:solidFill>
               </a:rPr>
-              <a:t>Громова Н. Ю., Шутов Н. Р. Исследование радиационного фона на борту воздушного судна в различных фазах полета и его влияние на радиационную безопасность летного состава : рукопись. – Ульяновск, 2026.</a:t>
-            </a:r>
-            <a:endParaRPr lang="ru-RU" sz="1400" dirty="0"/>
-          </a:p>
-          <a:p>
-            <a:pPr algn="just" marL="342900" indent="-342900">
-              <a:spcAft>
-                <a:spcPts val="400"/>
-              </a:spcAft>
-              <a:buSzPct val="100000"/>
-              <a:buFont typeface="+mj-lt"/>
-              <a:buAutoNum type="arabicPeriod" startAt="1"/>
-            </a:pPr>
-            <a:r>
-              <a:rPr lang="ru-RU" altLang="en-US" sz="1400" dirty="0">
-                <a:solidFill>
-                  <a:schemeClr val="tx1"/>
-                </a:solidFill>
-              </a:rPr>
               <a:t>ICRP Publication 132. Radiological Protection from Cosmic Radiation in Aviation // Annals of the ICRP. – 2016. – Vol. 45, № 1.</a:t>
             </a:r>
             <a:endParaRPr lang="ru-RU" sz="1400" dirty="0"/>
@@ -5904,7 +5885,7 @@
               </a:spcAft>
               <a:buSzPct val="100000"/>
               <a:buFont typeface="+mj-lt"/>
-              <a:buAutoNum type="arabicPeriod" startAt="9"/>
+              <a:buAutoNum type="arabicPeriod" startAt="8"/>
             </a:pPr>
             <a:r>
               <a:rPr lang="ru-RU" altLang="en-US" sz="1400" dirty="0">
@@ -5923,7 +5904,7 @@
               </a:spcAft>
               <a:buSzPct val="100000"/>
               <a:buFont typeface="+mj-lt"/>
-              <a:buAutoNum type="arabicPeriod" startAt="9"/>
+              <a:buAutoNum type="arabicPeriod" startAt="8"/>
             </a:pPr>
             <a:r>
               <a:rPr lang="ru-RU" altLang="en-US" sz="1400" dirty="0">
@@ -5942,7 +5923,7 @@
               </a:spcAft>
               <a:buSzPct val="100000"/>
               <a:buFont typeface="+mj-lt"/>
-              <a:buAutoNum type="arabicPeriod" startAt="9"/>
+              <a:buAutoNum type="arabicPeriod" startAt="8"/>
             </a:pPr>
             <a:r>
               <a:rPr lang="ru-RU" altLang="en-US" sz="1400" dirty="0">
@@ -5961,7 +5942,7 @@
               </a:spcAft>
               <a:buSzPct val="100000"/>
               <a:buFont typeface="+mj-lt"/>
-              <a:buAutoNum type="arabicPeriod" startAt="9"/>
+              <a:buAutoNum type="arabicPeriod" startAt="8"/>
             </a:pPr>
             <a:r>
               <a:rPr lang="ru-RU" altLang="en-US" sz="1400" dirty="0">
@@ -5980,7 +5961,7 @@
               </a:spcAft>
               <a:buSzPct val="100000"/>
               <a:buFont typeface="+mj-lt"/>
-              <a:buAutoNum type="arabicPeriod" startAt="9"/>
+              <a:buAutoNum type="arabicPeriod" startAt="8"/>
             </a:pPr>
             <a:r>
               <a:rPr lang="ru-RU" altLang="en-US" sz="1400" dirty="0">
@@ -5999,7 +5980,7 @@
               </a:spcAft>
               <a:buSzPct val="100000"/>
               <a:buFont typeface="+mj-lt"/>
-              <a:buAutoNum type="arabicPeriod" startAt="9"/>
+              <a:buAutoNum type="arabicPeriod" startAt="8"/>
             </a:pPr>
             <a:r>
               <a:rPr lang="ru-RU" altLang="en-US" sz="1400" dirty="0">
@@ -6018,7 +5999,7 @@
               </a:spcAft>
               <a:buSzPct val="100000"/>
               <a:buFont typeface="+mj-lt"/>
-              <a:buAutoNum type="arabicPeriod" startAt="9"/>
+              <a:buAutoNum type="arabicPeriod" startAt="8"/>
             </a:pPr>
             <a:r>
               <a:rPr lang="ru-RU" altLang="en-US" sz="1400" dirty="0">
@@ -6300,7 +6281,7 @@
                   <a:schemeClr val="tx1"/>
                 </a:solidFill>
               </a:rPr>
-              <a:t>На эшелоне радиационный фон в 11–⁠22 раза выше, чем у земли [1]</a:t>
+              <a:t>На эшелоне радиационный фон в 11–⁠22 раза выше, чем у земли (по нашим измерениям)</a:t>
             </a:r>
             <a:endParaRPr lang="ru-RU" sz="2400" dirty="0"/>
           </a:p>
@@ -6318,7 +6299,7 @@
                   <a:schemeClr val="tx1"/>
                 </a:solidFill>
               </a:rPr>
-              <a:t>С 1990 года МКРЗ относит облучение экипажей к профессиональному [2]</a:t>
+              <a:t>С 1990 года МКРЗ относит облучение экипажей к профессиональному [1]</a:t>
             </a:r>
             <a:endParaRPr lang="ru-RU" sz="2400" dirty="0"/>
           </a:p>
@@ -6336,7 +6317,7 @@
                   <a:schemeClr val="tx1"/>
                 </a:solidFill>
               </a:rPr>
-              <a:t>Специальные санитарные правила об облучении экипажей утратили силу в 2021 и 2025 годах [8, 9]</a:t>
+              <a:t>Специальные санитарные правила об облучении экипажей утратили силу в 2021 и 2025 годах [7, 8]</a:t>
             </a:r>
             <a:endParaRPr lang="ru-RU" sz="2400" dirty="0"/>
           </a:p>
@@ -6354,7 +6335,7 @@
                   <a:schemeClr val="tx1"/>
                 </a:solidFill>
               </a:rPr>
-              <a:t>По модельной оценке, при налёте 900 часов в год доза может составить около 3,6 мЗв – более 70 % предела [3]</a:t>
+              <a:t>По модельной оценке, при налёте 900 часов в год доза может составить около 3,6 мЗв – более 70 % предела [2]</a:t>
             </a:r>
             <a:endParaRPr lang="ru-RU" sz="2400" dirty="0"/>
           </a:p>
@@ -6495,7 +6476,7 @@
         <p:spPr>
           <a:xfrm>
             <a:off x="548640" y="1371600"/>
-            <a:ext cx="11094415" cy="1828800"/>
+            <a:ext cx="11094415" cy="2194560"/>
           </a:xfrm>
           <a:prstGeom prst="rect">
             <a:avLst/>
@@ -6578,7 +6559,7 @@
         </p:nvSpPr>
         <p:spPr>
           <a:xfrm>
-            <a:off x="548640" y="3337560"/>
+            <a:off x="548640" y="3611880"/>
             <a:ext cx="11094415" cy="411480"/>
           </a:xfrm>
           <a:prstGeom prst="rect">
@@ -6614,8 +6595,8 @@
         </p:nvSpPr>
         <p:spPr>
           <a:xfrm>
-            <a:off x="548640" y="3794760"/>
-            <a:ext cx="11094415" cy="2468880"/>
+            <a:off x="548640" y="4069080"/>
+            <a:ext cx="11094415" cy="2240280"/>
           </a:xfrm>
           <a:prstGeom prst="rect">
             <a:avLst/>
@@ -6842,7 +6823,7 @@
                   <a:schemeClr val="tx1"/>
                 </a:solidFill>
               </a:rPr>
-              <a:t>Таблица 1 – Показания дозиметра на этапах полёта [1]</a:t>
+              <a:t>Таблица 1 – Показания дозиметра на этапах полёта</a:t>
             </a:r>
             <a:endParaRPr lang="ru-RU" sz="2000" dirty="0"/>
           </a:p>
@@ -7098,7 +7079,7 @@
                           <a:ea typeface="Calibri" pitchFamily="34" charset="-122"/>
                           <a:cs typeface="Calibri" pitchFamily="34" charset="-120"/>
                         </a:rPr>
-                        <a:t>Показания, мкР/ч</a:t>
+                        <a:t>Средние показания, мкР/ч</a:t>
                       </a:r>
                       <a:endParaRPr lang="ru-RU" sz="1800" dirty="0">
                         <a:latin typeface="Calibri" charset="0"/>
@@ -8832,7 +8813,7 @@
                   <a:schemeClr val="tx1"/>
                 </a:solidFill>
               </a:rPr>
-              <a:t>поэтому годовую дозу определяют расчётом по маршрутам и времени полёта [3]</a:t>
+              <a:t>поэтому годовую дозу определяют расчётом по маршрутам и времени полёта [2]</a:t>
             </a:r>
             <a:endParaRPr lang="ru-RU" sz="2200" dirty="0"/>
           </a:p>
@@ -9216,7 +9197,7 @@
                   <a:schemeClr val="tx1"/>
                 </a:solidFill>
               </a:rPr>
-              <a:t>Рисунок 1 – Показания дозиметра: а – перед взлётом (13,2 мкР/ч); б – на эшелоне FL350 (194,8 мкР/ч); в – после посадки (9,9 мкР/ч); г – точка NILRA на пилотажном дисплее</a:t>
+              <a:t>Рисунок 1 – Текущие показания дозиметра: а – перед взлётом (13,2 мкР/ч); б – на эшелоне FL350 (194,8 мкР/ч); в – после посадки (9,9 мкР/ч); г – точка NILRA на пилотажном дисплее</a:t>
             </a:r>
             <a:endParaRPr lang="ru-RU" sz="1600" dirty="0"/>
           </a:p>
@@ -10216,9 +10197,9 @@
             <a:tbl>
               <a:tblPr/>
               <a:tblGrid>
-                <a:gridCol w="3749040"/>
-                <a:gridCol w="4572000"/>
-                <a:gridCol w="2770632"/>
+                <a:gridCol w="4251960"/>
+                <a:gridCol w="4526280"/>
+                <a:gridCol w="2313432"/>
               </a:tblGrid>
               <a:tr h="0">
                 <a:tc>
@@ -10574,7 +10555,7 @@
                           <a:ea typeface="Calibri" pitchFamily="34" charset="-122"/>
                           <a:cs typeface="Calibri" pitchFamily="34" charset="-120"/>
                         </a:rPr>
-                        <a:t>утратил силу с 01.01.2021 [8]</a:t>
+                        <a:t>утратил силу с 01.01.2021 [7]</a:t>
                       </a:r>
                       <a:endParaRPr lang="ru-RU" sz="2000" dirty="0">
                         <a:latin typeface="Calibri" charset="0"/>
@@ -10777,7 +10758,7 @@
                           <a:ea typeface="Calibri" pitchFamily="34" charset="-122"/>
                           <a:cs typeface="Calibri" pitchFamily="34" charset="-120"/>
                         </a:rPr>
-                        <a:t>утратил силу с 01.09.2025 [9]</a:t>
+                        <a:t>утратил силу с 01.09.2025 [8]</a:t>
                       </a:r>
                       <a:endParaRPr lang="ru-RU" sz="2000" dirty="0">
                         <a:latin typeface="Calibri" charset="0"/>
@@ -10977,7 +10958,7 @@
                           <a:ea typeface="Calibri" pitchFamily="34" charset="-122"/>
                           <a:cs typeface="Calibri" pitchFamily="34" charset="-120"/>
                         </a:rPr>
-                        <a:t>действует [6]</a:t>
+                        <a:t>действует [5]</a:t>
                       </a:r>
                       <a:endParaRPr lang="ru-RU" sz="2000" dirty="0">
                         <a:latin typeface="Calibri" charset="0"/>
@@ -11246,7 +11227,7 @@
                   <a:schemeClr val="tx1"/>
                 </a:solidFill>
               </a:rPr>
-              <a:t>Не обнаружен порядок передачи доз экипажей в ЕСКИД, хотя ст. 18 закона № 3‑ФЗ требует учёта доз [4]</a:t>
+              <a:t>Не обнаружен порядок передачи доз экипажей в ЕСКИД, хотя ст. 18 закона № 3‑ФЗ требует учёта доз [3]</a:t>
             </a:r>
             <a:endParaRPr lang="ru-RU" sz="2400" dirty="0"/>
           </a:p>
@@ -11414,7 +11395,7 @@
                   <a:schemeClr val="tx1"/>
                 </a:solidFill>
               </a:rPr>
-              <a:t>СОУТ проводится в одном контрольном полёте и не отражает годовую дозу на разных маршрутах [11]</a:t>
+              <a:t>СОУТ проводится в одном контрольном полёте и не отражает годовую дозу на разных маршрутах [10]</a:t>
             </a:r>
             <a:endParaRPr lang="ru-RU" sz="2400" dirty="0"/>
           </a:p>
@@ -11432,7 +11413,7 @@
                   <a:schemeClr val="tx1"/>
                 </a:solidFill>
               </a:rPr>
-              <a:t>Лимиты налёта (800 ч, с согласия – 900 ч в год) не учитывают дозу; согласие даётся без знания своей дозы [12]</a:t>
+              <a:t>Лимиты налёта (800 ч, с согласия – 900 ч в год) не учитывают дозу; согласие даётся без знания своей дозы [11]</a:t>
             </a:r>
             <a:endParaRPr lang="ru-RU" sz="2400" dirty="0"/>
           </a:p>

--- a/Доклад_красивый.pptx
+++ b/Доклад_красивый.pptx
@@ -21,9 +21,12 @@
     <p:sldId id="269" r:id="rId15"/>
     <p:sldId id="270" r:id="rId16"/>
     <p:sldId id="271" r:id="rId17"/>
+    <p:sldId id="272" r:id="rId18"/>
+    <p:sldId id="273" r:id="rId19"/>
+    <p:sldId id="274" r:id="rId20"/>
   </p:sldIdLst>
   <p:notesMasterIdLst>
-    <p:notesMasterId r:id="rId18"/>
+    <p:notesMasterId r:id="rId21"/>
   </p:notesMasterIdLst>
   <p:sldSz cx="12192000" cy="6858000"/>
   <p:notesSz cx="6858000" cy="12192000"/>
@@ -606,8 +609,8 @@
           <a:p>
             <a:r>
               <a:rPr lang="en-US" dirty="0"/>
-              <a:t>NIKITA:
-Thank you, Ilya. In the European Union and in Germany the system is different. If a crew member may get more than 1 millisievert a year, the airline must calculate the dose. It must take the dose into account in work schedules. It must tell the worker his or her dose. For a pregnant crew member, the dose to the baby must not be more than 1 millisievert. In Russia these rules do not exist yet.</a:t>
+              <a:t>ILYA:
+We found several gaps. First, apart from that one clause, we did not find any special rules for aircrew. Second, we did not find a rule that says who must calculate the dose of each crew member, or how. Third, the Federal Law requires records of individual doses, but we did not find a way for crew doses to get into the state dose register. As a result, nobody can check if a person stays under the limit.</a:t>
             </a:r>
             <a:endParaRPr lang="en-US" dirty="0"/>
           </a:p>
@@ -695,8 +698,8 @@
           <a:p>
             <a:r>
               <a:rPr lang="en-US" dirty="0"/>
-              <a:t>NIKITA:
-So what do we propose? First, the sanitary rules should say: if a crew member may get more than 1 millisievert a year, the airline must calculate the personal dose, appoint a responsible person and keep records. Second, there should be a control level below the limit. When a person reaches it, the airline must change his or her schedule. Third, the sanitary service should approve one method to calculate the dose from real routes, flight levels and flight time. Ilya will continue.</a:t>
+              <a:t>ILYA:
+This is Article 18 of the Federal Law on radiation safety. It says that individual doses must be recorded, also doses from natural radiation. Cosmic radiation is natural radiation. So the law asks for records, but there is no special procedure for aircrew.</a:t>
             </a:r>
             <a:endParaRPr lang="en-US" dirty="0"/>
           </a:p>
@@ -785,7 +788,7 @@
             <a:r>
               <a:rPr lang="en-US" dirty="0"/>
               <a:t>ILYA:
-We also propose four more steps. Crew doses should go into the state dose register, and each worker should get his or her dose every year. The order of the Ministry of Transport should include the dose in work schedules. A crew member should agree to 900 hours only after he or she knows his or her dose. A pregnant crew member should be able to move to ground work or to low-dose flights. And the rules for checking working conditions should include cosmic radiation when they are revised before 2029.</a:t>
+There are more gaps. The check of working conditions is done on one sample flight. It cannot show the dose for a whole year on different routes. Flight time limits — 800 hours, or 900 with consent — do not take the dose into account. A crew member agrees to fly more without knowing his or her dose. The employer must tell workers about risks in general, but no rule says it must tell each crew member his or her personal dose. And for pregnant crew members there is only the general protection of the Labour Code. Nikita will now talk about foreign experience.</a:t>
             </a:r>
             <a:endParaRPr lang="en-US" dirty="0"/>
           </a:p>
@@ -873,8 +876,8 @@
           <a:p>
             <a:r>
               <a:rPr lang="en-US" dirty="0"/>
-              <a:t>ILYA:
-To sum up. Russia has a dose limit for aircrew: 5 millisieverts a year. But the law does not say how to keep to this limit. After the special rules were cancelled, nobody has to calculate and record the dose of each crew member. We propose to fix this, using the European rules as a model.</a:t>
+              <a:t>NIKITA:
+Thank you, Ilya. This is the European rule, Article 35, paragraph 3 of the Euratom Directive. If a crew member may get more than 1 millisievert a year, the airline must assess the dose, take it into account in work schedules, and tell the worker his or her dose.</a:t>
             </a:r>
             <a:endParaRPr lang="en-US" dirty="0"/>
           </a:p>
@@ -962,8 +965,8 @@
           <a:p>
             <a:r>
               <a:rPr lang="en-US" dirty="0"/>
-              <a:t>ILYA:
-Here is the list of our sources.</a:t>
+              <a:t>NIKITA:
+This table compares Russia, the European Union and Germany. In Europe and in Germany the dose is calculated for each person. It is used in work schedules, and the worker gets his or her dose. For a pregnant crew member, the dose to the baby must not be more than 1 millisievert. In Russia we did not find such rules.</a:t>
             </a:r>
             <a:endParaRPr lang="en-US" dirty="0"/>
           </a:p>
@@ -1051,8 +1054,8 @@
           <a:p>
             <a:r>
               <a:rPr lang="en-US" dirty="0"/>
-              <a:t>ILYA:
-And the rest of the list.</a:t>
+              <a:t>NIKITA:
+So what do we propose? First, the sanitary rules should say: if a crew member may get more than 1 millisievert a year, the airline must calculate the personal dose, appoint a responsible person and keep records. Second, there should be a control level below the limit. When a person reaches it, the airline must change his or her schedule. Third, the sanitary service should approve one method to calculate the dose from real routes, flight levels and flight time. Ilya will continue.</a:t>
             </a:r>
             <a:endParaRPr lang="en-US" dirty="0"/>
           </a:p>
@@ -1141,7 +1144,7 @@
             <a:r>
               <a:rPr lang="en-US" dirty="0"/>
               <a:t>ILYA:
-Thank you for your attention. We are ready to answer your questions.</a:t>
+We also propose four more steps. Crew doses should go into the state dose register, and each worker should get his or her dose every year. The order of the Ministry of Transport should include the dose in work schedules. A crew member should agree to 900 hours only after he or she knows his or her dose. A pregnant crew member should be able to move to ground work or to low-dose flights. And the rules for checking working conditions should include cosmic radiation when they are revised before 2029.</a:t>
             </a:r>
             <a:endParaRPr lang="en-US" dirty="0"/>
           </a:p>
@@ -1165,6 +1168,273 @@
             <a:fld id="{F7021451-1387-4CA6-816F-3879F97B5CBC}" type="slidenum">
               <a:rPr lang="en-US"/>
               <a:t>16</a:t>
+            </a:fld>
+            <a:endParaRPr lang="en-US"/>
+          </a:p>
+        </p:txBody>
+      </p:sp>
+    </p:spTree>
+    <p:extLst>
+      <p:ext uri="{BB962C8B-B14F-4D97-AF65-F5344CB8AC3E}">
+        <p14:creationId xmlns:p14="http://schemas.microsoft.com/office/powerpoint/2010/main" val="1024086991"/>
+      </p:ext>
+    </p:extLst>
+  </p:cSld>
+  <p:clrMapOvr>
+    <a:masterClrMapping/>
+  </p:clrMapOvr>
+</p:notes>
+</file>
+
+<file path=ppt/notesSlides/notesSlide17.xml><?xml version="1.0" encoding="utf-8"?>
+<p:notes xmlns:a="http://schemas.openxmlformats.org/drawingml/2006/main" xmlns:r="http://schemas.openxmlformats.org/officeDocument/2006/relationships" xmlns:p="http://schemas.openxmlformats.org/presentationml/2006/main">
+  <p:cSld>
+    <p:spTree>
+      <p:nvGrpSpPr>
+        <p:cNvPr id="1" name=""/>
+        <p:cNvGrpSpPr/>
+        <p:nvPr/>
+      </p:nvGrpSpPr>
+      <p:grpSpPr>
+        <a:xfrm>
+          <a:off x="0" y="0"/>
+          <a:ext cx="0" cy="0"/>
+          <a:chOff x="0" y="0"/>
+          <a:chExt cx="0" cy="0"/>
+        </a:xfrm>
+      </p:grpSpPr>
+      <p:sp>
+        <p:nvSpPr>
+          <p:cNvPr id="2" name="Slide Image Placeholder 1"/>
+          <p:cNvSpPr>
+            <a:spLocks noGrp="1" noRot="1" noChangeAspect="1"/>
+          </p:cNvSpPr>
+          <p:nvPr>
+            <p:ph type="sldImg"/>
+          </p:nvPr>
+        </p:nvSpPr>
+        <p:spPr/>
+      </p:sp>
+      <p:sp>
+        <p:nvSpPr>
+          <p:cNvPr id="3" name="Notes Placeholder 2"/>
+          <p:cNvSpPr>
+            <a:spLocks noGrp="1"/>
+          </p:cNvSpPr>
+          <p:nvPr>
+            <p:ph type="body" idx="1"/>
+          </p:nvPr>
+        </p:nvSpPr>
+        <p:spPr/>
+        <p:txBody>
+          <a:bodyPr/>
+          <a:lstStyle/>
+          <a:p>
+            <a:r>
+              <a:rPr lang="en-US" dirty="0"/>
+              <a:t>ILYA:
+To sum up. Russia has a dose limit for aircrew: 5 millisieverts a year. But we did not find any rule that says how to keep to this limit: who must calculate each crew member's dose and how to record it. The check of working conditions and the flight time limits do not solve this. We propose to fix this, using the European rules as a model.</a:t>
+            </a:r>
+            <a:endParaRPr lang="en-US" dirty="0"/>
+          </a:p>
+        </p:txBody>
+      </p:sp>
+      <p:sp>
+        <p:nvSpPr>
+          <p:cNvPr id="4" name="Slide Number Placeholder 3"/>
+          <p:cNvSpPr>
+            <a:spLocks noGrp="1"/>
+          </p:cNvSpPr>
+          <p:nvPr>
+            <p:ph type="sldNum" sz="quarter" idx="10"/>
+          </p:nvPr>
+        </p:nvSpPr>
+        <p:spPr/>
+        <p:txBody>
+          <a:bodyPr/>
+          <a:lstStyle/>
+          <a:p>
+            <a:fld id="{F7021451-1387-4CA6-816F-3879F97B5CBC}" type="slidenum">
+              <a:rPr lang="en-US"/>
+              <a:t>17</a:t>
+            </a:fld>
+            <a:endParaRPr lang="en-US"/>
+          </a:p>
+        </p:txBody>
+      </p:sp>
+    </p:spTree>
+    <p:extLst>
+      <p:ext uri="{BB962C8B-B14F-4D97-AF65-F5344CB8AC3E}">
+        <p14:creationId xmlns:p14="http://schemas.microsoft.com/office/powerpoint/2010/main" val="1024086991"/>
+      </p:ext>
+    </p:extLst>
+  </p:cSld>
+  <p:clrMapOvr>
+    <a:masterClrMapping/>
+  </p:clrMapOvr>
+</p:notes>
+</file>
+
+<file path=ppt/notesSlides/notesSlide18.xml><?xml version="1.0" encoding="utf-8"?>
+<p:notes xmlns:a="http://schemas.openxmlformats.org/drawingml/2006/main" xmlns:r="http://schemas.openxmlformats.org/officeDocument/2006/relationships" xmlns:p="http://schemas.openxmlformats.org/presentationml/2006/main">
+  <p:cSld>
+    <p:spTree>
+      <p:nvGrpSpPr>
+        <p:cNvPr id="1" name=""/>
+        <p:cNvGrpSpPr/>
+        <p:nvPr/>
+      </p:nvGrpSpPr>
+      <p:grpSpPr>
+        <a:xfrm>
+          <a:off x="0" y="0"/>
+          <a:ext cx="0" cy="0"/>
+          <a:chOff x="0" y="0"/>
+          <a:chExt cx="0" cy="0"/>
+        </a:xfrm>
+      </p:grpSpPr>
+      <p:sp>
+        <p:nvSpPr>
+          <p:cNvPr id="2" name="Slide Image Placeholder 1"/>
+          <p:cNvSpPr>
+            <a:spLocks noGrp="1" noRot="1" noChangeAspect="1"/>
+          </p:cNvSpPr>
+          <p:nvPr>
+            <p:ph type="sldImg"/>
+          </p:nvPr>
+        </p:nvSpPr>
+        <p:spPr/>
+      </p:sp>
+      <p:sp>
+        <p:nvSpPr>
+          <p:cNvPr id="3" name="Notes Placeholder 2"/>
+          <p:cNvSpPr>
+            <a:spLocks noGrp="1"/>
+          </p:cNvSpPr>
+          <p:nvPr>
+            <p:ph type="body" idx="1"/>
+          </p:nvPr>
+        </p:nvSpPr>
+        <p:spPr/>
+        <p:txBody>
+          <a:bodyPr/>
+          <a:lstStyle/>
+          <a:p>
+            <a:r>
+              <a:rPr lang="en-US" dirty="0"/>
+              <a:t>ILYA:
+Here is the list of our sources.</a:t>
+            </a:r>
+            <a:endParaRPr lang="en-US" dirty="0"/>
+          </a:p>
+        </p:txBody>
+      </p:sp>
+      <p:sp>
+        <p:nvSpPr>
+          <p:cNvPr id="4" name="Slide Number Placeholder 3"/>
+          <p:cNvSpPr>
+            <a:spLocks noGrp="1"/>
+          </p:cNvSpPr>
+          <p:nvPr>
+            <p:ph type="sldNum" sz="quarter" idx="10"/>
+          </p:nvPr>
+        </p:nvSpPr>
+        <p:spPr/>
+        <p:txBody>
+          <a:bodyPr/>
+          <a:lstStyle/>
+          <a:p>
+            <a:fld id="{F7021451-1387-4CA6-816F-3879F97B5CBC}" type="slidenum">
+              <a:rPr lang="en-US"/>
+              <a:t>18</a:t>
+            </a:fld>
+            <a:endParaRPr lang="en-US"/>
+          </a:p>
+        </p:txBody>
+      </p:sp>
+    </p:spTree>
+    <p:extLst>
+      <p:ext uri="{BB962C8B-B14F-4D97-AF65-F5344CB8AC3E}">
+        <p14:creationId xmlns:p14="http://schemas.microsoft.com/office/powerpoint/2010/main" val="1024086991"/>
+      </p:ext>
+    </p:extLst>
+  </p:cSld>
+  <p:clrMapOvr>
+    <a:masterClrMapping/>
+  </p:clrMapOvr>
+</p:notes>
+</file>
+
+<file path=ppt/notesSlides/notesSlide19.xml><?xml version="1.0" encoding="utf-8"?>
+<p:notes xmlns:a="http://schemas.openxmlformats.org/drawingml/2006/main" xmlns:r="http://schemas.openxmlformats.org/officeDocument/2006/relationships" xmlns:p="http://schemas.openxmlformats.org/presentationml/2006/main">
+  <p:cSld>
+    <p:spTree>
+      <p:nvGrpSpPr>
+        <p:cNvPr id="1" name=""/>
+        <p:cNvGrpSpPr/>
+        <p:nvPr/>
+      </p:nvGrpSpPr>
+      <p:grpSpPr>
+        <a:xfrm>
+          <a:off x="0" y="0"/>
+          <a:ext cx="0" cy="0"/>
+          <a:chOff x="0" y="0"/>
+          <a:chExt cx="0" cy="0"/>
+        </a:xfrm>
+      </p:grpSpPr>
+      <p:sp>
+        <p:nvSpPr>
+          <p:cNvPr id="2" name="Slide Image Placeholder 1"/>
+          <p:cNvSpPr>
+            <a:spLocks noGrp="1" noRot="1" noChangeAspect="1"/>
+          </p:cNvSpPr>
+          <p:nvPr>
+            <p:ph type="sldImg"/>
+          </p:nvPr>
+        </p:nvSpPr>
+        <p:spPr/>
+      </p:sp>
+      <p:sp>
+        <p:nvSpPr>
+          <p:cNvPr id="3" name="Notes Placeholder 2"/>
+          <p:cNvSpPr>
+            <a:spLocks noGrp="1"/>
+          </p:cNvSpPr>
+          <p:nvPr>
+            <p:ph type="body" idx="1"/>
+          </p:nvPr>
+        </p:nvSpPr>
+        <p:spPr/>
+        <p:txBody>
+          <a:bodyPr/>
+          <a:lstStyle/>
+          <a:p>
+            <a:r>
+              <a:rPr lang="en-US" dirty="0"/>
+              <a:t>ILYA:
+Thank you for your attention. We are ready to answer your questions.</a:t>
+            </a:r>
+            <a:endParaRPr lang="en-US" dirty="0"/>
+          </a:p>
+        </p:txBody>
+      </p:sp>
+      <p:sp>
+        <p:nvSpPr>
+          <p:cNvPr id="4" name="Slide Number Placeholder 3"/>
+          <p:cNvSpPr>
+            <a:spLocks noGrp="1"/>
+          </p:cNvSpPr>
+          <p:nvPr>
+            <p:ph type="sldNum" sz="quarter" idx="10"/>
+          </p:nvPr>
+        </p:nvSpPr>
+        <p:spPr/>
+        <p:txBody>
+          <a:bodyPr/>
+          <a:lstStyle/>
+          <a:p>
+            <a:fld id="{F7021451-1387-4CA6-816F-3879F97B5CBC}" type="slidenum">
+              <a:rPr lang="en-US"/>
+              <a:t>19</a:t>
             </a:fld>
             <a:endParaRPr lang="en-US"/>
           </a:p>
@@ -1230,7 +1500,7 @@
             <a:r>
               <a:rPr lang="en-US" dirty="0"/>
               <a:t>NIKITA:
-Why is this topic important? At cruising level, radiation is 11 to 22 times higher than on the ground. Since 1990, international experts have treated this exposure as part of the job. We checked this with our own measurements on board. Special sanitary rules for aircrew were cancelled in 2021 and 2025. And with 900 flight hours a year, the dose can reach about 3.6 millisieverts. That is more than 70 percent of the limit. So our question is simple: does the law really protect each crew member?</a:t>
+Why is this topic important? Our measurements show that at cruising level radiation is 11 to 22 times higher than on the ground. Since 1990, the International Commission on Radiological Protection has treated this exposure as part of the job. Two sanitary rules with special parts on aircrew were cancelled in 2021 and 2025. And with 900 flight hours a year, the dose can reach about 3.6 millisieverts. That is more than 70 percent of the limit. So our question is simple: does the law really protect each crew member?</a:t>
             </a:r>
             <a:endParaRPr lang="en-US" dirty="0"/>
           </a:p>
@@ -1319,7 +1589,7 @@
             <a:r>
               <a:rPr lang="en-US" dirty="0"/>
               <a:t>NIKITA:
-Our aim is to find gaps in the law and to suggest how to close them. We used legal analysis, history of the law and comparison with foreign law. We had four tasks: to study the current rules, to see how they changed, to compare them with the European Union and Germany, and to make proposals.</a:t>
+Here you can see where this radiation comes from. Particles from the Sun and from deep space hit the atmosphere and create many secondary particles, for example neutrons. The higher we fly, the more radiation we get. On the right you can see how radiation can damage cells and DNA in the human body.</a:t>
             </a:r>
             <a:endParaRPr lang="en-US" dirty="0"/>
           </a:p>
@@ -1408,7 +1678,7 @@
             <a:r>
               <a:rPr lang="en-US" dirty="0"/>
               <a:t>NIKITA:
-First, our measurements. We measured radiation on two flights with a home-made Geiger counter. Near the ground the device showed about 8 to 15 microroentgens per hour. At cruising level it showed 170 to 184. But a Geiger counter does not see neutrons, and neutrons give a large part of the dose. So the real annual dose must be calculated, not just measured.</a:t>
+Our aim is to find gaps in the law and to suggest how to close them. We used legal analysis, the history of the law and comparison with foreign law. We had four tasks: to study the current rules, to see how they changed, to compare them with the European Union and Germany, and to make proposals.</a:t>
             </a:r>
             <a:endParaRPr lang="en-US" dirty="0"/>
           </a:p>
@@ -1497,7 +1767,7 @@
             <a:r>
               <a:rPr lang="en-US" dirty="0"/>
               <a:t>NIKITA:
-Here are the readings on the Novokuznetsk – Irkutsk flight: 13.2 before take-off, about 195 at flight level three-five-zero, and 9.9 after landing. Now Ilya will explain how the law regulates this.</a:t>
+First, our measurements. We measured radiation on two flights with a home-made Geiger counter. Near the ground the average reading was about 8 to 15 microroentgens per hour. At cruising level the average was 170 to 184. But a Geiger counter does not see neutrons, and neutrons give a large part of the dose. So the real annual dose must be calculated, not just measured.</a:t>
             </a:r>
             <a:endParaRPr lang="en-US" dirty="0"/>
           </a:p>
@@ -1585,8 +1855,8 @@
           <a:p>
             <a:r>
               <a:rPr lang="en-US" dirty="0"/>
-              <a:t>ILYA:
-Thank you, Nikita. This diagram shows the current system. At the top are federal laws: the law on radiation safety, the Air Code and the Labour Code. Below them are three groups of rules. The radiation safety standards set the limit: 5 millisieverts a year. The Ministry of Labour sets the rules for checking working conditions. The Ministry of Transport limits flight time. But nobody is told who must calculate the dose of each person.</a:t>
+              <a:t>NIKITA:
+Here are single readings from the Novokuznetsk – Irkutsk flight: 13.2 before take-off, about 195 at flight level three-five-zero, and 9.9 after landing. These are single readings, so they are a little different from the averages in the table. Now Ilya will explain how the law regulates this.</a:t>
             </a:r>
             <a:endParaRPr lang="en-US" dirty="0"/>
           </a:p>
@@ -1675,7 +1945,7 @@
             <a:r>
               <a:rPr lang="en-US" dirty="0"/>
               <a:t>ILYA:
-This table shows how the rules changed. Two sanitary rules had special parts about aircrew. The first was cancelled in 2021, the second in 2025. Only one short clause is left. It says that aircrew exposure is limited to 5 millisieverts a year. So the limit is still there, but the rules on how to keep to it are gone.</a:t>
+Thank you, Nikita. This diagram shows the current system. At the top are federal laws: the law on radiation safety, the Air Code and the Labour Code. Below them are three groups of rules. The radiation safety standards set the limit: 5 millisieverts a year. The Ministry of Labour sets the rules for checking working conditions. The Ministry of Transport limits flight time. But no rule that we found says who must calculate the dose of each person, and how.</a:t>
             </a:r>
             <a:endParaRPr lang="en-US" dirty="0"/>
           </a:p>
@@ -1764,7 +2034,7 @@
             <a:r>
               <a:rPr lang="en-US" dirty="0"/>
               <a:t>ILYA:
-We found several gaps. First, apart from that one clause, we did not find any special rules for aircrew. Second, the law does not say who must calculate the dose of each crew member, or how. Third, the Federal Law requires records of individual doses, but we did not find a way for crew doses to get into the state dose register. As a result, nobody can check if a person stays under the limit.</a:t>
+Here are the exact texts. Clause 4.1 of the radiation safety standards sets the limit of 5 millisieverts a year. Clause 4.3 says that aircrew exposure is limited in the same way. And Article 56 of the Air Code says that the crew includes the flight crew and the cabin crew. So the limit covers pilots and flight attendants.</a:t>
             </a:r>
             <a:endParaRPr lang="en-US" dirty="0"/>
           </a:p>
@@ -1853,7 +2123,7 @@
             <a:r>
               <a:rPr lang="en-US" dirty="0"/>
               <a:t>ILYA:
-There are more gaps. The check of working conditions is done during one test flight. It cannot show the dose for a whole year on different routes. Flight time limits — 800 hours, or 900 with consent — do not take the dose into account. A crew member agrees to fly more without knowing his or her dose. Nobody has to tell a worker their personal dose. And there is no special dose rule for pregnant crew members. Nikita will now talk about foreign experience.</a:t>
+This table shows how the rules changed. Two sanitary rules had special parts about aircrew. The first was cancelled in 2021, the second in 2025. Only one short clause is left. It says that aircrew exposure is limited to 5 millisieverts a year. So the limit is still there, but we did not find any rules on how to keep to it.</a:t>
             </a:r>
             <a:endParaRPr lang="en-US" dirty="0"/>
           </a:p>
@@ -2696,8 +2966,8 @@
         </p:nvSpPr>
         <p:spPr>
           <a:xfrm>
-            <a:off x="1463040" y="274320"/>
-            <a:ext cx="9262872" cy="1143000"/>
+            <a:off x="1417320" y="274320"/>
+            <a:ext cx="9692640" cy="1417320"/>
           </a:xfrm>
           <a:prstGeom prst="rect">
             <a:avLst/>
@@ -2716,14 +2986,14 @@
               <a:buNone/>
             </a:pPr>
             <a:r>
-              <a:rPr lang="ru-RU" altLang="en-US" sz="1400" dirty="0">
+              <a:rPr lang="ru-RU" altLang="en-US" sz="1300" dirty="0">
                 <a:solidFill>
                   <a:schemeClr val="tx1"/>
                 </a:solidFill>
               </a:rPr>
               <a:t>МИНИСТЕРСТВО ТРАНСПОРТА РОССИЙСКОЙ ФЕДЕРАЦИИ</a:t>
             </a:r>
-            <a:endParaRPr lang="ru-RU" sz="1400" dirty="0"/>
+            <a:endParaRPr lang="ru-RU" sz="1300" dirty="0"/>
           </a:p>
           <a:p>
             <a:pPr algn="ctr" indent="0" marL="0">
@@ -2733,14 +3003,14 @@
               <a:buNone/>
             </a:pPr>
             <a:r>
-              <a:rPr lang="ru-RU" altLang="en-US" sz="1400" dirty="0">
+              <a:rPr lang="ru-RU" altLang="en-US" sz="1300" dirty="0">
                 <a:solidFill>
                   <a:schemeClr val="tx1"/>
                 </a:solidFill>
               </a:rPr>
-              <a:t>ФЕДЕРАЛЬНОЕ ГОСУДАРСТВЕННОЕ БЮДЖЕТНОЕ ОБРАЗОВАТЕЛЬНОЕ УЧРЕЖДЕНИЕ ВЫСШЕГО ОБРАЗОВАНИЯ</a:t>
-            </a:r>
-            <a:endParaRPr lang="ru-RU" sz="1400" dirty="0"/>
+              <a:t>ФЕДЕРАЛЬНОЕ АГЕНТСТВО ВОЗДУШНОГО ТРАНСПОРТА</a:t>
+            </a:r>
+            <a:endParaRPr lang="ru-RU" sz="1300" dirty="0"/>
           </a:p>
           <a:p>
             <a:pPr algn="ctr" indent="0" marL="0">
@@ -2750,14 +3020,14 @@
               <a:buNone/>
             </a:pPr>
             <a:r>
-              <a:rPr lang="ru-RU" altLang="en-US" sz="1400" dirty="0">
+              <a:rPr lang="ru-RU" altLang="en-US" sz="1300" dirty="0">
                 <a:solidFill>
                   <a:schemeClr val="tx1"/>
                 </a:solidFill>
               </a:rPr>
-              <a:t>«УЛЬЯНОВСКИЙ ИНСТИТУТ ГРАЖДАНСКОЙ АВИАЦИИ</a:t>
-            </a:r>
-            <a:endParaRPr lang="ru-RU" sz="1400" dirty="0"/>
+              <a:t>ФЕДЕРАЛЬНОЕ ГОСУДАРСТВЕННОЕ БЮДЖЕТНОЕ ОБРАЗОВАТЕЛЬНОЕ УЧРЕЖДЕНИЕ ВЫСШЕГО ОБРАЗОВАНИЯ</a:t>
+            </a:r>
+            <a:endParaRPr lang="ru-RU" sz="1300" dirty="0"/>
           </a:p>
           <a:p>
             <a:pPr algn="ctr" indent="0" marL="0">
@@ -2767,14 +3037,14 @@
               <a:buNone/>
             </a:pPr>
             <a:r>
-              <a:rPr lang="ru-RU" altLang="en-US" sz="1400" dirty="0">
+              <a:rPr lang="ru-RU" altLang="en-US" sz="1300" dirty="0">
                 <a:solidFill>
                   <a:schemeClr val="tx1"/>
                 </a:solidFill>
               </a:rPr>
-              <a:t>ИМЕНИ ГЛАВНОГО МАРШАЛА АВИАЦИИ Б. П. БУГАЕВА»</a:t>
-            </a:r>
-            <a:endParaRPr lang="ru-RU" sz="1400" dirty="0"/>
+              <a:t>«УЛЬЯНОВСКИЙ ИНСТИТУТ ГРАЖДАНСКОЙ АВИАЦИИ ИМЕНИ ГЛАВНОГО МАРШАЛА АВИАЦИИ Б. П. БУГАЕВА»</a:t>
+            </a:r>
+            <a:endParaRPr lang="ru-RU" sz="1300" dirty="0"/>
           </a:p>
         </p:txBody>
       </p:sp>
@@ -2786,7 +3056,7 @@
         </p:nvSpPr>
         <p:spPr>
           <a:xfrm>
-            <a:off x="1463040" y="1508760"/>
+            <a:off x="1463040" y="1783080"/>
             <a:ext cx="9262872" cy="365760"/>
           </a:xfrm>
           <a:prstGeom prst="rect">
@@ -2822,7 +3092,7 @@
         </p:nvSpPr>
         <p:spPr>
           <a:xfrm>
-            <a:off x="1463040" y="2148840"/>
+            <a:off x="1463040" y="2240280"/>
             <a:ext cx="9262872" cy="411480"/>
           </a:xfrm>
           <a:prstGeom prst="rect">
@@ -2858,7 +3128,7 @@
         </p:nvSpPr>
         <p:spPr>
           <a:xfrm>
-            <a:off x="731520" y="2606040"/>
+            <a:off x="731520" y="2651760"/>
             <a:ext cx="10725912" cy="1097280"/>
           </a:xfrm>
           <a:prstGeom prst="rect">
@@ -3124,6 +3394,750 @@
                   <a:schemeClr val="tx2"/>
                 </a:solidFill>
               </a:rPr>
+              <a:t>Выявленные пробелы</a:t>
+            </a:r>
+            <a:endParaRPr lang="ru-RU" sz="2800" dirty="0"/>
+          </a:p>
+        </p:txBody>
+      </p:sp>
+      <p:sp>
+        <p:nvSpPr>
+          <p:cNvPr id="3" name="Text 1"/>
+          <p:cNvSpPr/>
+          <p:nvPr>
+            <p:ph idx="103" type="body" hasCustomPrompt="1"/>
+          </p:nvPr>
+        </p:nvSpPr>
+        <p:spPr>
+          <a:xfrm>
+            <a:off x="548640" y="1371600"/>
+            <a:ext cx="11094415" cy="4846320"/>
+          </a:xfrm>
+          <a:prstGeom prst="rect">
+            <a:avLst/>
+          </a:prstGeom>
+          <a:noFill/>
+          <a:ln/>
+        </p:spPr>
+        <p:txBody>
+          <a:bodyPr wrap="square" lIns="635" tIns="635" rIns="635" bIns="635" rtlCol="0" anchor="t"/>
+          <a:lstStyle/>
+          <a:p>
+            <a:pPr algn="l" marL="304800" indent="-304800">
+              <a:spcAft>
+                <a:spcPts val="1000"/>
+              </a:spcAft>
+              <a:buSzPct val="100000"/>
+              <a:buChar char="–"/>
+            </a:pPr>
+            <a:r>
+              <a:rPr lang="ru-RU" altLang="en-US" sz="2400" dirty="0">
+                <a:solidFill>
+                  <a:schemeClr val="tx1"/>
+                </a:solidFill>
+              </a:rPr>
+              <a:t>Кроме п. 4.3 НРБ‑99/2009, специальных норм об облучении экипажей в действующих актах не обнаружено</a:t>
+            </a:r>
+            <a:endParaRPr lang="ru-RU" sz="2400" dirty="0"/>
+          </a:p>
+          <a:p>
+            <a:pPr algn="l" marL="304800" indent="-304800">
+              <a:spcAft>
+                <a:spcPts val="1000"/>
+              </a:spcAft>
+              <a:buSzPct val="100000"/>
+              <a:buChar char="–"/>
+            </a:pPr>
+            <a:r>
+              <a:rPr lang="ru-RU" altLang="en-US" sz="2400" dirty="0">
+                <a:solidFill>
+                  <a:schemeClr val="tx1"/>
+                </a:solidFill>
+              </a:rPr>
+              <a:t>Не обнаружено нормы, определяющей, кто обязан рассчитывать индивидуальную дозу члена экипажа и по какой методике</a:t>
+            </a:r>
+            <a:endParaRPr lang="ru-RU" sz="2400" dirty="0"/>
+          </a:p>
+          <a:p>
+            <a:pPr algn="l" marL="304800" indent="-304800">
+              <a:spcAft>
+                <a:spcPts val="1000"/>
+              </a:spcAft>
+              <a:buSzPct val="100000"/>
+              <a:buChar char="–"/>
+            </a:pPr>
+            <a:r>
+              <a:rPr lang="ru-RU" altLang="en-US" sz="2400" dirty="0">
+                <a:solidFill>
+                  <a:schemeClr val="tx1"/>
+                </a:solidFill>
+              </a:rPr>
+              <a:t>Не обнаружен порядок передачи доз экипажей в единую систему учёта доз (ЕСКИД), хотя ст. 18 закона № 3‑ФЗ требует учёта доз [3]</a:t>
+            </a:r>
+            <a:endParaRPr lang="ru-RU" sz="2400" dirty="0"/>
+          </a:p>
+          <a:p>
+            <a:pPr algn="l" marL="304800" indent="-304800">
+              <a:spcAft>
+                <a:spcPts val="1000"/>
+              </a:spcAft>
+              <a:buSzPct val="100000"/>
+              <a:buChar char="–"/>
+            </a:pPr>
+            <a:r>
+              <a:rPr lang="ru-RU" altLang="en-US" sz="2400" dirty="0">
+                <a:solidFill>
+                  <a:schemeClr val="tx1"/>
+                </a:solidFill>
+              </a:rPr>
+              <a:t>Следствие: соблюдение предела 5 мЗв в год для конкретного человека проверить нельзя</a:t>
+            </a:r>
+            <a:endParaRPr lang="ru-RU" sz="2400" dirty="0"/>
+          </a:p>
+        </p:txBody>
+      </p:sp>
+      <p:sp>
+        <p:nvSpPr>
+          <p:cNvPr id="25" name="Slide Number Placeholder 0"/>
+          <p:cNvSpPr>
+            <a:spLocks noGrp="1"/>
+          </p:cNvSpPr>
+          <p:nvPr>
+            <p:ph type="sldNum" sz="quarter" idx="4294967295"/>
+          </p:nvPr>
+        </p:nvSpPr>
+        <p:spPr>
+          <a:xfrm>
+            <a:off x="11002975" y="6355080"/>
+            <a:ext cx="731520" cy="320040"/>
+          </a:xfrm>
+          <a:prstGeom prst="rect">
+            <a:avLst/>
+          </a:prstGeom>
+          <a:extLst>
+            <a:ext uri="{C572A759-6A51-4108-AA02-DFA0A04FC94B}">
+              <ma14:wrappingTextBoxFlag xmlns:ma14="http://schemas.microsoft.com/office/mac/drawingml/2011/main" val="0"/>
+            </a:ext>
+          </a:extLst>
+        </p:spPr>
+        <p:txBody>
+          <a:bodyPr/>
+          <a:lstStyle>
+            <a:lvl1pPr>
+              <a:defRPr sz="1400">
+                <a:solidFill>
+                  <a:schemeClr val="tx1"/>
+                </a:solidFill>
+              </a:defRPr>
+            </a:lvl1pPr>
+          </a:lstStyle>
+          <a:p>
+            <a:pPr algn="r"/>
+            <a:fld id="{F7021451-1387-4CA6-816F-3879F97B5CBC}" type="slidenum">
+              <a:rPr b="0" lang="ru-RU"/>
+              <a:t>10</a:t>
+            </a:fld>
+            <a:endParaRPr lang="ru-RU"/>
+          </a:p>
+        </p:txBody>
+      </p:sp>
+    </p:spTree>
+  </p:cSld>
+  <p:clrMapOvr>
+    <a:masterClrMapping/>
+  </p:clrMapOvr>
+</p:sld>
+</file>
+
+<file path=ppt/slides/slide11.xml><?xml version="1.0" encoding="utf-8"?>
+<p:sld xmlns:a="http://schemas.openxmlformats.org/drawingml/2006/main" xmlns:r="http://schemas.openxmlformats.org/officeDocument/2006/relationships" xmlns:p="http://schemas.openxmlformats.org/presentationml/2006/main">
+  <p:cSld name="Slide 11">
+    <p:spTree>
+      <p:nvGrpSpPr>
+        <p:cNvPr id="1" name=""/>
+        <p:cNvGrpSpPr/>
+        <p:nvPr/>
+      </p:nvGrpSpPr>
+      <p:grpSpPr>
+        <a:xfrm>
+          <a:off x="0" y="0"/>
+          <a:ext cx="0" cy="0"/>
+          <a:chOff x="0" y="0"/>
+          <a:chExt cx="0" cy="0"/>
+        </a:xfrm>
+      </p:grpSpPr>
+      <p:sp>
+        <p:nvSpPr>
+          <p:cNvPr id="2" name="Text 1"/>
+          <p:cNvSpPr/>
+          <p:nvPr>
+            <p:ph idx="102" type="title" hasCustomPrompt="1"/>
+          </p:nvPr>
+        </p:nvSpPr>
+        <p:spPr>
+          <a:xfrm>
+            <a:off x="1325880" y="274320"/>
+            <a:ext cx="9539935" cy="914400"/>
+          </a:xfrm>
+          <a:prstGeom prst="rect">
+            <a:avLst/>
+          </a:prstGeom>
+          <a:noFill/>
+          <a:ln/>
+        </p:spPr>
+        <p:txBody>
+          <a:bodyPr wrap="square" lIns="635" tIns="635" rIns="635" bIns="635" rtlCol="0" anchor="ctr"/>
+          <a:lstStyle/>
+          <a:p>
+            <a:pPr algn="l" indent="0" marL="0">
+              <a:buNone/>
+            </a:pPr>
+            <a:r>
+              <a:rPr lang="ru-RU" altLang="en-US" sz="2800" b="1" dirty="0">
+                <a:solidFill>
+                  <a:schemeClr val="tx2"/>
+                </a:solidFill>
+              </a:rPr>
+              <a:t>Учёт индивидуальных доз</a:t>
+            </a:r>
+            <a:endParaRPr lang="ru-RU" sz="2800" dirty="0"/>
+          </a:p>
+        </p:txBody>
+      </p:sp>
+      <p:pic>
+        <p:nvPicPr>
+          <p:cNvPr id="3" name="Image 0" descr="Фрагмент текста ст. 18 Федерального закона № 3-ФЗ">    </p:cNvPr>
+          <p:cNvPicPr>
+            <a:picLocks noChangeAspect="1"/>
+          </p:cNvPicPr>
+          <p:nvPr/>
+        </p:nvPicPr>
+        <p:blipFill>
+          <a:blip r:embed="rId1"/>
+          <a:stretch>
+            <a:fillRect/>
+          </a:stretch>
+        </p:blipFill>
+        <p:spPr>
+          <a:xfrm>
+            <a:off x="1295248" y="1325880"/>
+            <a:ext cx="9601200" cy="2933114"/>
+          </a:xfrm>
+          <a:prstGeom prst="rect">
+            <a:avLst/>
+          </a:prstGeom>
+        </p:spPr>
+      </p:pic>
+      <p:sp>
+        <p:nvSpPr>
+          <p:cNvPr id="4" name="Подпись"/>
+          <p:cNvSpPr txBox="1"/>
+          <p:nvPr/>
+        </p:nvSpPr>
+        <p:spPr>
+          <a:xfrm>
+            <a:off x="548640" y="4396154"/>
+            <a:ext cx="11094415" cy="640080"/>
+          </a:xfrm>
+          <a:prstGeom prst="rect">
+            <a:avLst/>
+          </a:prstGeom>
+          <a:noFill/>
+          <a:ln/>
+        </p:spPr>
+        <p:txBody>
+          <a:bodyPr wrap="square" lIns="635" tIns="635" rIns="635" bIns="635" rtlCol="0" anchor="t"/>
+          <a:lstStyle/>
+          <a:p>
+            <a:pPr algn="ctr" indent="0" marL="0">
+              <a:buNone/>
+            </a:pPr>
+            <a:r>
+              <a:rPr lang="ru-RU" altLang="en-US" sz="1600" dirty="0">
+                <a:solidFill>
+                  <a:schemeClr val="tx1"/>
+                </a:solidFill>
+              </a:rPr>
+              <a:t>Рисунок 6 – Фрагмент текста ст. 18 Федерального закона № 3‑ФЗ [3]: закон требует учёта доз и от природного фона</a:t>
+            </a:r>
+            <a:endParaRPr lang="ru-RU" sz="1600" dirty="0"/>
+          </a:p>
+        </p:txBody>
+      </p:sp>
+      <p:sp>
+        <p:nvSpPr>
+          <p:cNvPr id="25" name="Slide Number Placeholder 0"/>
+          <p:cNvSpPr>
+            <a:spLocks noGrp="1"/>
+          </p:cNvSpPr>
+          <p:nvPr>
+            <p:ph type="sldNum" sz="quarter" idx="4294967295"/>
+          </p:nvPr>
+        </p:nvSpPr>
+        <p:spPr>
+          <a:xfrm>
+            <a:off x="11002975" y="6355080"/>
+            <a:ext cx="731520" cy="320040"/>
+          </a:xfrm>
+          <a:prstGeom prst="rect">
+            <a:avLst/>
+          </a:prstGeom>
+          <a:extLst>
+            <a:ext uri="{C572A759-6A51-4108-AA02-DFA0A04FC94B}">
+              <ma14:wrappingTextBoxFlag xmlns:ma14="http://schemas.microsoft.com/office/mac/drawingml/2011/main" val="0"/>
+            </a:ext>
+          </a:extLst>
+        </p:spPr>
+        <p:txBody>
+          <a:bodyPr/>
+          <a:lstStyle>
+            <a:lvl1pPr>
+              <a:defRPr sz="1400">
+                <a:solidFill>
+                  <a:schemeClr val="tx1"/>
+                </a:solidFill>
+              </a:defRPr>
+            </a:lvl1pPr>
+          </a:lstStyle>
+          <a:p>
+            <a:pPr algn="r"/>
+            <a:fld id="{F7021451-1387-4CA6-816F-3879F97B5CBC}" type="slidenum">
+              <a:rPr b="0" lang="ru-RU"/>
+              <a:t>11</a:t>
+            </a:fld>
+            <a:endParaRPr lang="ru-RU"/>
+          </a:p>
+        </p:txBody>
+      </p:sp>
+    </p:spTree>
+  </p:cSld>
+  <p:clrMapOvr>
+    <a:masterClrMapping/>
+  </p:clrMapOvr>
+</p:sld>
+</file>
+
+<file path=ppt/slides/slide12.xml><?xml version="1.0" encoding="utf-8"?>
+<p:sld xmlns:a="http://schemas.openxmlformats.org/drawingml/2006/main" xmlns:r="http://schemas.openxmlformats.org/officeDocument/2006/relationships" xmlns:p="http://schemas.openxmlformats.org/presentationml/2006/main">
+  <p:cSld name="Slide 12">
+    <p:spTree>
+      <p:nvGrpSpPr>
+        <p:cNvPr id="1" name=""/>
+        <p:cNvGrpSpPr/>
+        <p:nvPr/>
+      </p:nvGrpSpPr>
+      <p:grpSpPr>
+        <a:xfrm>
+          <a:off x="0" y="0"/>
+          <a:ext cx="0" cy="0"/>
+          <a:chOff x="0" y="0"/>
+          <a:chExt cx="0" cy="0"/>
+        </a:xfrm>
+      </p:grpSpPr>
+      <p:sp>
+        <p:nvSpPr>
+          <p:cNvPr id="2" name="Text 1"/>
+          <p:cNvSpPr/>
+          <p:nvPr>
+            <p:ph idx="102" type="title" hasCustomPrompt="1"/>
+          </p:nvPr>
+        </p:nvSpPr>
+        <p:spPr>
+          <a:xfrm>
+            <a:off x="1325880" y="274320"/>
+            <a:ext cx="9539935" cy="914400"/>
+          </a:xfrm>
+          <a:prstGeom prst="rect">
+            <a:avLst/>
+          </a:prstGeom>
+          <a:noFill/>
+          <a:ln/>
+        </p:spPr>
+        <p:txBody>
+          <a:bodyPr wrap="square" lIns="635" tIns="635" rIns="635" bIns="635" rtlCol="0" anchor="ctr"/>
+          <a:lstStyle/>
+          <a:p>
+            <a:pPr algn="l" indent="0" marL="0">
+              <a:buNone/>
+            </a:pPr>
+            <a:r>
+              <a:rPr lang="ru-RU" altLang="en-US" sz="2800" b="1" dirty="0">
+                <a:solidFill>
+                  <a:schemeClr val="tx2"/>
+                </a:solidFill>
+              </a:rPr>
+              <a:t>Выявленные пробелы</a:t>
+            </a:r>
+            <a:endParaRPr lang="ru-RU" sz="2800" dirty="0"/>
+          </a:p>
+        </p:txBody>
+      </p:sp>
+      <p:sp>
+        <p:nvSpPr>
+          <p:cNvPr id="3" name="Text 1"/>
+          <p:cNvSpPr/>
+          <p:nvPr>
+            <p:ph idx="103" type="body" hasCustomPrompt="1"/>
+          </p:nvPr>
+        </p:nvSpPr>
+        <p:spPr>
+          <a:xfrm>
+            <a:off x="548640" y="1371600"/>
+            <a:ext cx="11094415" cy="4846320"/>
+          </a:xfrm>
+          <a:prstGeom prst="rect">
+            <a:avLst/>
+          </a:prstGeom>
+          <a:noFill/>
+          <a:ln/>
+        </p:spPr>
+        <p:txBody>
+          <a:bodyPr wrap="square" lIns="635" tIns="635" rIns="635" bIns="635" rtlCol="0" anchor="t"/>
+          <a:lstStyle/>
+          <a:p>
+            <a:pPr algn="l" marL="304800" indent="-304800">
+              <a:spcAft>
+                <a:spcPts val="1000"/>
+              </a:spcAft>
+              <a:buSzPct val="100000"/>
+              <a:buChar char="–"/>
+            </a:pPr>
+            <a:r>
+              <a:rPr lang="ru-RU" altLang="en-US" sz="2400" dirty="0">
+                <a:solidFill>
+                  <a:schemeClr val="tx1"/>
+                </a:solidFill>
+              </a:rPr>
+              <a:t>Специальная оценка условий труда (СОУТ) проводится в одном контрольном полёте и не отражает годовую дозу на разных маршрутах [10]</a:t>
+            </a:r>
+            <a:endParaRPr lang="ru-RU" sz="2400" dirty="0"/>
+          </a:p>
+          <a:p>
+            <a:pPr algn="l" marL="304800" indent="-304800">
+              <a:spcAft>
+                <a:spcPts val="1000"/>
+              </a:spcAft>
+              <a:buSzPct val="100000"/>
+              <a:buChar char="–"/>
+            </a:pPr>
+            <a:r>
+              <a:rPr lang="ru-RU" altLang="en-US" sz="2400" dirty="0">
+                <a:solidFill>
+                  <a:schemeClr val="tx1"/>
+                </a:solidFill>
+              </a:rPr>
+              <a:t>Лимиты налёта (800 ч, с согласия – 900 ч в год) не учитывают дозу; согласие даётся без знания своей дозы [11]</a:t>
+            </a:r>
+            <a:endParaRPr lang="ru-RU" sz="2400" dirty="0"/>
+          </a:p>
+          <a:p>
+            <a:pPr algn="l" marL="304800" indent="-304800">
+              <a:spcAft>
+                <a:spcPts val="1000"/>
+              </a:spcAft>
+              <a:buSzPct val="100000"/>
+              <a:buChar char="–"/>
+            </a:pPr>
+            <a:r>
+              <a:rPr lang="ru-RU" altLang="en-US" sz="2400" dirty="0">
+                <a:solidFill>
+                  <a:schemeClr val="tx1"/>
+                </a:solidFill>
+              </a:rPr>
+              <a:t>Общая обязанность информировать о рисках есть (ст. 214 ТК РФ), но сообщать работнику его индивидуальную дозу никто не обязан</a:t>
+            </a:r>
+            <a:endParaRPr lang="ru-RU" sz="2400" dirty="0"/>
+          </a:p>
+          <a:p>
+            <a:pPr algn="l" marL="304800" indent="-304800">
+              <a:spcAft>
+                <a:spcPts val="1000"/>
+              </a:spcAft>
+              <a:buSzPct val="100000"/>
+              <a:buChar char="–"/>
+            </a:pPr>
+            <a:r>
+              <a:rPr lang="ru-RU" altLang="en-US" sz="2400" dirty="0">
+                <a:solidFill>
+                  <a:schemeClr val="tx1"/>
+                </a:solidFill>
+              </a:rPr>
+              <a:t>Для беременных членов экипажа нет дозового правила – действуют только общие гарантии ст. 254 ТК РФ</a:t>
+            </a:r>
+            <a:endParaRPr lang="ru-RU" sz="2400" dirty="0"/>
+          </a:p>
+        </p:txBody>
+      </p:sp>
+      <p:sp>
+        <p:nvSpPr>
+          <p:cNvPr id="25" name="Slide Number Placeholder 0"/>
+          <p:cNvSpPr>
+            <a:spLocks noGrp="1"/>
+          </p:cNvSpPr>
+          <p:nvPr>
+            <p:ph type="sldNum" sz="quarter" idx="4294967295"/>
+          </p:nvPr>
+        </p:nvSpPr>
+        <p:spPr>
+          <a:xfrm>
+            <a:off x="11002975" y="6355080"/>
+            <a:ext cx="731520" cy="320040"/>
+          </a:xfrm>
+          <a:prstGeom prst="rect">
+            <a:avLst/>
+          </a:prstGeom>
+          <a:extLst>
+            <a:ext uri="{C572A759-6A51-4108-AA02-DFA0A04FC94B}">
+              <ma14:wrappingTextBoxFlag xmlns:ma14="http://schemas.microsoft.com/office/mac/drawingml/2011/main" val="0"/>
+            </a:ext>
+          </a:extLst>
+        </p:spPr>
+        <p:txBody>
+          <a:bodyPr/>
+          <a:lstStyle>
+            <a:lvl1pPr>
+              <a:defRPr sz="1400">
+                <a:solidFill>
+                  <a:schemeClr val="tx1"/>
+                </a:solidFill>
+              </a:defRPr>
+            </a:lvl1pPr>
+          </a:lstStyle>
+          <a:p>
+            <a:pPr algn="r"/>
+            <a:fld id="{F7021451-1387-4CA6-816F-3879F97B5CBC}" type="slidenum">
+              <a:rPr b="0" lang="ru-RU"/>
+              <a:t>12</a:t>
+            </a:fld>
+            <a:endParaRPr lang="ru-RU"/>
+          </a:p>
+        </p:txBody>
+      </p:sp>
+    </p:spTree>
+  </p:cSld>
+  <p:clrMapOvr>
+    <a:masterClrMapping/>
+  </p:clrMapOvr>
+</p:sld>
+</file>
+
+<file path=ppt/slides/slide13.xml><?xml version="1.0" encoding="utf-8"?>
+<p:sld xmlns:a="http://schemas.openxmlformats.org/drawingml/2006/main" xmlns:r="http://schemas.openxmlformats.org/officeDocument/2006/relationships" xmlns:p="http://schemas.openxmlformats.org/presentationml/2006/main">
+  <p:cSld name="Slide 13">
+    <p:spTree>
+      <p:nvGrpSpPr>
+        <p:cNvPr id="1" name=""/>
+        <p:cNvGrpSpPr/>
+        <p:nvPr/>
+      </p:nvGrpSpPr>
+      <p:grpSpPr>
+        <a:xfrm>
+          <a:off x="0" y="0"/>
+          <a:ext cx="0" cy="0"/>
+          <a:chOff x="0" y="0"/>
+          <a:chExt cx="0" cy="0"/>
+        </a:xfrm>
+      </p:grpSpPr>
+      <p:sp>
+        <p:nvSpPr>
+          <p:cNvPr id="2" name="Text 1"/>
+          <p:cNvSpPr/>
+          <p:nvPr>
+            <p:ph idx="102" type="title" hasCustomPrompt="1"/>
+          </p:nvPr>
+        </p:nvSpPr>
+        <p:spPr>
+          <a:xfrm>
+            <a:off x="1325880" y="274320"/>
+            <a:ext cx="9539935" cy="914400"/>
+          </a:xfrm>
+          <a:prstGeom prst="rect">
+            <a:avLst/>
+          </a:prstGeom>
+          <a:noFill/>
+          <a:ln/>
+        </p:spPr>
+        <p:txBody>
+          <a:bodyPr wrap="square" lIns="635" tIns="635" rIns="635" bIns="635" rtlCol="0" anchor="ctr"/>
+          <a:lstStyle/>
+          <a:p>
+            <a:pPr algn="l" indent="0" marL="0">
+              <a:buNone/>
+            </a:pPr>
+            <a:r>
+              <a:rPr lang="ru-RU" altLang="en-US" sz="2800" b="1" dirty="0">
+                <a:solidFill>
+                  <a:schemeClr val="tx2"/>
+                </a:solidFill>
+              </a:rPr>
+              <a:t>Право Европейского союза</a:t>
+            </a:r>
+            <a:endParaRPr lang="ru-RU" sz="2800" dirty="0"/>
+          </a:p>
+        </p:txBody>
+      </p:sp>
+      <p:pic>
+        <p:nvPicPr>
+          <p:cNvPr id="3" name="Image 0" descr="Фрагмент текста ст. 35(3) Директивы 2013/59/Евратом">    </p:cNvPr>
+          <p:cNvPicPr>
+            <a:picLocks noChangeAspect="1"/>
+          </p:cNvPicPr>
+          <p:nvPr/>
+        </p:nvPicPr>
+        <p:blipFill>
+          <a:blip r:embed="rId1"/>
+          <a:stretch>
+            <a:fillRect/>
+          </a:stretch>
+        </p:blipFill>
+        <p:spPr>
+          <a:xfrm>
+            <a:off x="1798168" y="1325880"/>
+            <a:ext cx="8595360" cy="4231562"/>
+          </a:xfrm>
+          <a:prstGeom prst="rect">
+            <a:avLst/>
+          </a:prstGeom>
+        </p:spPr>
+      </p:pic>
+      <p:sp>
+        <p:nvSpPr>
+          <p:cNvPr id="4" name="Подпись"/>
+          <p:cNvSpPr txBox="1"/>
+          <p:nvPr/>
+        </p:nvSpPr>
+        <p:spPr>
+          <a:xfrm>
+            <a:off x="548640" y="5694602"/>
+            <a:ext cx="11094415" cy="640080"/>
+          </a:xfrm>
+          <a:prstGeom prst="rect">
+            <a:avLst/>
+          </a:prstGeom>
+          <a:noFill/>
+          <a:ln/>
+        </p:spPr>
+        <p:txBody>
+          <a:bodyPr wrap="square" lIns="635" tIns="635" rIns="635" bIns="635" rtlCol="0" anchor="t"/>
+          <a:lstStyle/>
+          <a:p>
+            <a:pPr algn="ctr" indent="0" marL="0">
+              <a:buNone/>
+            </a:pPr>
+            <a:r>
+              <a:rPr lang="ru-RU" altLang="en-US" sz="1600" dirty="0">
+                <a:solidFill>
+                  <a:schemeClr val="tx1"/>
+                </a:solidFill>
+              </a:rPr>
+              <a:t>Рисунок 7 – Фрагмент текста ст. 35, п. 3 Директивы 2013/59/Евратом [12]</a:t>
+            </a:r>
+            <a:endParaRPr lang="ru-RU" sz="1600" dirty="0"/>
+          </a:p>
+        </p:txBody>
+      </p:sp>
+      <p:sp>
+        <p:nvSpPr>
+          <p:cNvPr id="25" name="Slide Number Placeholder 0"/>
+          <p:cNvSpPr>
+            <a:spLocks noGrp="1"/>
+          </p:cNvSpPr>
+          <p:nvPr>
+            <p:ph type="sldNum" sz="quarter" idx="4294967295"/>
+          </p:nvPr>
+        </p:nvSpPr>
+        <p:spPr>
+          <a:xfrm>
+            <a:off x="11002975" y="6355080"/>
+            <a:ext cx="731520" cy="320040"/>
+          </a:xfrm>
+          <a:prstGeom prst="rect">
+            <a:avLst/>
+          </a:prstGeom>
+          <a:extLst>
+            <a:ext uri="{C572A759-6A51-4108-AA02-DFA0A04FC94B}">
+              <ma14:wrappingTextBoxFlag xmlns:ma14="http://schemas.microsoft.com/office/mac/drawingml/2011/main" val="0"/>
+            </a:ext>
+          </a:extLst>
+        </p:spPr>
+        <p:txBody>
+          <a:bodyPr/>
+          <a:lstStyle>
+            <a:lvl1pPr>
+              <a:defRPr sz="1400">
+                <a:solidFill>
+                  <a:schemeClr val="tx1"/>
+                </a:solidFill>
+              </a:defRPr>
+            </a:lvl1pPr>
+          </a:lstStyle>
+          <a:p>
+            <a:pPr algn="r"/>
+            <a:fld id="{F7021451-1387-4CA6-816F-3879F97B5CBC}" type="slidenum">
+              <a:rPr b="0" lang="ru-RU"/>
+              <a:t>13</a:t>
+            </a:fld>
+            <a:endParaRPr lang="ru-RU"/>
+          </a:p>
+        </p:txBody>
+      </p:sp>
+    </p:spTree>
+  </p:cSld>
+  <p:clrMapOvr>
+    <a:masterClrMapping/>
+  </p:clrMapOvr>
+</p:sld>
+</file>
+
+<file path=ppt/slides/slide14.xml><?xml version="1.0" encoding="utf-8"?>
+<p:sld xmlns:a="http://schemas.openxmlformats.org/drawingml/2006/main" xmlns:r="http://schemas.openxmlformats.org/officeDocument/2006/relationships" xmlns:p="http://schemas.openxmlformats.org/presentationml/2006/main">
+  <p:cSld name="Slide 14">
+    <p:spTree>
+      <p:nvGrpSpPr>
+        <p:cNvPr id="1" name=""/>
+        <p:cNvGrpSpPr/>
+        <p:nvPr/>
+      </p:nvGrpSpPr>
+      <p:grpSpPr>
+        <a:xfrm>
+          <a:off x="0" y="0"/>
+          <a:ext cx="0" cy="0"/>
+          <a:chOff x="0" y="0"/>
+          <a:chExt cx="0" cy="0"/>
+        </a:xfrm>
+      </p:grpSpPr>
+      <p:sp>
+        <p:nvSpPr>
+          <p:cNvPr id="2" name="Text 1"/>
+          <p:cNvSpPr/>
+          <p:nvPr>
+            <p:ph idx="102" type="title" hasCustomPrompt="1"/>
+          </p:nvPr>
+        </p:nvSpPr>
+        <p:spPr>
+          <a:xfrm>
+            <a:off x="1325880" y="274320"/>
+            <a:ext cx="9539935" cy="914400"/>
+          </a:xfrm>
+          <a:prstGeom prst="rect">
+            <a:avLst/>
+          </a:prstGeom>
+          <a:noFill/>
+          <a:ln/>
+        </p:spPr>
+        <p:txBody>
+          <a:bodyPr wrap="square" lIns="635" tIns="635" rIns="635" bIns="635" rtlCol="0" anchor="ctr"/>
+          <a:lstStyle/>
+          <a:p>
+            <a:pPr algn="l" indent="0" marL="0">
+              <a:buNone/>
+            </a:pPr>
+            <a:r>
+              <a:rPr lang="ru-RU" altLang="en-US" sz="2800" b="1" dirty="0">
+                <a:solidFill>
+                  <a:schemeClr val="tx2"/>
+                </a:solidFill>
+              </a:rPr>
               <a:t>Зарубежный опыт</a:t>
             </a:r>
             <a:endParaRPr lang="ru-RU" sz="2800" dirty="0"/>
@@ -3168,7 +4182,7 @@
       </p:sp>
       <p:graphicFrame>
         <p:nvGraphicFramePr>
-          <p:cNvPr id="11" name="Table 0"/>
+          <p:cNvPr id="15" name="Table 0"/>
           <p:cNvGraphicFramePr>
             <a:graphicFrameLocks noGrp="1"/>
           </p:cNvGraphicFramePr>
@@ -3816,7 +4830,7 @@
                           <a:ea typeface="Calibri" pitchFamily="34" charset="-122"/>
                           <a:cs typeface="Calibri" pitchFamily="34" charset="-120"/>
                         </a:rPr>
-                        <a:t>не установлен</a:t>
+                        <a:t>не обнаружен</a:t>
                       </a:r>
                       <a:endParaRPr lang="ru-RU" sz="1800" dirty="0">
                         <a:latin typeface="Calibri" charset="0"/>
@@ -4087,7 +5101,7 @@
                           <a:ea typeface="Calibri" pitchFamily="34" charset="-122"/>
                           <a:cs typeface="Calibri" pitchFamily="34" charset="-120"/>
                         </a:rPr>
-                        <a:t>не предусмотрен</a:t>
+                        <a:t>не обнаружен</a:t>
                       </a:r>
                       <a:endParaRPr lang="ru-RU" sz="1800" dirty="0">
                         <a:latin typeface="Calibri" charset="0"/>
@@ -4352,7 +5366,7 @@
                           <a:ea typeface="Calibri" pitchFamily="34" charset="-122"/>
                           <a:cs typeface="Calibri" pitchFamily="34" charset="-120"/>
                         </a:rPr>
-                        <a:t>не предусмотрено</a:t>
+                        <a:t>только общая обязанность информировать о рисках (ст. 214 ТК РФ)</a:t>
                       </a:r>
                       <a:endParaRPr lang="ru-RU" sz="1800" dirty="0">
                         <a:latin typeface="Calibri" charset="0"/>
@@ -4845,950 +5859,6 @@
             <a:pPr algn="r"/>
             <a:fld id="{F7021451-1387-4CA6-816F-3879F97B5CBC}" type="slidenum">
               <a:rPr b="0" lang="ru-RU"/>
-              <a:t>10</a:t>
-            </a:fld>
-            <a:endParaRPr lang="ru-RU"/>
-          </a:p>
-        </p:txBody>
-      </p:sp>
-    </p:spTree>
-  </p:cSld>
-  <p:clrMapOvr>
-    <a:masterClrMapping/>
-  </p:clrMapOvr>
-</p:sld>
-</file>
-
-<file path=ppt/slides/slide11.xml><?xml version="1.0" encoding="utf-8"?>
-<p:sld xmlns:a="http://schemas.openxmlformats.org/drawingml/2006/main" xmlns:r="http://schemas.openxmlformats.org/officeDocument/2006/relationships" xmlns:p="http://schemas.openxmlformats.org/presentationml/2006/main">
-  <p:cSld name="Slide 11">
-    <p:spTree>
-      <p:nvGrpSpPr>
-        <p:cNvPr id="1" name=""/>
-        <p:cNvGrpSpPr/>
-        <p:nvPr/>
-      </p:nvGrpSpPr>
-      <p:grpSpPr>
-        <a:xfrm>
-          <a:off x="0" y="0"/>
-          <a:ext cx="0" cy="0"/>
-          <a:chOff x="0" y="0"/>
-          <a:chExt cx="0" cy="0"/>
-        </a:xfrm>
-      </p:grpSpPr>
-      <p:sp>
-        <p:nvSpPr>
-          <p:cNvPr id="2" name="Text 1"/>
-          <p:cNvSpPr/>
-          <p:nvPr>
-            <p:ph idx="102" type="title" hasCustomPrompt="1"/>
-          </p:nvPr>
-        </p:nvSpPr>
-        <p:spPr>
-          <a:xfrm>
-            <a:off x="1325880" y="274320"/>
-            <a:ext cx="9539935" cy="914400"/>
-          </a:xfrm>
-          <a:prstGeom prst="rect">
-            <a:avLst/>
-          </a:prstGeom>
-          <a:noFill/>
-          <a:ln/>
-        </p:spPr>
-        <p:txBody>
-          <a:bodyPr wrap="square" lIns="635" tIns="635" rIns="635" bIns="635" rtlCol="0" anchor="ctr"/>
-          <a:lstStyle/>
-          <a:p>
-            <a:pPr algn="l" indent="0" marL="0">
-              <a:buNone/>
-            </a:pPr>
-            <a:r>
-              <a:rPr lang="ru-RU" altLang="en-US" sz="2800" b="1" dirty="0">
-                <a:solidFill>
-                  <a:schemeClr val="tx2"/>
-                </a:solidFill>
-              </a:rPr>
-              <a:t>Предложения по совершенствованию (1)</a:t>
-            </a:r>
-            <a:endParaRPr lang="ru-RU" sz="2800" dirty="0"/>
-          </a:p>
-        </p:txBody>
-      </p:sp>
-      <p:sp>
-        <p:nvSpPr>
-          <p:cNvPr id="3" name="Text 1"/>
-          <p:cNvSpPr/>
-          <p:nvPr>
-            <p:ph idx="103" type="body" hasCustomPrompt="1"/>
-          </p:nvPr>
-        </p:nvSpPr>
-        <p:spPr>
-          <a:xfrm>
-            <a:off x="548640" y="1371600"/>
-            <a:ext cx="11094415" cy="4846320"/>
-          </a:xfrm>
-          <a:prstGeom prst="rect">
-            <a:avLst/>
-          </a:prstGeom>
-          <a:noFill/>
-          <a:ln/>
-        </p:spPr>
-        <p:txBody>
-          <a:bodyPr wrap="square" lIns="635" tIns="635" rIns="635" bIns="635" rtlCol="0" anchor="t"/>
-          <a:lstStyle/>
-          <a:p>
-            <a:pPr algn="l" marL="304800" indent="-304800">
-              <a:spcAft>
-                <a:spcPts val="1000"/>
-              </a:spcAft>
-              <a:buSzPct val="100000"/>
-              <a:buChar char="–"/>
-            </a:pPr>
-            <a:r>
-              <a:rPr lang="ru-RU" altLang="en-US" sz="2400" b="1" dirty="0">
-                <a:solidFill>
-                  <a:schemeClr val="tx1"/>
-                </a:solidFill>
-              </a:rPr>
-              <a:t>Санитарные правила: </a:t>
-            </a:r>
-            <a:pPr algn="l" marL="304800" indent="-304800">
-              <a:spcAft>
-                <a:spcPts val="1000"/>
-              </a:spcAft>
-              <a:buSzPct val="100000"/>
-              <a:buChar char="–"/>
-            </a:pPr>
-            <a:r>
-              <a:rPr lang="ru-RU" altLang="en-US" sz="2400" dirty="0">
-                <a:solidFill>
-                  <a:schemeClr val="tx1"/>
-                </a:solidFill>
-              </a:rPr>
-              <a:t>если доза члена экипажа может превысить 1 мЗв в год, эксплуатант рассчитывает индивидуальную дозу, назначает ответственного и ведёт учёт</a:t>
-            </a:r>
-            <a:endParaRPr lang="ru-RU" sz="2400" dirty="0"/>
-          </a:p>
-          <a:p>
-            <a:pPr algn="l" marL="304800" indent="-304800">
-              <a:spcAft>
-                <a:spcPts val="1000"/>
-              </a:spcAft>
-              <a:buSzPct val="100000"/>
-              <a:buChar char="–"/>
-            </a:pPr>
-            <a:r>
-              <a:rPr lang="ru-RU" altLang="en-US" sz="2400" b="1" dirty="0">
-                <a:solidFill>
-                  <a:schemeClr val="tx1"/>
-                </a:solidFill>
-              </a:rPr>
-              <a:t>Контрольный уровень: </a:t>
-            </a:r>
-            <a:pPr algn="l" marL="304800" indent="-304800">
-              <a:spcAft>
-                <a:spcPts val="1000"/>
-              </a:spcAft>
-              <a:buSzPct val="100000"/>
-              <a:buChar char="–"/>
-            </a:pPr>
-            <a:r>
-              <a:rPr lang="ru-RU" altLang="en-US" sz="2400" dirty="0">
-                <a:solidFill>
-                  <a:schemeClr val="tx1"/>
-                </a:solidFill>
-              </a:rPr>
-              <a:t>ниже предела 5 мЗв в год; при его достижении график члена экипажа корректируется</a:t>
-            </a:r>
-            <a:endParaRPr lang="ru-RU" sz="2400" dirty="0"/>
-          </a:p>
-          <a:p>
-            <a:pPr algn="l" marL="304800" indent="-304800">
-              <a:spcAft>
-                <a:spcPts val="1000"/>
-              </a:spcAft>
-              <a:buSzPct val="100000"/>
-              <a:buChar char="–"/>
-            </a:pPr>
-            <a:r>
-              <a:rPr lang="ru-RU" altLang="en-US" sz="2400" b="1" dirty="0">
-                <a:solidFill>
-                  <a:schemeClr val="tx1"/>
-                </a:solidFill>
-              </a:rPr>
-              <a:t>Методические указания Роспотребнадзора: </a:t>
-            </a:r>
-            <a:pPr algn="l" marL="304800" indent="-304800">
-              <a:spcAft>
-                <a:spcPts val="1000"/>
-              </a:spcAft>
-              <a:buSzPct val="100000"/>
-              <a:buChar char="–"/>
-            </a:pPr>
-            <a:r>
-              <a:rPr lang="ru-RU" altLang="en-US" sz="2400" dirty="0">
-                <a:solidFill>
-                  <a:schemeClr val="tx1"/>
-                </a:solidFill>
-              </a:rPr>
-              <a:t>расчёт дозы по фактическим маршрутам, эшелонам и времени полёта (в перспективе – единый государственный сервис расчёта)</a:t>
-            </a:r>
-            <a:endParaRPr lang="ru-RU" sz="2400" dirty="0"/>
-          </a:p>
-        </p:txBody>
-      </p:sp>
-      <p:sp>
-        <p:nvSpPr>
-          <p:cNvPr id="25" name="Slide Number Placeholder 0"/>
-          <p:cNvSpPr>
-            <a:spLocks noGrp="1"/>
-          </p:cNvSpPr>
-          <p:nvPr>
-            <p:ph type="sldNum" sz="quarter" idx="4294967295"/>
-          </p:nvPr>
-        </p:nvSpPr>
-        <p:spPr>
-          <a:xfrm>
-            <a:off x="11002975" y="6355080"/>
-            <a:ext cx="731520" cy="320040"/>
-          </a:xfrm>
-          <a:prstGeom prst="rect">
-            <a:avLst/>
-          </a:prstGeom>
-          <a:extLst>
-            <a:ext uri="{C572A759-6A51-4108-AA02-DFA0A04FC94B}">
-              <ma14:wrappingTextBoxFlag xmlns:ma14="http://schemas.microsoft.com/office/mac/drawingml/2011/main" val="0"/>
-            </a:ext>
-          </a:extLst>
-        </p:spPr>
-        <p:txBody>
-          <a:bodyPr/>
-          <a:lstStyle>
-            <a:lvl1pPr>
-              <a:defRPr sz="1400">
-                <a:solidFill>
-                  <a:schemeClr val="tx1"/>
-                </a:solidFill>
-              </a:defRPr>
-            </a:lvl1pPr>
-          </a:lstStyle>
-          <a:p>
-            <a:pPr algn="r"/>
-            <a:fld id="{F7021451-1387-4CA6-816F-3879F97B5CBC}" type="slidenum">
-              <a:rPr b="0" lang="ru-RU"/>
-              <a:t>11</a:t>
-            </a:fld>
-            <a:endParaRPr lang="ru-RU"/>
-          </a:p>
-        </p:txBody>
-      </p:sp>
-    </p:spTree>
-  </p:cSld>
-  <p:clrMapOvr>
-    <a:masterClrMapping/>
-  </p:clrMapOvr>
-</p:sld>
-</file>
-
-<file path=ppt/slides/slide12.xml><?xml version="1.0" encoding="utf-8"?>
-<p:sld xmlns:a="http://schemas.openxmlformats.org/drawingml/2006/main" xmlns:r="http://schemas.openxmlformats.org/officeDocument/2006/relationships" xmlns:p="http://schemas.openxmlformats.org/presentationml/2006/main">
-  <p:cSld name="Slide 12">
-    <p:spTree>
-      <p:nvGrpSpPr>
-        <p:cNvPr id="1" name=""/>
-        <p:cNvGrpSpPr/>
-        <p:nvPr/>
-      </p:nvGrpSpPr>
-      <p:grpSpPr>
-        <a:xfrm>
-          <a:off x="0" y="0"/>
-          <a:ext cx="0" cy="0"/>
-          <a:chOff x="0" y="0"/>
-          <a:chExt cx="0" cy="0"/>
-        </a:xfrm>
-      </p:grpSpPr>
-      <p:sp>
-        <p:nvSpPr>
-          <p:cNvPr id="2" name="Text 1"/>
-          <p:cNvSpPr/>
-          <p:nvPr>
-            <p:ph idx="102" type="title" hasCustomPrompt="1"/>
-          </p:nvPr>
-        </p:nvSpPr>
-        <p:spPr>
-          <a:xfrm>
-            <a:off x="1325880" y="274320"/>
-            <a:ext cx="9539935" cy="914400"/>
-          </a:xfrm>
-          <a:prstGeom prst="rect">
-            <a:avLst/>
-          </a:prstGeom>
-          <a:noFill/>
-          <a:ln/>
-        </p:spPr>
-        <p:txBody>
-          <a:bodyPr wrap="square" lIns="635" tIns="635" rIns="635" bIns="635" rtlCol="0" anchor="ctr"/>
-          <a:lstStyle/>
-          <a:p>
-            <a:pPr algn="l" indent="0" marL="0">
-              <a:buNone/>
-            </a:pPr>
-            <a:r>
-              <a:rPr lang="ru-RU" altLang="en-US" sz="2800" b="1" dirty="0">
-                <a:solidFill>
-                  <a:schemeClr val="tx2"/>
-                </a:solidFill>
-              </a:rPr>
-              <a:t>Предложения по совершенствованию (2)</a:t>
-            </a:r>
-            <a:endParaRPr lang="ru-RU" sz="2800" dirty="0"/>
-          </a:p>
-        </p:txBody>
-      </p:sp>
-      <p:sp>
-        <p:nvSpPr>
-          <p:cNvPr id="3" name="Text 1"/>
-          <p:cNvSpPr/>
-          <p:nvPr>
-            <p:ph idx="103" type="body" hasCustomPrompt="1"/>
-          </p:nvPr>
-        </p:nvSpPr>
-        <p:spPr>
-          <a:xfrm>
-            <a:off x="548640" y="1371600"/>
-            <a:ext cx="11094415" cy="4846320"/>
-          </a:xfrm>
-          <a:prstGeom prst="rect">
-            <a:avLst/>
-          </a:prstGeom>
-          <a:noFill/>
-          <a:ln/>
-        </p:spPr>
-        <p:txBody>
-          <a:bodyPr wrap="square" lIns="635" tIns="635" rIns="635" bIns="635" rtlCol="0" anchor="t"/>
-          <a:lstStyle/>
-          <a:p>
-            <a:pPr algn="l" marL="304800" indent="-304800">
-              <a:spcAft>
-                <a:spcPts val="1000"/>
-              </a:spcAft>
-              <a:buSzPct val="100000"/>
-              <a:buChar char="–"/>
-            </a:pPr>
-            <a:r>
-              <a:rPr lang="ru-RU" altLang="en-US" sz="2400" b="1" dirty="0">
-                <a:solidFill>
-                  <a:schemeClr val="tx1"/>
-                </a:solidFill>
-              </a:rPr>
-              <a:t>ЕСКИД: </a:t>
-            </a:r>
-            <a:pPr algn="l" marL="304800" indent="-304800">
-              <a:spcAft>
-                <a:spcPts val="1000"/>
-              </a:spcAft>
-              <a:buSzPct val="100000"/>
-              <a:buChar char="–"/>
-            </a:pPr>
-            <a:r>
-              <a:rPr lang="ru-RU" altLang="en-US" sz="2400" dirty="0">
-                <a:solidFill>
-                  <a:schemeClr val="tx1"/>
-                </a:solidFill>
-              </a:rPr>
-              <a:t>дополнить формы учёта дозами членов экипажей; ежегодно и при увольнении сообщать работнику его дозу</a:t>
-            </a:r>
-            <a:endParaRPr lang="ru-RU" sz="2400" dirty="0"/>
-          </a:p>
-          <a:p>
-            <a:pPr algn="l" marL="304800" indent="-304800">
-              <a:spcAft>
-                <a:spcPts val="1000"/>
-              </a:spcAft>
-              <a:buSzPct val="100000"/>
-              <a:buChar char="–"/>
-            </a:pPr>
-            <a:r>
-              <a:rPr lang="ru-RU" altLang="en-US" sz="2400" b="1" dirty="0">
-                <a:solidFill>
-                  <a:schemeClr val="tx1"/>
-                </a:solidFill>
-              </a:rPr>
-              <a:t>Приказ Минтранса № 381 (ст. 329 ТК РФ): </a:t>
-            </a:r>
-            <a:pPr algn="l" marL="304800" indent="-304800">
-              <a:spcAft>
-                <a:spcPts val="1000"/>
-              </a:spcAft>
-              <a:buSzPct val="100000"/>
-              <a:buChar char="–"/>
-            </a:pPr>
-            <a:r>
-              <a:rPr lang="ru-RU" altLang="en-US" sz="2400" dirty="0">
-                <a:solidFill>
-                  <a:schemeClr val="tx1"/>
-                </a:solidFill>
-              </a:rPr>
-              <a:t>учитывать дозу при составлении графиков; согласие на налёт до 900 ч – только после сообщения работнику его дозы</a:t>
-            </a:r>
-            <a:endParaRPr lang="ru-RU" sz="2400" dirty="0"/>
-          </a:p>
-          <a:p>
-            <a:pPr algn="l" marL="304800" indent="-304800">
-              <a:spcAft>
-                <a:spcPts val="1000"/>
-              </a:spcAft>
-              <a:buSzPct val="100000"/>
-              <a:buChar char="–"/>
-            </a:pPr>
-            <a:r>
-              <a:rPr lang="ru-RU" altLang="en-US" sz="2400" b="1" dirty="0">
-                <a:solidFill>
-                  <a:schemeClr val="tx1"/>
-                </a:solidFill>
-              </a:rPr>
-              <a:t>Беременные члены экипажа: </a:t>
-            </a:r>
-            <a:pPr algn="l" marL="304800" indent="-304800">
-              <a:spcAft>
-                <a:spcPts val="1000"/>
-              </a:spcAft>
-              <a:buSzPct val="100000"/>
-              <a:buChar char="–"/>
-            </a:pPr>
-            <a:r>
-              <a:rPr lang="ru-RU" altLang="en-US" sz="2400" dirty="0">
-                <a:solidFill>
-                  <a:schemeClr val="tx1"/>
-                </a:solidFill>
-              </a:rPr>
-              <a:t>после уведомления – перевод на наземную работу или на рейсы, где доза плоду не превысит 1 мЗв</a:t>
-            </a:r>
-            <a:endParaRPr lang="ru-RU" sz="2400" dirty="0"/>
-          </a:p>
-          <a:p>
-            <a:pPr algn="l" marL="304800" indent="-304800">
-              <a:spcAft>
-                <a:spcPts val="1000"/>
-              </a:spcAft>
-              <a:buSzPct val="100000"/>
-              <a:buChar char="–"/>
-            </a:pPr>
-            <a:r>
-              <a:rPr lang="ru-RU" altLang="en-US" sz="2400" b="1" dirty="0">
-                <a:solidFill>
-                  <a:schemeClr val="tx1"/>
-                </a:solidFill>
-              </a:rPr>
-              <a:t>Приказ Минтруда № 255н: </a:t>
-            </a:r>
-            <a:pPr algn="l" marL="304800" indent="-304800">
-              <a:spcAft>
-                <a:spcPts val="1000"/>
-              </a:spcAft>
-              <a:buSzPct val="100000"/>
-              <a:buChar char="–"/>
-            </a:pPr>
-            <a:r>
-              <a:rPr lang="ru-RU" altLang="en-US" sz="2400" dirty="0">
-                <a:solidFill>
-                  <a:schemeClr val="tx1"/>
-                </a:solidFill>
-              </a:rPr>
-              <a:t>при пересмотре (до 01.03.2029) учесть космическое излучение в СОУТ</a:t>
-            </a:r>
-            <a:endParaRPr lang="ru-RU" sz="2400" dirty="0"/>
-          </a:p>
-        </p:txBody>
-      </p:sp>
-      <p:sp>
-        <p:nvSpPr>
-          <p:cNvPr id="25" name="Slide Number Placeholder 0"/>
-          <p:cNvSpPr>
-            <a:spLocks noGrp="1"/>
-          </p:cNvSpPr>
-          <p:nvPr>
-            <p:ph type="sldNum" sz="quarter" idx="4294967295"/>
-          </p:nvPr>
-        </p:nvSpPr>
-        <p:spPr>
-          <a:xfrm>
-            <a:off x="11002975" y="6355080"/>
-            <a:ext cx="731520" cy="320040"/>
-          </a:xfrm>
-          <a:prstGeom prst="rect">
-            <a:avLst/>
-          </a:prstGeom>
-          <a:extLst>
-            <a:ext uri="{C572A759-6A51-4108-AA02-DFA0A04FC94B}">
-              <ma14:wrappingTextBoxFlag xmlns:ma14="http://schemas.microsoft.com/office/mac/drawingml/2011/main" val="0"/>
-            </a:ext>
-          </a:extLst>
-        </p:spPr>
-        <p:txBody>
-          <a:bodyPr/>
-          <a:lstStyle>
-            <a:lvl1pPr>
-              <a:defRPr sz="1400">
-                <a:solidFill>
-                  <a:schemeClr val="tx1"/>
-                </a:solidFill>
-              </a:defRPr>
-            </a:lvl1pPr>
-          </a:lstStyle>
-          <a:p>
-            <a:pPr algn="r"/>
-            <a:fld id="{F7021451-1387-4CA6-816F-3879F97B5CBC}" type="slidenum">
-              <a:rPr b="0" lang="ru-RU"/>
-              <a:t>12</a:t>
-            </a:fld>
-            <a:endParaRPr lang="ru-RU"/>
-          </a:p>
-        </p:txBody>
-      </p:sp>
-    </p:spTree>
-  </p:cSld>
-  <p:clrMapOvr>
-    <a:masterClrMapping/>
-  </p:clrMapOvr>
-</p:sld>
-</file>
-
-<file path=ppt/slides/slide13.xml><?xml version="1.0" encoding="utf-8"?>
-<p:sld xmlns:a="http://schemas.openxmlformats.org/drawingml/2006/main" xmlns:r="http://schemas.openxmlformats.org/officeDocument/2006/relationships" xmlns:p="http://schemas.openxmlformats.org/presentationml/2006/main">
-  <p:cSld name="Slide 13">
-    <p:spTree>
-      <p:nvGrpSpPr>
-        <p:cNvPr id="1" name=""/>
-        <p:cNvGrpSpPr/>
-        <p:nvPr/>
-      </p:nvGrpSpPr>
-      <p:grpSpPr>
-        <a:xfrm>
-          <a:off x="0" y="0"/>
-          <a:ext cx="0" cy="0"/>
-          <a:chOff x="0" y="0"/>
-          <a:chExt cx="0" cy="0"/>
-        </a:xfrm>
-      </p:grpSpPr>
-      <p:sp>
-        <p:nvSpPr>
-          <p:cNvPr id="2" name="Text 1"/>
-          <p:cNvSpPr/>
-          <p:nvPr>
-            <p:ph idx="102" type="title" hasCustomPrompt="1"/>
-          </p:nvPr>
-        </p:nvSpPr>
-        <p:spPr>
-          <a:xfrm>
-            <a:off x="1325880" y="274320"/>
-            <a:ext cx="9539935" cy="914400"/>
-          </a:xfrm>
-          <a:prstGeom prst="rect">
-            <a:avLst/>
-          </a:prstGeom>
-          <a:noFill/>
-          <a:ln/>
-        </p:spPr>
-        <p:txBody>
-          <a:bodyPr wrap="square" lIns="635" tIns="635" rIns="635" bIns="635" rtlCol="0" anchor="ctr"/>
-          <a:lstStyle/>
-          <a:p>
-            <a:pPr algn="l" indent="0" marL="0">
-              <a:buNone/>
-            </a:pPr>
-            <a:r>
-              <a:rPr lang="ru-RU" altLang="en-US" sz="2800" b="1" dirty="0">
-                <a:solidFill>
-                  <a:schemeClr val="tx2"/>
-                </a:solidFill>
-              </a:rPr>
-              <a:t>Выводы</a:t>
-            </a:r>
-            <a:endParaRPr lang="ru-RU" sz="2800" dirty="0"/>
-          </a:p>
-        </p:txBody>
-      </p:sp>
-      <p:sp>
-        <p:nvSpPr>
-          <p:cNvPr id="3" name="Text 1"/>
-          <p:cNvSpPr/>
-          <p:nvPr>
-            <p:ph idx="103" type="body" hasCustomPrompt="1"/>
-          </p:nvPr>
-        </p:nvSpPr>
-        <p:spPr>
-          <a:xfrm>
-            <a:off x="548640" y="1371600"/>
-            <a:ext cx="11094415" cy="4846320"/>
-          </a:xfrm>
-          <a:prstGeom prst="rect">
-            <a:avLst/>
-          </a:prstGeom>
-          <a:noFill/>
-          <a:ln/>
-        </p:spPr>
-        <p:txBody>
-          <a:bodyPr wrap="square" lIns="635" tIns="635" rIns="635" bIns="635" rtlCol="0" anchor="t"/>
-          <a:lstStyle/>
-          <a:p>
-            <a:pPr algn="l" marL="304800" indent="-304800">
-              <a:spcAft>
-                <a:spcPts val="1000"/>
-              </a:spcAft>
-              <a:buSzPct val="100000"/>
-              <a:buChar char="–"/>
-            </a:pPr>
-            <a:r>
-              <a:rPr lang="ru-RU" altLang="en-US" sz="2400" dirty="0">
-                <a:solidFill>
-                  <a:schemeClr val="tx1"/>
-                </a:solidFill>
-              </a:rPr>
-              <a:t>Предел дозы для экипажей установлен (5 мЗв в год, пп. 4.1, 4.3 НРБ‑99/2009), но механизм его соблюдения не закреплён</a:t>
-            </a:r>
-            <a:endParaRPr lang="ru-RU" sz="2400" dirty="0"/>
-          </a:p>
-          <a:p>
-            <a:pPr algn="l" marL="304800" indent="-304800">
-              <a:spcAft>
-                <a:spcPts val="1000"/>
-              </a:spcAft>
-              <a:buSzPct val="100000"/>
-              <a:buChar char="–"/>
-            </a:pPr>
-            <a:r>
-              <a:rPr lang="ru-RU" altLang="en-US" sz="2400" dirty="0">
-                <a:solidFill>
-                  <a:schemeClr val="tx1"/>
-                </a:solidFill>
-              </a:rPr>
-              <a:t>После отмены специальных СанПиН не определено, кто и как рассчитывает и учитывает индивидуальную дозу; СОУТ и лимиты налёта этот пробел не закрывают</a:t>
-            </a:r>
-            <a:endParaRPr lang="ru-RU" sz="2400" dirty="0"/>
-          </a:p>
-          <a:p>
-            <a:pPr algn="l" marL="304800" indent="-304800">
-              <a:spcAft>
-                <a:spcPts val="1000"/>
-              </a:spcAft>
-              <a:buSzPct val="100000"/>
-              <a:buChar char="–"/>
-            </a:pPr>
-            <a:r>
-              <a:rPr lang="ru-RU" altLang="en-US" sz="2400" dirty="0">
-                <a:solidFill>
-                  <a:schemeClr val="tx1"/>
-                </a:solidFill>
-              </a:rPr>
-              <a:t>Предлагается закрепить расчёт и учёт индивидуальной дозы, сообщение дозы работнику, учёт дозы в графиках и защиту беременных – по образцу ст. 35 Директивы 2013/59/Евратом</a:t>
-            </a:r>
-            <a:endParaRPr lang="ru-RU" sz="2400" dirty="0"/>
-          </a:p>
-        </p:txBody>
-      </p:sp>
-      <p:sp>
-        <p:nvSpPr>
-          <p:cNvPr id="25" name="Slide Number Placeholder 0"/>
-          <p:cNvSpPr>
-            <a:spLocks noGrp="1"/>
-          </p:cNvSpPr>
-          <p:nvPr>
-            <p:ph type="sldNum" sz="quarter" idx="4294967295"/>
-          </p:nvPr>
-        </p:nvSpPr>
-        <p:spPr>
-          <a:xfrm>
-            <a:off x="11002975" y="6355080"/>
-            <a:ext cx="731520" cy="320040"/>
-          </a:xfrm>
-          <a:prstGeom prst="rect">
-            <a:avLst/>
-          </a:prstGeom>
-          <a:extLst>
-            <a:ext uri="{C572A759-6A51-4108-AA02-DFA0A04FC94B}">
-              <ma14:wrappingTextBoxFlag xmlns:ma14="http://schemas.microsoft.com/office/mac/drawingml/2011/main" val="0"/>
-            </a:ext>
-          </a:extLst>
-        </p:spPr>
-        <p:txBody>
-          <a:bodyPr/>
-          <a:lstStyle>
-            <a:lvl1pPr>
-              <a:defRPr sz="1400">
-                <a:solidFill>
-                  <a:schemeClr val="tx1"/>
-                </a:solidFill>
-              </a:defRPr>
-            </a:lvl1pPr>
-          </a:lstStyle>
-          <a:p>
-            <a:pPr algn="r"/>
-            <a:fld id="{F7021451-1387-4CA6-816F-3879F97B5CBC}" type="slidenum">
-              <a:rPr b="0" lang="ru-RU"/>
-              <a:t>13</a:t>
-            </a:fld>
-            <a:endParaRPr lang="ru-RU"/>
-          </a:p>
-        </p:txBody>
-      </p:sp>
-    </p:spTree>
-  </p:cSld>
-  <p:clrMapOvr>
-    <a:masterClrMapping/>
-  </p:clrMapOvr>
-</p:sld>
-</file>
-
-<file path=ppt/slides/slide14.xml><?xml version="1.0" encoding="utf-8"?>
-<p:sld xmlns:a="http://schemas.openxmlformats.org/drawingml/2006/main" xmlns:r="http://schemas.openxmlformats.org/officeDocument/2006/relationships" xmlns:p="http://schemas.openxmlformats.org/presentationml/2006/main">
-  <p:cSld name="Slide 14">
-    <p:spTree>
-      <p:nvGrpSpPr>
-        <p:cNvPr id="1" name=""/>
-        <p:cNvGrpSpPr/>
-        <p:nvPr/>
-      </p:nvGrpSpPr>
-      <p:grpSpPr>
-        <a:xfrm>
-          <a:off x="0" y="0"/>
-          <a:ext cx="0" cy="0"/>
-          <a:chOff x="0" y="0"/>
-          <a:chExt cx="0" cy="0"/>
-        </a:xfrm>
-      </p:grpSpPr>
-      <p:sp>
-        <p:nvSpPr>
-          <p:cNvPr id="2" name="Text 1"/>
-          <p:cNvSpPr/>
-          <p:nvPr>
-            <p:ph idx="102" type="title" hasCustomPrompt="1"/>
-          </p:nvPr>
-        </p:nvSpPr>
-        <p:spPr>
-          <a:xfrm>
-            <a:off x="1325880" y="274320"/>
-            <a:ext cx="9539935" cy="914400"/>
-          </a:xfrm>
-          <a:prstGeom prst="rect">
-            <a:avLst/>
-          </a:prstGeom>
-          <a:noFill/>
-          <a:ln/>
-        </p:spPr>
-        <p:txBody>
-          <a:bodyPr wrap="square" lIns="635" tIns="635" rIns="635" bIns="635" rtlCol="0" anchor="ctr"/>
-          <a:lstStyle/>
-          <a:p>
-            <a:pPr algn="l" indent="0" marL="0">
-              <a:buNone/>
-            </a:pPr>
-            <a:r>
-              <a:rPr lang="ru-RU" altLang="en-US" sz="2800" b="1" dirty="0">
-                <a:solidFill>
-                  <a:schemeClr val="tx2"/>
-                </a:solidFill>
-              </a:rPr>
-              <a:t>Список использованных источников</a:t>
-            </a:r>
-            <a:endParaRPr lang="ru-RU" sz="2800" dirty="0"/>
-          </a:p>
-        </p:txBody>
-      </p:sp>
-      <p:sp>
-        <p:nvSpPr>
-          <p:cNvPr id="3" name="Text 1"/>
-          <p:cNvSpPr txBox="1"/>
-          <p:nvPr/>
-        </p:nvSpPr>
-        <p:spPr>
-          <a:xfrm>
-            <a:off x="548640" y="1280160"/>
-            <a:ext cx="11094415" cy="4983480"/>
-          </a:xfrm>
-          <a:prstGeom prst="rect">
-            <a:avLst/>
-          </a:prstGeom>
-          <a:noFill/>
-          <a:ln/>
-        </p:spPr>
-        <p:txBody>
-          <a:bodyPr wrap="square" lIns="635" tIns="635" rIns="635" bIns="635" rtlCol="0" anchor="t"/>
-          <a:lstStyle/>
-          <a:p>
-            <a:pPr algn="just" marL="342900" indent="-342900">
-              <a:spcAft>
-                <a:spcPts val="400"/>
-              </a:spcAft>
-              <a:buSzPct val="100000"/>
-              <a:buFont typeface="+mj-lt"/>
-              <a:buAutoNum type="arabicPeriod" startAt="1"/>
-            </a:pPr>
-            <a:r>
-              <a:rPr lang="ru-RU" altLang="en-US" sz="1400" dirty="0">
-                <a:solidFill>
-                  <a:schemeClr val="tx1"/>
-                </a:solidFill>
-              </a:rPr>
-              <a:t>ICRP Publication 132. Radiological Protection from Cosmic Radiation in Aviation // Annals of the ICRP. – 2016. – Vol. 45, № 1.</a:t>
-            </a:r>
-            <a:endParaRPr lang="ru-RU" sz="1400" dirty="0"/>
-          </a:p>
-          <a:p>
-            <a:pPr algn="just" marL="342900" indent="-342900">
-              <a:spcAft>
-                <a:spcPts val="400"/>
-              </a:spcAft>
-              <a:buSzPct val="100000"/>
-              <a:buFont typeface="+mj-lt"/>
-              <a:buAutoNum type="arabicPeriod" startAt="1"/>
-            </a:pPr>
-            <a:r>
-              <a:rPr lang="ru-RU" altLang="en-US" sz="1400" dirty="0">
-                <a:solidFill>
-                  <a:schemeClr val="tx1"/>
-                </a:solidFill>
-              </a:rPr>
-              <a:t>Маткевич Е. И., Бурмистров В. И., Иванов И. В. Оценка доз облучения летного состава воздушных судов и обоснование мероприятий по их снижению // Медицинская радиология и радиационная безопасность. – 2025. – Т. 70, № 6. – С. 28–⁠39.</a:t>
-            </a:r>
-            <a:endParaRPr lang="ru-RU" sz="1400" dirty="0"/>
-          </a:p>
-          <a:p>
-            <a:pPr algn="just" marL="342900" indent="-342900">
-              <a:spcAft>
-                <a:spcPts val="400"/>
-              </a:spcAft>
-              <a:buSzPct val="100000"/>
-              <a:buFont typeface="+mj-lt"/>
-              <a:buAutoNum type="arabicPeriod" startAt="1"/>
-            </a:pPr>
-            <a:r>
-              <a:rPr lang="ru-RU" altLang="en-US" sz="1400" dirty="0">
-                <a:solidFill>
-                  <a:schemeClr val="tx1"/>
-                </a:solidFill>
-              </a:rPr>
-              <a:t>О радиационной безопасности населения : Федеральный закон от 09.01.1996 № 3‑ФЗ.</a:t>
-            </a:r>
-            <a:endParaRPr lang="ru-RU" sz="1400" dirty="0"/>
-          </a:p>
-          <a:p>
-            <a:pPr algn="just" marL="342900" indent="-342900">
-              <a:spcAft>
-                <a:spcPts val="400"/>
-              </a:spcAft>
-              <a:buSzPct val="100000"/>
-              <a:buFont typeface="+mj-lt"/>
-              <a:buAutoNum type="arabicPeriod" startAt="1"/>
-            </a:pPr>
-            <a:r>
-              <a:rPr lang="ru-RU" altLang="en-US" sz="1400" dirty="0">
-                <a:solidFill>
-                  <a:schemeClr val="tx1"/>
-                </a:solidFill>
-              </a:rPr>
-              <a:t>О санитарно-эпидемиологическом благополучии населения : Федеральный закон от 30.03.1999 № 52‑ФЗ.</a:t>
-            </a:r>
-            <a:endParaRPr lang="ru-RU" sz="1400" dirty="0"/>
-          </a:p>
-          <a:p>
-            <a:pPr algn="just" marL="342900" indent="-342900">
-              <a:spcAft>
-                <a:spcPts val="400"/>
-              </a:spcAft>
-              <a:buSzPct val="100000"/>
-              <a:buFont typeface="+mj-lt"/>
-              <a:buAutoNum type="arabicPeriod" startAt="1"/>
-            </a:pPr>
-            <a:r>
-              <a:rPr lang="ru-RU" altLang="en-US" sz="1400" dirty="0">
-                <a:solidFill>
-                  <a:schemeClr val="tx1"/>
-                </a:solidFill>
-              </a:rPr>
-              <a:t>СанПиН 2.6.1.2523‑09. Нормы радиационной безопасности (НРБ‑99/2009) : утв. постановлением Главного государственного санитарного врача РФ от 07.07.2009 № 47.</a:t>
-            </a:r>
-            <a:endParaRPr lang="ru-RU" sz="1400" dirty="0"/>
-          </a:p>
-          <a:p>
-            <a:pPr algn="just" marL="342900" indent="-342900">
-              <a:spcAft>
-                <a:spcPts val="400"/>
-              </a:spcAft>
-              <a:buSzPct val="100000"/>
-              <a:buFont typeface="+mj-lt"/>
-              <a:buAutoNum type="arabicPeriod" startAt="1"/>
-            </a:pPr>
-            <a:r>
-              <a:rPr lang="ru-RU" altLang="en-US" sz="1400" dirty="0">
-                <a:solidFill>
-                  <a:schemeClr val="tx1"/>
-                </a:solidFill>
-              </a:rPr>
-              <a:t>Воздушный кодекс Российской Федерации от 19.03.1997 № 60‑ФЗ.</a:t>
-            </a:r>
-            <a:endParaRPr lang="ru-RU" sz="1400" dirty="0"/>
-          </a:p>
-          <a:p>
-            <a:pPr algn="just" marL="342900" indent="-342900">
-              <a:spcAft>
-                <a:spcPts val="400"/>
-              </a:spcAft>
-              <a:buSzPct val="100000"/>
-              <a:buFont typeface="+mj-lt"/>
-              <a:buAutoNum type="arabicPeriod" startAt="1"/>
-            </a:pPr>
-            <a:r>
-              <a:rPr lang="ru-RU" altLang="en-US" sz="1400" dirty="0">
-                <a:solidFill>
-                  <a:schemeClr val="tx1"/>
-                </a:solidFill>
-              </a:rPr>
-              <a:t>Постановление Правительства РФ от 08.10.2020 № 1631 (об утрате силы СанПиН 2.5.1.2423‑08 с 01.01.2021).</a:t>
-            </a:r>
-            <a:endParaRPr lang="ru-RU" sz="1400" dirty="0"/>
-          </a:p>
-        </p:txBody>
-      </p:sp>
-      <p:sp>
-        <p:nvSpPr>
-          <p:cNvPr id="25" name="Slide Number Placeholder 0"/>
-          <p:cNvSpPr>
-            <a:spLocks noGrp="1"/>
-          </p:cNvSpPr>
-          <p:nvPr>
-            <p:ph type="sldNum" sz="quarter" idx="4294967295"/>
-          </p:nvPr>
-        </p:nvSpPr>
-        <p:spPr>
-          <a:xfrm>
-            <a:off x="11002975" y="6355080"/>
-            <a:ext cx="731520" cy="320040"/>
-          </a:xfrm>
-          <a:prstGeom prst="rect">
-            <a:avLst/>
-          </a:prstGeom>
-          <a:extLst>
-            <a:ext uri="{C572A759-6A51-4108-AA02-DFA0A04FC94B}">
-              <ma14:wrappingTextBoxFlag xmlns:ma14="http://schemas.microsoft.com/office/mac/drawingml/2011/main" val="0"/>
-            </a:ext>
-          </a:extLst>
-        </p:spPr>
-        <p:txBody>
-          <a:bodyPr/>
-          <a:lstStyle>
-            <a:lvl1pPr>
-              <a:defRPr sz="1400">
-                <a:solidFill>
-                  <a:schemeClr val="tx1"/>
-                </a:solidFill>
-              </a:defRPr>
-            </a:lvl1pPr>
-          </a:lstStyle>
-          <a:p>
-            <a:pPr algn="r"/>
-            <a:fld id="{F7021451-1387-4CA6-816F-3879F97B5CBC}" type="slidenum">
-              <a:rPr b="0" lang="ru-RU"/>
               <a:t>14</a:t>
             </a:fld>
             <a:endParaRPr lang="ru-RU"/>
@@ -5852,7 +5922,7 @@
                   <a:schemeClr val="tx2"/>
                 </a:solidFill>
               </a:rPr>
-              <a:t>Список использованных источников</a:t>
+              <a:t>Предложения по совершенствованию</a:t>
             </a:r>
             <a:endParaRPr lang="ru-RU" sz="2800" dirty="0"/>
           </a:p>
@@ -5861,13 +5931,15 @@
       <p:sp>
         <p:nvSpPr>
           <p:cNvPr id="3" name="Text 1"/>
-          <p:cNvSpPr txBox="1"/>
-          <p:nvPr/>
+          <p:cNvSpPr/>
+          <p:nvPr>
+            <p:ph idx="103" type="body" hasCustomPrompt="1"/>
+          </p:nvPr>
         </p:nvSpPr>
         <p:spPr>
           <a:xfrm>
-            <a:off x="548640" y="1280160"/>
-            <a:ext cx="11094415" cy="4983480"/>
+            <a:off x="548640" y="1371600"/>
+            <a:ext cx="11094415" cy="4846320"/>
           </a:xfrm>
           <a:prstGeom prst="rect">
             <a:avLst/>
@@ -5879,137 +5951,103 @@
           <a:bodyPr wrap="square" lIns="635" tIns="635" rIns="635" bIns="635" rtlCol="0" anchor="t"/>
           <a:lstStyle/>
           <a:p>
-            <a:pPr algn="just" marL="342900" indent="-342900">
+            <a:pPr algn="l" marL="304800" indent="-304800">
               <a:spcAft>
-                <a:spcPts val="400"/>
+                <a:spcPts val="1000"/>
               </a:spcAft>
               <a:buSzPct val="100000"/>
-              <a:buFont typeface="+mj-lt"/>
-              <a:buAutoNum type="arabicPeriod" startAt="8"/>
+              <a:buChar char="–"/>
             </a:pPr>
             <a:r>
-              <a:rPr lang="ru-RU" altLang="en-US" sz="1400" dirty="0">
+              <a:rPr lang="ru-RU" altLang="en-US" sz="2400" b="1" dirty="0">
                 <a:solidFill>
                   <a:schemeClr val="tx1"/>
                 </a:solidFill>
               </a:rPr>
-              <a:t>СанПиН 2.6.4115‑25 : утв. постановлением Главного государственного санитарного врача РФ от 27.03.2025 № 6 (об утрате силы СанПиН 2.6.1.2800‑10 с 01.09.2025).</a:t>
-            </a:r>
-            <a:endParaRPr lang="ru-RU" sz="1400" dirty="0"/>
-          </a:p>
-          <a:p>
-            <a:pPr algn="just" marL="342900" indent="-342900">
+              <a:t>Санитарные правила: </a:t>
+            </a:r>
+            <a:pPr algn="l" marL="304800" indent="-304800">
               <a:spcAft>
-                <a:spcPts val="400"/>
+                <a:spcPts val="1000"/>
               </a:spcAft>
               <a:buSzPct val="100000"/>
-              <a:buFont typeface="+mj-lt"/>
-              <a:buAutoNum type="arabicPeriod" startAt="8"/>
+              <a:buChar char="–"/>
             </a:pPr>
             <a:r>
-              <a:rPr lang="ru-RU" altLang="en-US" sz="1400" dirty="0">
+              <a:rPr lang="ru-RU" altLang="en-US" sz="2400" dirty="0">
                 <a:solidFill>
                   <a:schemeClr val="tx1"/>
                 </a:solidFill>
               </a:rPr>
-              <a:t>Трудовой кодекс Российской Федерации от 30.12.2001 № 197‑ФЗ.</a:t>
-            </a:r>
-            <a:endParaRPr lang="ru-RU" sz="1400" dirty="0"/>
-          </a:p>
-          <a:p>
-            <a:pPr algn="just" marL="342900" indent="-342900">
+              <a:t>если доза члена экипажа может превысить 1 мЗв в год, эксплуатант рассчитывает индивидуальную дозу, назначает ответственного и ведёт учёт</a:t>
+            </a:r>
+            <a:endParaRPr lang="ru-RU" sz="2400" dirty="0"/>
+          </a:p>
+          <a:p>
+            <a:pPr algn="l" marL="304800" indent="-304800">
               <a:spcAft>
-                <a:spcPts val="400"/>
+                <a:spcPts val="1000"/>
               </a:spcAft>
               <a:buSzPct val="100000"/>
-              <a:buFont typeface="+mj-lt"/>
-              <a:buAutoNum type="arabicPeriod" startAt="8"/>
+              <a:buChar char="–"/>
             </a:pPr>
             <a:r>
-              <a:rPr lang="ru-RU" altLang="en-US" sz="1400" dirty="0">
+              <a:rPr lang="ru-RU" altLang="en-US" sz="2400" b="1" dirty="0">
                 <a:solidFill>
                   <a:schemeClr val="tx1"/>
                 </a:solidFill>
               </a:rPr>
-              <a:t>Об утверждении особенностей проведения специальной оценки условий труда на рабочих местах членов летных и кабинных экипажей воздушных судов гражданской авиации : приказ Минтруда России от 06.05.2024 № 255н.</a:t>
-            </a:r>
-            <a:endParaRPr lang="ru-RU" sz="1400" dirty="0"/>
-          </a:p>
-          <a:p>
-            <a:pPr algn="just" marL="342900" indent="-342900">
+              <a:t>Контрольный уровень: </a:t>
+            </a:r>
+            <a:pPr algn="l" marL="304800" indent="-304800">
               <a:spcAft>
-                <a:spcPts val="400"/>
+                <a:spcPts val="1000"/>
               </a:spcAft>
               <a:buSzPct val="100000"/>
-              <a:buFont typeface="+mj-lt"/>
-              <a:buAutoNum type="arabicPeriod" startAt="8"/>
+              <a:buChar char="–"/>
             </a:pPr>
             <a:r>
-              <a:rPr lang="ru-RU" altLang="en-US" sz="1400" dirty="0">
+              <a:rPr lang="ru-RU" altLang="en-US" sz="2400" dirty="0">
                 <a:solidFill>
                   <a:schemeClr val="tx1"/>
                 </a:solidFill>
               </a:rPr>
-              <a:t>Приказ Минтранса России от 10.11.2025 № 381 «Об установлении Особенностей режима рабочего времени и времени отдыха специалистов авиационного персонала гражданской авиации…». – Введ. 01.03.2026.</a:t>
-            </a:r>
-            <a:endParaRPr lang="ru-RU" sz="1400" dirty="0"/>
-          </a:p>
-          <a:p>
-            <a:pPr algn="just" marL="342900" indent="-342900">
+              <a:t>ниже предела 5 мЗв в год; при его достижении график члена экипажа корректируется</a:t>
+            </a:r>
+            <a:endParaRPr lang="ru-RU" sz="2400" dirty="0"/>
+          </a:p>
+          <a:p>
+            <a:pPr algn="l" marL="304800" indent="-304800">
               <a:spcAft>
-                <a:spcPts val="400"/>
+                <a:spcPts val="1000"/>
               </a:spcAft>
               <a:buSzPct val="100000"/>
-              <a:buFont typeface="+mj-lt"/>
-              <a:buAutoNum type="arabicPeriod" startAt="8"/>
+              <a:buChar char="–"/>
             </a:pPr>
             <a:r>
-              <a:rPr lang="ru-RU" altLang="en-US" sz="1400" dirty="0">
+              <a:rPr lang="ru-RU" altLang="en-US" sz="2400" b="1" dirty="0">
                 <a:solidFill>
                   <a:schemeClr val="tx1"/>
                 </a:solidFill>
               </a:rPr>
-              <a:t>Council Directive 2013/59/Euratom of 5 December 2013 laying down basic safety standards for protection against the dangers arising from exposure to ionising radiation.</a:t>
-            </a:r>
-            <a:endParaRPr lang="ru-RU" sz="1400" dirty="0"/>
-          </a:p>
-          <a:p>
-            <a:pPr algn="just" marL="342900" indent="-342900">
+              <a:t>Методические указания Роспотребнадзора: </a:t>
+            </a:r>
+            <a:pPr algn="l" marL="304800" indent="-304800">
               <a:spcAft>
-                <a:spcPts val="400"/>
+                <a:spcPts val="1000"/>
               </a:spcAft>
               <a:buSzPct val="100000"/>
-              <a:buFont typeface="+mj-lt"/>
-              <a:buAutoNum type="arabicPeriod" startAt="8"/>
+              <a:buChar char="–"/>
             </a:pPr>
             <a:r>
-              <a:rPr lang="ru-RU" altLang="en-US" sz="1400" dirty="0">
+              <a:rPr lang="ru-RU" altLang="en-US" sz="2400" dirty="0">
                 <a:solidFill>
                   <a:schemeClr val="tx1"/>
                 </a:solidFill>
               </a:rPr>
-              <a:t>Gesetz zum Schutz vor der schädlichen Wirkung ionisierender Strahlung (Strahlenschutzgesetz – StrlSchG) vom 27.06.2017.</a:t>
-            </a:r>
-            <a:endParaRPr lang="ru-RU" sz="1400" dirty="0"/>
-          </a:p>
-          <a:p>
-            <a:pPr algn="just" marL="342900" indent="-342900">
-              <a:spcAft>
-                <a:spcPts val="400"/>
-              </a:spcAft>
-              <a:buSzPct val="100000"/>
-              <a:buFont typeface="+mj-lt"/>
-              <a:buAutoNum type="arabicPeriod" startAt="8"/>
-            </a:pPr>
-            <a:r>
-              <a:rPr lang="ru-RU" altLang="en-US" sz="1400" dirty="0">
-                <a:solidFill>
-                  <a:schemeClr val="tx1"/>
-                </a:solidFill>
-              </a:rPr>
-              <a:t>Verordnung zum Schutz vor der schädlichen Wirkung ionisierender Strahlung (Strahlenschutzverordnung – StrlSchV) vom 29.11.2018.</a:t>
-            </a:r>
-            <a:endParaRPr lang="ru-RU" sz="1400" dirty="0"/>
+              <a:t>расчёт дозы по фактическим маршрутам, эшелонам и времени полёта (в перспективе – единый государственный сервис расчёта)</a:t>
+            </a:r>
+            <a:endParaRPr lang="ru-RU" sz="2400" dirty="0"/>
           </a:p>
         </p:txBody>
       </p:sp>
@@ -6069,6 +6107,852 @@
 <file path=ppt/slides/slide16.xml><?xml version="1.0" encoding="utf-8"?>
 <p:sld xmlns:a="http://schemas.openxmlformats.org/drawingml/2006/main" xmlns:r="http://schemas.openxmlformats.org/officeDocument/2006/relationships" xmlns:p="http://schemas.openxmlformats.org/presentationml/2006/main">
   <p:cSld name="Slide 16">
+    <p:spTree>
+      <p:nvGrpSpPr>
+        <p:cNvPr id="1" name=""/>
+        <p:cNvGrpSpPr/>
+        <p:nvPr/>
+      </p:nvGrpSpPr>
+      <p:grpSpPr>
+        <a:xfrm>
+          <a:off x="0" y="0"/>
+          <a:ext cx="0" cy="0"/>
+          <a:chOff x="0" y="0"/>
+          <a:chExt cx="0" cy="0"/>
+        </a:xfrm>
+      </p:grpSpPr>
+      <p:sp>
+        <p:nvSpPr>
+          <p:cNvPr id="2" name="Text 1"/>
+          <p:cNvSpPr/>
+          <p:nvPr>
+            <p:ph idx="102" type="title" hasCustomPrompt="1"/>
+          </p:nvPr>
+        </p:nvSpPr>
+        <p:spPr>
+          <a:xfrm>
+            <a:off x="1325880" y="274320"/>
+            <a:ext cx="9539935" cy="914400"/>
+          </a:xfrm>
+          <a:prstGeom prst="rect">
+            <a:avLst/>
+          </a:prstGeom>
+          <a:noFill/>
+          <a:ln/>
+        </p:spPr>
+        <p:txBody>
+          <a:bodyPr wrap="square" lIns="635" tIns="635" rIns="635" bIns="635" rtlCol="0" anchor="ctr"/>
+          <a:lstStyle/>
+          <a:p>
+            <a:pPr algn="l" indent="0" marL="0">
+              <a:buNone/>
+            </a:pPr>
+            <a:r>
+              <a:rPr lang="ru-RU" altLang="en-US" sz="2800" b="1" dirty="0">
+                <a:solidFill>
+                  <a:schemeClr val="tx2"/>
+                </a:solidFill>
+              </a:rPr>
+              <a:t>Предложения по совершенствованию</a:t>
+            </a:r>
+            <a:endParaRPr lang="ru-RU" sz="2800" dirty="0"/>
+          </a:p>
+        </p:txBody>
+      </p:sp>
+      <p:sp>
+        <p:nvSpPr>
+          <p:cNvPr id="3" name="Text 1"/>
+          <p:cNvSpPr/>
+          <p:nvPr>
+            <p:ph idx="103" type="body" hasCustomPrompt="1"/>
+          </p:nvPr>
+        </p:nvSpPr>
+        <p:spPr>
+          <a:xfrm>
+            <a:off x="548640" y="1371600"/>
+            <a:ext cx="11094415" cy="4846320"/>
+          </a:xfrm>
+          <a:prstGeom prst="rect">
+            <a:avLst/>
+          </a:prstGeom>
+          <a:noFill/>
+          <a:ln/>
+        </p:spPr>
+        <p:txBody>
+          <a:bodyPr wrap="square" lIns="635" tIns="635" rIns="635" bIns="635" rtlCol="0" anchor="t"/>
+          <a:lstStyle/>
+          <a:p>
+            <a:pPr algn="l" marL="304800" indent="-304800">
+              <a:spcAft>
+                <a:spcPts val="1000"/>
+              </a:spcAft>
+              <a:buSzPct val="100000"/>
+              <a:buChar char="–"/>
+            </a:pPr>
+            <a:r>
+              <a:rPr lang="ru-RU" altLang="en-US" sz="2400" b="1" dirty="0">
+                <a:solidFill>
+                  <a:schemeClr val="tx1"/>
+                </a:solidFill>
+              </a:rPr>
+              <a:t>ЕСКИД: </a:t>
+            </a:r>
+            <a:pPr algn="l" marL="304800" indent="-304800">
+              <a:spcAft>
+                <a:spcPts val="1000"/>
+              </a:spcAft>
+              <a:buSzPct val="100000"/>
+              <a:buChar char="–"/>
+            </a:pPr>
+            <a:r>
+              <a:rPr lang="ru-RU" altLang="en-US" sz="2400" dirty="0">
+                <a:solidFill>
+                  <a:schemeClr val="tx1"/>
+                </a:solidFill>
+              </a:rPr>
+              <a:t>дополнить формы учёта дозами членов экипажей; ежегодно и при увольнении сообщать работнику его дозу</a:t>
+            </a:r>
+            <a:endParaRPr lang="ru-RU" sz="2400" dirty="0"/>
+          </a:p>
+          <a:p>
+            <a:pPr algn="l" marL="304800" indent="-304800">
+              <a:spcAft>
+                <a:spcPts val="1000"/>
+              </a:spcAft>
+              <a:buSzPct val="100000"/>
+              <a:buChar char="–"/>
+            </a:pPr>
+            <a:r>
+              <a:rPr lang="ru-RU" altLang="en-US" sz="2400" b="1" dirty="0">
+                <a:solidFill>
+                  <a:schemeClr val="tx1"/>
+                </a:solidFill>
+              </a:rPr>
+              <a:t>Приказ Минтранса № 381 (ст. 329 ТК РФ): </a:t>
+            </a:r>
+            <a:pPr algn="l" marL="304800" indent="-304800">
+              <a:spcAft>
+                <a:spcPts val="1000"/>
+              </a:spcAft>
+              <a:buSzPct val="100000"/>
+              <a:buChar char="–"/>
+            </a:pPr>
+            <a:r>
+              <a:rPr lang="ru-RU" altLang="en-US" sz="2400" dirty="0">
+                <a:solidFill>
+                  <a:schemeClr val="tx1"/>
+                </a:solidFill>
+              </a:rPr>
+              <a:t>учитывать дозу при составлении графиков; согласие на налёт до 900 ч – только после сообщения работнику его дозы</a:t>
+            </a:r>
+            <a:endParaRPr lang="ru-RU" sz="2400" dirty="0"/>
+          </a:p>
+          <a:p>
+            <a:pPr algn="l" marL="304800" indent="-304800">
+              <a:spcAft>
+                <a:spcPts val="1000"/>
+              </a:spcAft>
+              <a:buSzPct val="100000"/>
+              <a:buChar char="–"/>
+            </a:pPr>
+            <a:r>
+              <a:rPr lang="ru-RU" altLang="en-US" sz="2400" b="1" dirty="0">
+                <a:solidFill>
+                  <a:schemeClr val="tx1"/>
+                </a:solidFill>
+              </a:rPr>
+              <a:t>Беременные члены экипажа: </a:t>
+            </a:r>
+            <a:pPr algn="l" marL="304800" indent="-304800">
+              <a:spcAft>
+                <a:spcPts val="1000"/>
+              </a:spcAft>
+              <a:buSzPct val="100000"/>
+              <a:buChar char="–"/>
+            </a:pPr>
+            <a:r>
+              <a:rPr lang="ru-RU" altLang="en-US" sz="2400" dirty="0">
+                <a:solidFill>
+                  <a:schemeClr val="tx1"/>
+                </a:solidFill>
+              </a:rPr>
+              <a:t>после уведомления – перевод на наземную работу или на рейсы, где доза плоду не превысит 1 мЗв</a:t>
+            </a:r>
+            <a:endParaRPr lang="ru-RU" sz="2400" dirty="0"/>
+          </a:p>
+          <a:p>
+            <a:pPr algn="l" marL="304800" indent="-304800">
+              <a:spcAft>
+                <a:spcPts val="1000"/>
+              </a:spcAft>
+              <a:buSzPct val="100000"/>
+              <a:buChar char="–"/>
+            </a:pPr>
+            <a:r>
+              <a:rPr lang="ru-RU" altLang="en-US" sz="2400" b="1" dirty="0">
+                <a:solidFill>
+                  <a:schemeClr val="tx1"/>
+                </a:solidFill>
+              </a:rPr>
+              <a:t>Приказ Минтруда № 255н: </a:t>
+            </a:r>
+            <a:pPr algn="l" marL="304800" indent="-304800">
+              <a:spcAft>
+                <a:spcPts val="1000"/>
+              </a:spcAft>
+              <a:buSzPct val="100000"/>
+              <a:buChar char="–"/>
+            </a:pPr>
+            <a:r>
+              <a:rPr lang="ru-RU" altLang="en-US" sz="2400" dirty="0">
+                <a:solidFill>
+                  <a:schemeClr val="tx1"/>
+                </a:solidFill>
+              </a:rPr>
+              <a:t>при пересмотре (до 01.03.2029) учесть космическое излучение в СОУТ</a:t>
+            </a:r>
+            <a:endParaRPr lang="ru-RU" sz="2400" dirty="0"/>
+          </a:p>
+        </p:txBody>
+      </p:sp>
+      <p:sp>
+        <p:nvSpPr>
+          <p:cNvPr id="25" name="Slide Number Placeholder 0"/>
+          <p:cNvSpPr>
+            <a:spLocks noGrp="1"/>
+          </p:cNvSpPr>
+          <p:nvPr>
+            <p:ph type="sldNum" sz="quarter" idx="4294967295"/>
+          </p:nvPr>
+        </p:nvSpPr>
+        <p:spPr>
+          <a:xfrm>
+            <a:off x="11002975" y="6355080"/>
+            <a:ext cx="731520" cy="320040"/>
+          </a:xfrm>
+          <a:prstGeom prst="rect">
+            <a:avLst/>
+          </a:prstGeom>
+          <a:extLst>
+            <a:ext uri="{C572A759-6A51-4108-AA02-DFA0A04FC94B}">
+              <ma14:wrappingTextBoxFlag xmlns:ma14="http://schemas.microsoft.com/office/mac/drawingml/2011/main" val="0"/>
+            </a:ext>
+          </a:extLst>
+        </p:spPr>
+        <p:txBody>
+          <a:bodyPr/>
+          <a:lstStyle>
+            <a:lvl1pPr>
+              <a:defRPr sz="1400">
+                <a:solidFill>
+                  <a:schemeClr val="tx1"/>
+                </a:solidFill>
+              </a:defRPr>
+            </a:lvl1pPr>
+          </a:lstStyle>
+          <a:p>
+            <a:pPr algn="r"/>
+            <a:fld id="{F7021451-1387-4CA6-816F-3879F97B5CBC}" type="slidenum">
+              <a:rPr b="0" lang="ru-RU"/>
+              <a:t>16</a:t>
+            </a:fld>
+            <a:endParaRPr lang="ru-RU"/>
+          </a:p>
+        </p:txBody>
+      </p:sp>
+    </p:spTree>
+  </p:cSld>
+  <p:clrMapOvr>
+    <a:masterClrMapping/>
+  </p:clrMapOvr>
+</p:sld>
+</file>
+
+<file path=ppt/slides/slide17.xml><?xml version="1.0" encoding="utf-8"?>
+<p:sld xmlns:a="http://schemas.openxmlformats.org/drawingml/2006/main" xmlns:r="http://schemas.openxmlformats.org/officeDocument/2006/relationships" xmlns:p="http://schemas.openxmlformats.org/presentationml/2006/main">
+  <p:cSld name="Slide 17">
+    <p:spTree>
+      <p:nvGrpSpPr>
+        <p:cNvPr id="1" name=""/>
+        <p:cNvGrpSpPr/>
+        <p:nvPr/>
+      </p:nvGrpSpPr>
+      <p:grpSpPr>
+        <a:xfrm>
+          <a:off x="0" y="0"/>
+          <a:ext cx="0" cy="0"/>
+          <a:chOff x="0" y="0"/>
+          <a:chExt cx="0" cy="0"/>
+        </a:xfrm>
+      </p:grpSpPr>
+      <p:sp>
+        <p:nvSpPr>
+          <p:cNvPr id="2" name="Text 1"/>
+          <p:cNvSpPr/>
+          <p:nvPr>
+            <p:ph idx="102" type="title" hasCustomPrompt="1"/>
+          </p:nvPr>
+        </p:nvSpPr>
+        <p:spPr>
+          <a:xfrm>
+            <a:off x="1325880" y="274320"/>
+            <a:ext cx="9539935" cy="914400"/>
+          </a:xfrm>
+          <a:prstGeom prst="rect">
+            <a:avLst/>
+          </a:prstGeom>
+          <a:noFill/>
+          <a:ln/>
+        </p:spPr>
+        <p:txBody>
+          <a:bodyPr wrap="square" lIns="635" tIns="635" rIns="635" bIns="635" rtlCol="0" anchor="ctr"/>
+          <a:lstStyle/>
+          <a:p>
+            <a:pPr algn="l" indent="0" marL="0">
+              <a:buNone/>
+            </a:pPr>
+            <a:r>
+              <a:rPr lang="ru-RU" altLang="en-US" sz="2800" b="1" dirty="0">
+                <a:solidFill>
+                  <a:schemeClr val="tx2"/>
+                </a:solidFill>
+              </a:rPr>
+              <a:t>Выводы</a:t>
+            </a:r>
+            <a:endParaRPr lang="ru-RU" sz="2800" dirty="0"/>
+          </a:p>
+        </p:txBody>
+      </p:sp>
+      <p:sp>
+        <p:nvSpPr>
+          <p:cNvPr id="3" name="Text 1"/>
+          <p:cNvSpPr/>
+          <p:nvPr>
+            <p:ph idx="103" type="body" hasCustomPrompt="1"/>
+          </p:nvPr>
+        </p:nvSpPr>
+        <p:spPr>
+          <a:xfrm>
+            <a:off x="548640" y="1371600"/>
+            <a:ext cx="11094415" cy="4846320"/>
+          </a:xfrm>
+          <a:prstGeom prst="rect">
+            <a:avLst/>
+          </a:prstGeom>
+          <a:noFill/>
+          <a:ln/>
+        </p:spPr>
+        <p:txBody>
+          <a:bodyPr wrap="square" lIns="635" tIns="635" rIns="635" bIns="635" rtlCol="0" anchor="t"/>
+          <a:lstStyle/>
+          <a:p>
+            <a:pPr algn="l" marL="304800" indent="-304800">
+              <a:spcAft>
+                <a:spcPts val="1000"/>
+              </a:spcAft>
+              <a:buSzPct val="100000"/>
+              <a:buChar char="–"/>
+            </a:pPr>
+            <a:r>
+              <a:rPr lang="ru-RU" altLang="en-US" sz="2400" dirty="0">
+                <a:solidFill>
+                  <a:schemeClr val="tx1"/>
+                </a:solidFill>
+              </a:rPr>
+              <a:t>Предел дозы для экипажей установлен (5 мЗв в год, пп. 4.1, 4.3 НРБ‑99/2009), но механизм его соблюдения не закреплён</a:t>
+            </a:r>
+            <a:endParaRPr lang="ru-RU" sz="2400" dirty="0"/>
+          </a:p>
+          <a:p>
+            <a:pPr algn="l" marL="304800" indent="-304800">
+              <a:spcAft>
+                <a:spcPts val="1000"/>
+              </a:spcAft>
+              <a:buSzPct val="100000"/>
+              <a:buChar char="–"/>
+            </a:pPr>
+            <a:r>
+              <a:rPr lang="ru-RU" altLang="en-US" sz="2400" dirty="0">
+                <a:solidFill>
+                  <a:schemeClr val="tx1"/>
+                </a:solidFill>
+              </a:rPr>
+              <a:t>В действующих актах не обнаружено норм о том, кто и как рассчитывает и учитывает индивидуальную дозу; СОУТ и лимиты налёта этот пробел не закрывают</a:t>
+            </a:r>
+            <a:endParaRPr lang="ru-RU" sz="2400" dirty="0"/>
+          </a:p>
+          <a:p>
+            <a:pPr algn="l" marL="304800" indent="-304800">
+              <a:spcAft>
+                <a:spcPts val="1000"/>
+              </a:spcAft>
+              <a:buSzPct val="100000"/>
+              <a:buChar char="–"/>
+            </a:pPr>
+            <a:r>
+              <a:rPr lang="ru-RU" altLang="en-US" sz="2400" dirty="0">
+                <a:solidFill>
+                  <a:schemeClr val="tx1"/>
+                </a:solidFill>
+              </a:rPr>
+              <a:t>Предлагается закрепить расчёт и учёт индивидуальной дозы, сообщение дозы работнику, учёт дозы в графиках и защиту беременных – по образцу ст. 35 Директивы 2013/59/Евратом</a:t>
+            </a:r>
+            <a:endParaRPr lang="ru-RU" sz="2400" dirty="0"/>
+          </a:p>
+        </p:txBody>
+      </p:sp>
+      <p:sp>
+        <p:nvSpPr>
+          <p:cNvPr id="25" name="Slide Number Placeholder 0"/>
+          <p:cNvSpPr>
+            <a:spLocks noGrp="1"/>
+          </p:cNvSpPr>
+          <p:nvPr>
+            <p:ph type="sldNum" sz="quarter" idx="4294967295"/>
+          </p:nvPr>
+        </p:nvSpPr>
+        <p:spPr>
+          <a:xfrm>
+            <a:off x="11002975" y="6355080"/>
+            <a:ext cx="731520" cy="320040"/>
+          </a:xfrm>
+          <a:prstGeom prst="rect">
+            <a:avLst/>
+          </a:prstGeom>
+          <a:extLst>
+            <a:ext uri="{C572A759-6A51-4108-AA02-DFA0A04FC94B}">
+              <ma14:wrappingTextBoxFlag xmlns:ma14="http://schemas.microsoft.com/office/mac/drawingml/2011/main" val="0"/>
+            </a:ext>
+          </a:extLst>
+        </p:spPr>
+        <p:txBody>
+          <a:bodyPr/>
+          <a:lstStyle>
+            <a:lvl1pPr>
+              <a:defRPr sz="1400">
+                <a:solidFill>
+                  <a:schemeClr val="tx1"/>
+                </a:solidFill>
+              </a:defRPr>
+            </a:lvl1pPr>
+          </a:lstStyle>
+          <a:p>
+            <a:pPr algn="r"/>
+            <a:fld id="{F7021451-1387-4CA6-816F-3879F97B5CBC}" type="slidenum">
+              <a:rPr b="0" lang="ru-RU"/>
+              <a:t>17</a:t>
+            </a:fld>
+            <a:endParaRPr lang="ru-RU"/>
+          </a:p>
+        </p:txBody>
+      </p:sp>
+    </p:spTree>
+  </p:cSld>
+  <p:clrMapOvr>
+    <a:masterClrMapping/>
+  </p:clrMapOvr>
+</p:sld>
+</file>
+
+<file path=ppt/slides/slide18.xml><?xml version="1.0" encoding="utf-8"?>
+<p:sld xmlns:a="http://schemas.openxmlformats.org/drawingml/2006/main" xmlns:r="http://schemas.openxmlformats.org/officeDocument/2006/relationships" xmlns:p="http://schemas.openxmlformats.org/presentationml/2006/main">
+  <p:cSld name="Slide 18">
+    <p:spTree>
+      <p:nvGrpSpPr>
+        <p:cNvPr id="1" name=""/>
+        <p:cNvGrpSpPr/>
+        <p:nvPr/>
+      </p:nvGrpSpPr>
+      <p:grpSpPr>
+        <a:xfrm>
+          <a:off x="0" y="0"/>
+          <a:ext cx="0" cy="0"/>
+          <a:chOff x="0" y="0"/>
+          <a:chExt cx="0" cy="0"/>
+        </a:xfrm>
+      </p:grpSpPr>
+      <p:sp>
+        <p:nvSpPr>
+          <p:cNvPr id="2" name="Text 1"/>
+          <p:cNvSpPr/>
+          <p:nvPr>
+            <p:ph idx="102" type="title" hasCustomPrompt="1"/>
+          </p:nvPr>
+        </p:nvSpPr>
+        <p:spPr>
+          <a:xfrm>
+            <a:off x="1325880" y="274320"/>
+            <a:ext cx="9539935" cy="914400"/>
+          </a:xfrm>
+          <a:prstGeom prst="rect">
+            <a:avLst/>
+          </a:prstGeom>
+          <a:noFill/>
+          <a:ln/>
+        </p:spPr>
+        <p:txBody>
+          <a:bodyPr wrap="square" lIns="635" tIns="635" rIns="635" bIns="635" rtlCol="0" anchor="ctr"/>
+          <a:lstStyle/>
+          <a:p>
+            <a:pPr algn="l" indent="0" marL="0">
+              <a:buNone/>
+            </a:pPr>
+            <a:r>
+              <a:rPr lang="ru-RU" altLang="en-US" sz="2800" b="1" dirty="0">
+                <a:solidFill>
+                  <a:schemeClr val="tx2"/>
+                </a:solidFill>
+              </a:rPr>
+              <a:t>Список использованных источников</a:t>
+            </a:r>
+            <a:endParaRPr lang="ru-RU" sz="2800" dirty="0"/>
+          </a:p>
+        </p:txBody>
+      </p:sp>
+      <p:sp>
+        <p:nvSpPr>
+          <p:cNvPr id="3" name="Text 1"/>
+          <p:cNvSpPr txBox="1"/>
+          <p:nvPr/>
+        </p:nvSpPr>
+        <p:spPr>
+          <a:xfrm>
+            <a:off x="548640" y="1280160"/>
+            <a:ext cx="11094415" cy="4983480"/>
+          </a:xfrm>
+          <a:prstGeom prst="rect">
+            <a:avLst/>
+          </a:prstGeom>
+          <a:noFill/>
+          <a:ln/>
+        </p:spPr>
+        <p:txBody>
+          <a:bodyPr wrap="square" lIns="635" tIns="635" rIns="635" bIns="635" rtlCol="0" anchor="t"/>
+          <a:lstStyle/>
+          <a:p>
+            <a:pPr algn="just" marL="342900" indent="-342900">
+              <a:spcAft>
+                <a:spcPts val="400"/>
+              </a:spcAft>
+              <a:buSzPct val="100000"/>
+              <a:buFont typeface="+mj-lt"/>
+              <a:buAutoNum type="arabicPeriod" startAt="1"/>
+            </a:pPr>
+            <a:r>
+              <a:rPr lang="ru-RU" altLang="en-US" sz="1200" dirty="0">
+                <a:solidFill>
+                  <a:schemeClr val="tx1"/>
+                </a:solidFill>
+              </a:rPr>
+              <a:t>ICRP Publication 132. Radiological Protection from Cosmic Radiation in Aviation // Annals of the ICRP. – 2016. – Vol. 45, № 1.</a:t>
+            </a:r>
+            <a:endParaRPr lang="ru-RU" sz="1200" dirty="0"/>
+          </a:p>
+          <a:p>
+            <a:pPr algn="just" marL="342900" indent="-342900">
+              <a:spcAft>
+                <a:spcPts val="400"/>
+              </a:spcAft>
+              <a:buSzPct val="100000"/>
+              <a:buFont typeface="+mj-lt"/>
+              <a:buAutoNum type="arabicPeriod" startAt="1"/>
+            </a:pPr>
+            <a:r>
+              <a:rPr lang="ru-RU" altLang="en-US" sz="1200" dirty="0">
+                <a:solidFill>
+                  <a:schemeClr val="tx1"/>
+                </a:solidFill>
+              </a:rPr>
+              <a:t>Маткевич Е. И., Бурмистров В. И., Иванов И. В. Оценка доз облучения летного состава воздушных судов и обоснование мероприятий по их снижению // Медицинская радиология и радиационная безопасность. – 2025. – Т. 70, № 6. – С. 28–⁠39.</a:t>
+            </a:r>
+            <a:endParaRPr lang="ru-RU" sz="1200" dirty="0"/>
+          </a:p>
+          <a:p>
+            <a:pPr algn="just" marL="342900" indent="-342900">
+              <a:spcAft>
+                <a:spcPts val="400"/>
+              </a:spcAft>
+              <a:buSzPct val="100000"/>
+              <a:buFont typeface="+mj-lt"/>
+              <a:buAutoNum type="arabicPeriod" startAt="1"/>
+            </a:pPr>
+            <a:r>
+              <a:rPr lang="ru-RU" altLang="en-US" sz="1200" dirty="0">
+                <a:solidFill>
+                  <a:schemeClr val="tx1"/>
+                </a:solidFill>
+              </a:rPr>
+              <a:t>О радиационной безопасности населения : Федеральный закон от 09.01.1996 № 3‑ФЗ.</a:t>
+            </a:r>
+            <a:endParaRPr lang="ru-RU" sz="1200" dirty="0"/>
+          </a:p>
+          <a:p>
+            <a:pPr algn="just" marL="342900" indent="-342900">
+              <a:spcAft>
+                <a:spcPts val="400"/>
+              </a:spcAft>
+              <a:buSzPct val="100000"/>
+              <a:buFont typeface="+mj-lt"/>
+              <a:buAutoNum type="arabicPeriod" startAt="1"/>
+            </a:pPr>
+            <a:r>
+              <a:rPr lang="ru-RU" altLang="en-US" sz="1200" dirty="0">
+                <a:solidFill>
+                  <a:schemeClr val="tx1"/>
+                </a:solidFill>
+              </a:rPr>
+              <a:t>О санитарно-эпидемиологическом благополучии населения : Федеральный закон от 30.03.1999 № 52‑ФЗ.</a:t>
+            </a:r>
+            <a:endParaRPr lang="ru-RU" sz="1200" dirty="0"/>
+          </a:p>
+          <a:p>
+            <a:pPr algn="just" marL="342900" indent="-342900">
+              <a:spcAft>
+                <a:spcPts val="400"/>
+              </a:spcAft>
+              <a:buSzPct val="100000"/>
+              <a:buFont typeface="+mj-lt"/>
+              <a:buAutoNum type="arabicPeriod" startAt="1"/>
+            </a:pPr>
+            <a:r>
+              <a:rPr lang="ru-RU" altLang="en-US" sz="1200" dirty="0">
+                <a:solidFill>
+                  <a:schemeClr val="tx1"/>
+                </a:solidFill>
+              </a:rPr>
+              <a:t>СанПиН 2.6.1.2523‑09. Нормы радиационной безопасности (НРБ‑99/2009) : утв. постановлением Главного государственного санитарного врача РФ от 07.07.2009 № 47.</a:t>
+            </a:r>
+            <a:endParaRPr lang="ru-RU" sz="1200" dirty="0"/>
+          </a:p>
+          <a:p>
+            <a:pPr algn="just" marL="342900" indent="-342900">
+              <a:spcAft>
+                <a:spcPts val="400"/>
+              </a:spcAft>
+              <a:buSzPct val="100000"/>
+              <a:buFont typeface="+mj-lt"/>
+              <a:buAutoNum type="arabicPeriod" startAt="1"/>
+            </a:pPr>
+            <a:r>
+              <a:rPr lang="ru-RU" altLang="en-US" sz="1200" dirty="0">
+                <a:solidFill>
+                  <a:schemeClr val="tx1"/>
+                </a:solidFill>
+              </a:rPr>
+              <a:t>Воздушный кодекс Российской Федерации от 19.03.1997 № 60‑ФЗ.</a:t>
+            </a:r>
+            <a:endParaRPr lang="ru-RU" sz="1200" dirty="0"/>
+          </a:p>
+          <a:p>
+            <a:pPr algn="just" marL="342900" indent="-342900">
+              <a:spcAft>
+                <a:spcPts val="400"/>
+              </a:spcAft>
+              <a:buSzPct val="100000"/>
+              <a:buFont typeface="+mj-lt"/>
+              <a:buAutoNum type="arabicPeriod" startAt="1"/>
+            </a:pPr>
+            <a:r>
+              <a:rPr lang="ru-RU" altLang="en-US" sz="1200" dirty="0">
+                <a:solidFill>
+                  <a:schemeClr val="tx1"/>
+                </a:solidFill>
+              </a:rPr>
+              <a:t>Об отмене нормативных правовых актов федеральных органов исполнительной власти, содержащих обязательные требования, соблюдение которых оценивается при проведении мероприятий по контролю при осуществлении федерального государственного санитарно-эпидемиологического надзора : постановление Правительства РФ от 08.10.2020 № 1631.</a:t>
+            </a:r>
+            <a:endParaRPr lang="ru-RU" sz="1200" dirty="0"/>
+          </a:p>
+          <a:p>
+            <a:pPr algn="just" marL="342900" indent="-342900">
+              <a:spcAft>
+                <a:spcPts val="400"/>
+              </a:spcAft>
+              <a:buSzPct val="100000"/>
+              <a:buFont typeface="+mj-lt"/>
+              <a:buAutoNum type="arabicPeriod" startAt="1"/>
+            </a:pPr>
+            <a:r>
+              <a:rPr lang="ru-RU" altLang="en-US" sz="1200" dirty="0">
+                <a:solidFill>
+                  <a:schemeClr val="tx1"/>
+                </a:solidFill>
+              </a:rPr>
+              <a:t>СанПиН 2.6.4115‑25. Санитарно-эпидемиологические требования в области радиационной безопасности населения при обращении источников ионизирующего излучения : утв. постановлением Главного государственного санитарного врача РФ от 27.03.2025 № 6.</a:t>
+            </a:r>
+            <a:endParaRPr lang="ru-RU" sz="1200" dirty="0"/>
+          </a:p>
+          <a:p>
+            <a:pPr algn="just" marL="342900" indent="-342900">
+              <a:spcAft>
+                <a:spcPts val="400"/>
+              </a:spcAft>
+              <a:buSzPct val="100000"/>
+              <a:buFont typeface="+mj-lt"/>
+              <a:buAutoNum type="arabicPeriod" startAt="1"/>
+            </a:pPr>
+            <a:r>
+              <a:rPr lang="ru-RU" altLang="en-US" sz="1200" dirty="0">
+                <a:solidFill>
+                  <a:schemeClr val="tx1"/>
+                </a:solidFill>
+              </a:rPr>
+              <a:t>Трудовой кодекс Российской Федерации от 30.12.2001 № 197‑ФЗ.</a:t>
+            </a:r>
+            <a:endParaRPr lang="ru-RU" sz="1200" dirty="0"/>
+          </a:p>
+          <a:p>
+            <a:pPr algn="just" marL="342900" indent="-342900">
+              <a:spcAft>
+                <a:spcPts val="400"/>
+              </a:spcAft>
+              <a:buSzPct val="100000"/>
+              <a:buFont typeface="+mj-lt"/>
+              <a:buAutoNum type="arabicPeriod" startAt="1"/>
+            </a:pPr>
+            <a:r>
+              <a:rPr lang="ru-RU" altLang="en-US" sz="1200" dirty="0">
+                <a:solidFill>
+                  <a:schemeClr val="tx1"/>
+                </a:solidFill>
+              </a:rPr>
+              <a:t>Об утверждении особенностей проведения специальной оценки условий труда на рабочих местах членов летных и кабинных экипажей воздушных судов гражданской авиации : приказ Минтруда России от 06.05.2024 № 255н.</a:t>
+            </a:r>
+            <a:endParaRPr lang="ru-RU" sz="1200" dirty="0"/>
+          </a:p>
+          <a:p>
+            <a:pPr algn="just" marL="342900" indent="-342900">
+              <a:spcAft>
+                <a:spcPts val="400"/>
+              </a:spcAft>
+              <a:buSzPct val="100000"/>
+              <a:buFont typeface="+mj-lt"/>
+              <a:buAutoNum type="arabicPeriod" startAt="1"/>
+            </a:pPr>
+            <a:r>
+              <a:rPr lang="ru-RU" altLang="en-US" sz="1200" dirty="0">
+                <a:solidFill>
+                  <a:schemeClr val="tx1"/>
+                </a:solidFill>
+              </a:rPr>
+              <a:t>Приказ Минтранса России от 10.11.2025 № 381 «Об установлении Особенностей режима рабочего времени и времени отдыха специалистов авиационного персонала гражданской авиации…». – Введ. 01.03.2026.</a:t>
+            </a:r>
+            <a:endParaRPr lang="ru-RU" sz="1200" dirty="0"/>
+          </a:p>
+          <a:p>
+            <a:pPr algn="just" marL="342900" indent="-342900">
+              <a:spcAft>
+                <a:spcPts val="400"/>
+              </a:spcAft>
+              <a:buSzPct val="100000"/>
+              <a:buFont typeface="+mj-lt"/>
+              <a:buAutoNum type="arabicPeriod" startAt="1"/>
+            </a:pPr>
+            <a:r>
+              <a:rPr lang="ru-RU" altLang="en-US" sz="1200" dirty="0">
+                <a:solidFill>
+                  <a:schemeClr val="tx1"/>
+                </a:solidFill>
+              </a:rPr>
+              <a:t>Council Directive 2013/59/Euratom of 5 December 2013 laying down basic safety standards for protection against the dangers arising from exposure to ionising radiation.</a:t>
+            </a:r>
+            <a:endParaRPr lang="ru-RU" sz="1200" dirty="0"/>
+          </a:p>
+          <a:p>
+            <a:pPr algn="just" marL="342900" indent="-342900">
+              <a:spcAft>
+                <a:spcPts val="400"/>
+              </a:spcAft>
+              <a:buSzPct val="100000"/>
+              <a:buFont typeface="+mj-lt"/>
+              <a:buAutoNum type="arabicPeriod" startAt="1"/>
+            </a:pPr>
+            <a:r>
+              <a:rPr lang="ru-RU" altLang="en-US" sz="1200" dirty="0">
+                <a:solidFill>
+                  <a:schemeClr val="tx1"/>
+                </a:solidFill>
+              </a:rPr>
+              <a:t>Gesetz zum Schutz vor der schädlichen Wirkung ionisierender Strahlung (Strahlenschutzgesetz – StrlSchG) vom 27.06.2017.</a:t>
+            </a:r>
+            <a:endParaRPr lang="ru-RU" sz="1200" dirty="0"/>
+          </a:p>
+          <a:p>
+            <a:pPr algn="just" marL="342900" indent="-342900">
+              <a:spcAft>
+                <a:spcPts val="400"/>
+              </a:spcAft>
+              <a:buSzPct val="100000"/>
+              <a:buFont typeface="+mj-lt"/>
+              <a:buAutoNum type="arabicPeriod" startAt="1"/>
+            </a:pPr>
+            <a:r>
+              <a:rPr lang="ru-RU" altLang="en-US" sz="1200" dirty="0">
+                <a:solidFill>
+                  <a:schemeClr val="tx1"/>
+                </a:solidFill>
+              </a:rPr>
+              <a:t>Verordnung zum Schutz vor der schädlichen Wirkung ionisierender Strahlung (Strahlenschutzverordnung – StrlSchV) vom 29.11.2018.</a:t>
+            </a:r>
+            <a:endParaRPr lang="ru-RU" sz="1200" dirty="0"/>
+          </a:p>
+        </p:txBody>
+      </p:sp>
+      <p:sp>
+        <p:nvSpPr>
+          <p:cNvPr id="25" name="Slide Number Placeholder 0"/>
+          <p:cNvSpPr>
+            <a:spLocks noGrp="1"/>
+          </p:cNvSpPr>
+          <p:nvPr>
+            <p:ph type="sldNum" sz="quarter" idx="4294967295"/>
+          </p:nvPr>
+        </p:nvSpPr>
+        <p:spPr>
+          <a:xfrm>
+            <a:off x="11002975" y="6355080"/>
+            <a:ext cx="731520" cy="320040"/>
+          </a:xfrm>
+          <a:prstGeom prst="rect">
+            <a:avLst/>
+          </a:prstGeom>
+          <a:extLst>
+            <a:ext uri="{C572A759-6A51-4108-AA02-DFA0A04FC94B}">
+              <ma14:wrappingTextBoxFlag xmlns:ma14="http://schemas.microsoft.com/office/mac/drawingml/2011/main" val="0"/>
+            </a:ext>
+          </a:extLst>
+        </p:spPr>
+        <p:txBody>
+          <a:bodyPr/>
+          <a:lstStyle>
+            <a:lvl1pPr>
+              <a:defRPr sz="1400">
+                <a:solidFill>
+                  <a:schemeClr val="tx1"/>
+                </a:solidFill>
+              </a:defRPr>
+            </a:lvl1pPr>
+          </a:lstStyle>
+          <a:p>
+            <a:pPr algn="r"/>
+            <a:fld id="{F7021451-1387-4CA6-816F-3879F97B5CBC}" type="slidenum">
+              <a:rPr b="0" lang="ru-RU"/>
+              <a:t>18</a:t>
+            </a:fld>
+            <a:endParaRPr lang="ru-RU"/>
+          </a:p>
+        </p:txBody>
+      </p:sp>
+    </p:spTree>
+  </p:cSld>
+  <p:clrMapOvr>
+    <a:masterClrMapping/>
+  </p:clrMapOvr>
+</p:sld>
+</file>
+
+<file path=ppt/slides/slide19.xml><?xml version="1.0" encoding="utf-8"?>
+<p:sld xmlns:a="http://schemas.openxmlformats.org/drawingml/2006/main" xmlns:r="http://schemas.openxmlformats.org/officeDocument/2006/relationships" xmlns:p="http://schemas.openxmlformats.org/presentationml/2006/main">
+  <p:cSld name="Slide 19">
     <p:spTree>
       <p:nvGrpSpPr>
         <p:cNvPr id="1" name=""/>
@@ -6299,7 +7183,7 @@
                   <a:schemeClr val="tx1"/>
                 </a:solidFill>
               </a:rPr>
-              <a:t>С 1990 года МКРЗ относит облучение экипажей к профессиональному [1]</a:t>
+              <a:t>С 1990 года Международная комиссия по радиологической защите (МКРЗ) относит облучение экипажей к профессиональному [1]</a:t>
             </a:r>
             <a:endParaRPr lang="ru-RU" sz="2400" dirty="0"/>
           </a:p>
@@ -6317,7 +7201,7 @@
                   <a:schemeClr val="tx1"/>
                 </a:solidFill>
               </a:rPr>
-              <a:t>Специальные санитарные правила об облучении экипажей утратили силу в 2021 и 2025 годах [7, 8]</a:t>
+              <a:t>Утратили силу санитарные правила, содержавшие специальные нормы об облучении экипажей (2021 и 2025 годы) [7, 8]</a:t>
             </a:r>
             <a:endParaRPr lang="ru-RU" sz="2400" dirty="0"/>
           </a:p>
@@ -6461,22 +7345,46 @@
                   <a:schemeClr val="tx2"/>
                 </a:solidFill>
               </a:rPr>
-              <a:t>Цель и задачи исследования</a:t>
+              <a:t>Воздействие космического излучения</a:t>
             </a:r>
             <a:endParaRPr lang="ru-RU" sz="2800" dirty="0"/>
           </a:p>
         </p:txBody>
       </p:sp>
-      <p:sp>
-        <p:nvSpPr>
-          <p:cNvPr id="3" name="Text 1"/>
+      <p:pic>
+        <p:nvPicPr>
+          <p:cNvPr id="3" name="Image 0" descr="Схема: солнечные и галактические космические лучи, геомагнитное поле, каскад вторичных частиц в атмосфере — протоны, нейтроны, мюоны">    </p:cNvPr>
+          <p:cNvPicPr>
+            <a:picLocks noChangeAspect="1"/>
+          </p:cNvPicPr>
+          <p:nvPr/>
+        </p:nvPicPr>
+        <p:blipFill>
+          <a:blip r:embed="rId1"/>
+          <a:stretch>
+            <a:fillRect/>
+          </a:stretch>
+        </p:blipFill>
+        <p:spPr>
+          <a:xfrm>
+            <a:off x="1610203" y="1325880"/>
+            <a:ext cx="2214833" cy="4206240"/>
+          </a:xfrm>
+          <a:prstGeom prst="rect">
+            <a:avLst/>
+          </a:prstGeom>
+        </p:spPr>
+      </p:pic>
+      <p:sp>
+        <p:nvSpPr>
+          <p:cNvPr id="4" name="Подпись"/>
           <p:cNvSpPr txBox="1"/>
           <p:nvPr/>
         </p:nvSpPr>
         <p:spPr>
           <a:xfrm>
-            <a:off x="548640" y="1371600"/>
-            <a:ext cx="11094415" cy="2194560"/>
+            <a:off x="1518763" y="5605272"/>
+            <a:ext cx="2397713" cy="685800"/>
           </a:xfrm>
           <a:prstGeom prst="rect">
             <a:avLst/>
@@ -6488,79 +7396,55 @@
           <a:bodyPr wrap="square" lIns="635" tIns="635" rIns="635" bIns="635" rtlCol="0" anchor="t"/>
           <a:lstStyle/>
           <a:p>
-            <a:pPr algn="l" indent="0" marL="0">
-              <a:spcAft>
-                <a:spcPts val="1000"/>
-              </a:spcAft>
+            <a:pPr algn="ctr" indent="0" marL="0">
               <a:buNone/>
             </a:pPr>
             <a:r>
-              <a:rPr lang="ru-RU" altLang="en-US" sz="2400" b="1" dirty="0">
+              <a:rPr lang="ru-RU" altLang="en-US" sz="1600" dirty="0">
                 <a:solidFill>
                   <a:schemeClr val="tx1"/>
                 </a:solidFill>
               </a:rPr>
-              <a:t>Цель: </a:t>
-            </a:r>
-            <a:pPr algn="l" indent="0" marL="0">
-              <a:spcAft>
-                <a:spcPts val="1000"/>
-              </a:spcAft>
-              <a:buNone/>
-            </a:pPr>
-            <a:r>
-              <a:rPr lang="ru-RU" altLang="en-US" sz="2400" dirty="0">
-                <a:solidFill>
-                  <a:schemeClr val="tx1"/>
-                </a:solidFill>
-              </a:rPr>
-              <a:t>выявить пробелы в правовом регулировании защиты членов экипажей воздушных судов от космического излучения и предложить пути их устранения.</a:t>
-            </a:r>
-            <a:endParaRPr lang="ru-RU" sz="2400" dirty="0"/>
-          </a:p>
-          <a:p>
-            <a:pPr algn="l" indent="0" marL="0">
-              <a:spcAft>
-                <a:spcPts val="1000"/>
-              </a:spcAft>
-              <a:buNone/>
-            </a:pPr>
-            <a:r>
-              <a:rPr lang="ru-RU" altLang="en-US" sz="2400" b="1" dirty="0">
-                <a:solidFill>
-                  <a:schemeClr val="tx1"/>
-                </a:solidFill>
-              </a:rPr>
-              <a:t>Методы: </a:t>
-            </a:r>
-            <a:pPr algn="l" indent="0" marL="0">
-              <a:spcAft>
-                <a:spcPts val="1000"/>
-              </a:spcAft>
-              <a:buNone/>
-            </a:pPr>
-            <a:r>
-              <a:rPr lang="ru-RU" altLang="en-US" sz="2400" dirty="0">
-                <a:solidFill>
-                  <a:schemeClr val="tx1"/>
-                </a:solidFill>
-              </a:rPr>
-              <a:t>формально-юридический, историко-правовой, сравнительно-правовой.</a:t>
-            </a:r>
-            <a:endParaRPr lang="ru-RU" sz="2400" dirty="0"/>
+              <a:t>Рисунок 1 – Космическое излучение в атмосфере Земли</a:t>
+            </a:r>
+            <a:endParaRPr lang="ru-RU" sz="1600" dirty="0"/>
           </a:p>
         </p:txBody>
       </p:sp>
-      <p:sp>
-        <p:nvSpPr>
-          <p:cNvPr id="4" name="Text 2"/>
+      <p:pic>
+        <p:nvPicPr>
+          <p:cNvPr id="5" name="Image 1" descr="Инфографика: ионизация, повреждение ДНК и клеток, последствия различных доз">    </p:cNvPr>
+          <p:cNvPicPr>
+            <a:picLocks noChangeAspect="1"/>
+          </p:cNvPicPr>
+          <p:nvPr/>
+        </p:nvPicPr>
+        <p:blipFill>
+          <a:blip r:embed="rId2"/>
+          <a:stretch>
+            <a:fillRect/>
+          </a:stretch>
+        </p:blipFill>
+        <p:spPr>
+          <a:xfrm>
+            <a:off x="4190796" y="1325880"/>
+            <a:ext cx="6390696" cy="4206240"/>
+          </a:xfrm>
+          <a:prstGeom prst="rect">
+            <a:avLst/>
+          </a:prstGeom>
+        </p:spPr>
+      </p:pic>
+      <p:sp>
+        <p:nvSpPr>
+          <p:cNvPr id="6" name="Подпись"/>
           <p:cNvSpPr txBox="1"/>
           <p:nvPr/>
         </p:nvSpPr>
         <p:spPr>
           <a:xfrm>
-            <a:off x="548640" y="3611880"/>
-            <a:ext cx="11094415" cy="411480"/>
+            <a:off x="4099356" y="5605272"/>
+            <a:ext cx="6573576" cy="685800"/>
           </a:xfrm>
           <a:prstGeom prst="rect">
             <a:avLst/>
@@ -6572,116 +7456,18 @@
           <a:bodyPr wrap="square" lIns="635" tIns="635" rIns="635" bIns="635" rtlCol="0" anchor="t"/>
           <a:lstStyle/>
           <a:p>
-            <a:pPr indent="0" marL="0">
+            <a:pPr algn="ctr" indent="0" marL="0">
               <a:buNone/>
             </a:pPr>
             <a:r>
-              <a:rPr lang="ru-RU" altLang="en-US" sz="2400" b="1" dirty="0">
+              <a:rPr lang="ru-RU" altLang="en-US" sz="1600" dirty="0">
                 <a:solidFill>
                   <a:schemeClr val="tx1"/>
                 </a:solidFill>
               </a:rPr>
-              <a:t>Задачи:</a:t>
-            </a:r>
-            <a:endParaRPr lang="ru-RU" sz="2400" dirty="0"/>
-          </a:p>
-        </p:txBody>
-      </p:sp>
-      <p:sp>
-        <p:nvSpPr>
-          <p:cNvPr id="5" name="Text 3"/>
-          <p:cNvSpPr txBox="1"/>
-          <p:nvPr/>
-        </p:nvSpPr>
-        <p:spPr>
-          <a:xfrm>
-            <a:off x="548640" y="4069080"/>
-            <a:ext cx="11094415" cy="2240280"/>
-          </a:xfrm>
-          <a:prstGeom prst="rect">
-            <a:avLst/>
-          </a:prstGeom>
-          <a:noFill/>
-          <a:ln/>
-        </p:spPr>
-        <p:txBody>
-          <a:bodyPr wrap="square" lIns="635" tIns="635" rIns="635" bIns="635" rtlCol="0" anchor="t"/>
-          <a:lstStyle/>
-          <a:p>
-            <a:pPr marL="342900" indent="-342900">
-              <a:spcAft>
-                <a:spcPts val="400"/>
-              </a:spcAft>
-              <a:buSzPct val="100000"/>
-              <a:buFont typeface="+mj-lt"/>
-              <a:buAutoNum type="arabicParenR" startAt="1"/>
-            </a:pPr>
-            <a:r>
-              <a:rPr lang="ru-RU" altLang="en-US" sz="2400" dirty="0">
-                <a:solidFill>
-                  <a:schemeClr val="tx1"/>
-                </a:solidFill>
-              </a:rPr>
-              <a:t>проанализировать действующие нормы российского права;</a:t>
-            </a:r>
-            <a:endParaRPr lang="ru-RU" sz="2400" dirty="0"/>
-          </a:p>
-          <a:p>
-            <a:pPr marL="342900" indent="-342900">
-              <a:spcAft>
-                <a:spcPts val="400"/>
-              </a:spcAft>
-              <a:buSzPct val="100000"/>
-              <a:buFont typeface="+mj-lt"/>
-              <a:buAutoNum type="arabicParenR" startAt="1"/>
-            </a:pPr>
-            <a:r>
-              <a:rPr lang="ru-RU" altLang="en-US" sz="2400" dirty="0">
-                <a:solidFill>
-                  <a:schemeClr val="tx1"/>
-                </a:solidFill>
-              </a:rPr>
-              <a:t>проследить изменения законодательства в 2021–⁠2026 годах;</a:t>
-            </a:r>
-            <a:endParaRPr lang="ru-RU" sz="2400" dirty="0"/>
-          </a:p>
-          <a:p>
-            <a:pPr marL="342900" indent="-342900">
-              <a:spcAft>
-                <a:spcPts val="400"/>
-              </a:spcAft>
-              <a:buSzPct val="100000"/>
-              <a:buFont typeface="+mj-lt"/>
-              <a:buAutoNum type="arabicParenR" startAt="1"/>
-            </a:pPr>
-            <a:r>
-              <a:rPr lang="ru-RU" altLang="en-US" sz="2400" dirty="0">
-                <a:solidFill>
-                  <a:schemeClr val="tx1"/>
-                </a:solidFill>
-              </a:rPr>
-              <a:t>сравнить российское регулирование с правом ЕС и Германии;</a:t>
-            </a:r>
-            <a:endParaRPr lang="ru-RU" sz="2400" dirty="0"/>
-          </a:p>
-          <a:p>
-            <a:pPr marL="342900" indent="-342900">
-              <a:spcAft>
-                <a:spcPts val="400"/>
-              </a:spcAft>
-              <a:buSzPct val="100000"/>
-              <a:buFont typeface="+mj-lt"/>
-              <a:buAutoNum type="arabicParenR" startAt="1"/>
-            </a:pPr>
-            <a:r>
-              <a:rPr lang="ru-RU" altLang="en-US" sz="2400" dirty="0">
-                <a:solidFill>
-                  <a:schemeClr val="tx1"/>
-                </a:solidFill>
-              </a:rPr>
-              <a:t>сформулировать предложения по совершенствованию законодательства.</a:t>
-            </a:r>
-            <a:endParaRPr lang="ru-RU" sz="2400" dirty="0"/>
+              <a:t>Рисунок 2 – Биологическое действие ионизирующего излучения (дозы в зивертах)</a:t>
+            </a:r>
+            <a:endParaRPr lang="ru-RU" sz="1600" dirty="0"/>
           </a:p>
         </p:txBody>
       </p:sp>
@@ -6787,6 +7573,332 @@
                   <a:schemeClr val="tx2"/>
                 </a:solidFill>
               </a:rPr>
+              <a:t>Цель и задачи исследования</a:t>
+            </a:r>
+            <a:endParaRPr lang="ru-RU" sz="2800" dirty="0"/>
+          </a:p>
+        </p:txBody>
+      </p:sp>
+      <p:sp>
+        <p:nvSpPr>
+          <p:cNvPr id="3" name="Text 1"/>
+          <p:cNvSpPr txBox="1"/>
+          <p:nvPr/>
+        </p:nvSpPr>
+        <p:spPr>
+          <a:xfrm>
+            <a:off x="548640" y="1371600"/>
+            <a:ext cx="11094415" cy="2194560"/>
+          </a:xfrm>
+          <a:prstGeom prst="rect">
+            <a:avLst/>
+          </a:prstGeom>
+          <a:noFill/>
+          <a:ln/>
+        </p:spPr>
+        <p:txBody>
+          <a:bodyPr wrap="square" lIns="635" tIns="635" rIns="635" bIns="635" rtlCol="0" anchor="t"/>
+          <a:lstStyle/>
+          <a:p>
+            <a:pPr algn="l" indent="0" marL="0">
+              <a:spcAft>
+                <a:spcPts val="1000"/>
+              </a:spcAft>
+              <a:buNone/>
+            </a:pPr>
+            <a:r>
+              <a:rPr lang="ru-RU" altLang="en-US" sz="2400" b="1" dirty="0">
+                <a:solidFill>
+                  <a:schemeClr val="tx1"/>
+                </a:solidFill>
+              </a:rPr>
+              <a:t>Цель: </a:t>
+            </a:r>
+            <a:pPr algn="l" indent="0" marL="0">
+              <a:spcAft>
+                <a:spcPts val="1000"/>
+              </a:spcAft>
+              <a:buNone/>
+            </a:pPr>
+            <a:r>
+              <a:rPr lang="ru-RU" altLang="en-US" sz="2400" dirty="0">
+                <a:solidFill>
+                  <a:schemeClr val="tx1"/>
+                </a:solidFill>
+              </a:rPr>
+              <a:t>выявить пробелы в правовом регулировании защиты членов экипажей воздушных судов от космического излучения и предложить пути их устранения.</a:t>
+            </a:r>
+            <a:endParaRPr lang="ru-RU" sz="2400" dirty="0"/>
+          </a:p>
+          <a:p>
+            <a:pPr algn="l" indent="0" marL="0">
+              <a:spcAft>
+                <a:spcPts val="1000"/>
+              </a:spcAft>
+              <a:buNone/>
+            </a:pPr>
+            <a:r>
+              <a:rPr lang="ru-RU" altLang="en-US" sz="2400" b="1" dirty="0">
+                <a:solidFill>
+                  <a:schemeClr val="tx1"/>
+                </a:solidFill>
+              </a:rPr>
+              <a:t>Методы: </a:t>
+            </a:r>
+            <a:pPr algn="l" indent="0" marL="0">
+              <a:spcAft>
+                <a:spcPts val="1000"/>
+              </a:spcAft>
+              <a:buNone/>
+            </a:pPr>
+            <a:r>
+              <a:rPr lang="ru-RU" altLang="en-US" sz="2400" dirty="0">
+                <a:solidFill>
+                  <a:schemeClr val="tx1"/>
+                </a:solidFill>
+              </a:rPr>
+              <a:t>формально-юридический, историко-правовой, сравнительно-правовой.</a:t>
+            </a:r>
+            <a:endParaRPr lang="ru-RU" sz="2400" dirty="0"/>
+          </a:p>
+        </p:txBody>
+      </p:sp>
+      <p:sp>
+        <p:nvSpPr>
+          <p:cNvPr id="4" name="Text 2"/>
+          <p:cNvSpPr txBox="1"/>
+          <p:nvPr/>
+        </p:nvSpPr>
+        <p:spPr>
+          <a:xfrm>
+            <a:off x="548640" y="3611880"/>
+            <a:ext cx="11094415" cy="411480"/>
+          </a:xfrm>
+          <a:prstGeom prst="rect">
+            <a:avLst/>
+          </a:prstGeom>
+          <a:noFill/>
+          <a:ln/>
+        </p:spPr>
+        <p:txBody>
+          <a:bodyPr wrap="square" lIns="635" tIns="635" rIns="635" bIns="635" rtlCol="0" anchor="t"/>
+          <a:lstStyle/>
+          <a:p>
+            <a:pPr indent="0" marL="0">
+              <a:buNone/>
+            </a:pPr>
+            <a:r>
+              <a:rPr lang="ru-RU" altLang="en-US" sz="2400" b="1" dirty="0">
+                <a:solidFill>
+                  <a:schemeClr val="tx1"/>
+                </a:solidFill>
+              </a:rPr>
+              <a:t>Задачи:</a:t>
+            </a:r>
+            <a:endParaRPr lang="ru-RU" sz="2400" dirty="0"/>
+          </a:p>
+        </p:txBody>
+      </p:sp>
+      <p:sp>
+        <p:nvSpPr>
+          <p:cNvPr id="5" name="Text 3"/>
+          <p:cNvSpPr txBox="1"/>
+          <p:nvPr/>
+        </p:nvSpPr>
+        <p:spPr>
+          <a:xfrm>
+            <a:off x="548640" y="4069080"/>
+            <a:ext cx="11094415" cy="2240280"/>
+          </a:xfrm>
+          <a:prstGeom prst="rect">
+            <a:avLst/>
+          </a:prstGeom>
+          <a:noFill/>
+          <a:ln/>
+        </p:spPr>
+        <p:txBody>
+          <a:bodyPr wrap="square" lIns="635" tIns="635" rIns="635" bIns="635" rtlCol="0" anchor="t"/>
+          <a:lstStyle/>
+          <a:p>
+            <a:pPr marL="342900" indent="-342900">
+              <a:spcAft>
+                <a:spcPts val="400"/>
+              </a:spcAft>
+              <a:buSzPct val="100000"/>
+              <a:buFont typeface="+mj-lt"/>
+              <a:buAutoNum type="arabicParenR" startAt="1"/>
+            </a:pPr>
+            <a:r>
+              <a:rPr lang="ru-RU" altLang="en-US" sz="2400" dirty="0">
+                <a:solidFill>
+                  <a:schemeClr val="tx1"/>
+                </a:solidFill>
+              </a:rPr>
+              <a:t>проанализировать действующие нормы российского права;</a:t>
+            </a:r>
+            <a:endParaRPr lang="ru-RU" sz="2400" dirty="0"/>
+          </a:p>
+          <a:p>
+            <a:pPr marL="342900" indent="-342900">
+              <a:spcAft>
+                <a:spcPts val="400"/>
+              </a:spcAft>
+              <a:buSzPct val="100000"/>
+              <a:buFont typeface="+mj-lt"/>
+              <a:buAutoNum type="arabicParenR" startAt="1"/>
+            </a:pPr>
+            <a:r>
+              <a:rPr lang="ru-RU" altLang="en-US" sz="2400" dirty="0">
+                <a:solidFill>
+                  <a:schemeClr val="tx1"/>
+                </a:solidFill>
+              </a:rPr>
+              <a:t>проследить изменения законодательства в 2021–⁠2026 годах;</a:t>
+            </a:r>
+            <a:endParaRPr lang="ru-RU" sz="2400" dirty="0"/>
+          </a:p>
+          <a:p>
+            <a:pPr marL="342900" indent="-342900">
+              <a:spcAft>
+                <a:spcPts val="400"/>
+              </a:spcAft>
+              <a:buSzPct val="100000"/>
+              <a:buFont typeface="+mj-lt"/>
+              <a:buAutoNum type="arabicParenR" startAt="1"/>
+            </a:pPr>
+            <a:r>
+              <a:rPr lang="ru-RU" altLang="en-US" sz="2400" dirty="0">
+                <a:solidFill>
+                  <a:schemeClr val="tx1"/>
+                </a:solidFill>
+              </a:rPr>
+              <a:t>сравнить российское регулирование с правом ЕС и Германии;</a:t>
+            </a:r>
+            <a:endParaRPr lang="ru-RU" sz="2400" dirty="0"/>
+          </a:p>
+          <a:p>
+            <a:pPr marL="342900" indent="-342900">
+              <a:spcAft>
+                <a:spcPts val="400"/>
+              </a:spcAft>
+              <a:buSzPct val="100000"/>
+              <a:buFont typeface="+mj-lt"/>
+              <a:buAutoNum type="arabicParenR" startAt="1"/>
+            </a:pPr>
+            <a:r>
+              <a:rPr lang="ru-RU" altLang="en-US" sz="2400" dirty="0">
+                <a:solidFill>
+                  <a:schemeClr val="tx1"/>
+                </a:solidFill>
+              </a:rPr>
+              <a:t>сформулировать предложения по совершенствованию законодательства.</a:t>
+            </a:r>
+            <a:endParaRPr lang="ru-RU" sz="2400" dirty="0"/>
+          </a:p>
+        </p:txBody>
+      </p:sp>
+      <p:sp>
+        <p:nvSpPr>
+          <p:cNvPr id="25" name="Slide Number Placeholder 0"/>
+          <p:cNvSpPr>
+            <a:spLocks noGrp="1"/>
+          </p:cNvSpPr>
+          <p:nvPr>
+            <p:ph type="sldNum" sz="quarter" idx="4294967295"/>
+          </p:nvPr>
+        </p:nvSpPr>
+        <p:spPr>
+          <a:xfrm>
+            <a:off x="11002975" y="6355080"/>
+            <a:ext cx="731520" cy="320040"/>
+          </a:xfrm>
+          <a:prstGeom prst="rect">
+            <a:avLst/>
+          </a:prstGeom>
+          <a:extLst>
+            <a:ext uri="{C572A759-6A51-4108-AA02-DFA0A04FC94B}">
+              <ma14:wrappingTextBoxFlag xmlns:ma14="http://schemas.microsoft.com/office/mac/drawingml/2011/main" val="0"/>
+            </a:ext>
+          </a:extLst>
+        </p:spPr>
+        <p:txBody>
+          <a:bodyPr/>
+          <a:lstStyle>
+            <a:lvl1pPr>
+              <a:defRPr sz="1400">
+                <a:solidFill>
+                  <a:schemeClr val="tx1"/>
+                </a:solidFill>
+              </a:defRPr>
+            </a:lvl1pPr>
+          </a:lstStyle>
+          <a:p>
+            <a:pPr algn="r"/>
+            <a:fld id="{F7021451-1387-4CA6-816F-3879F97B5CBC}" type="slidenum">
+              <a:rPr b="0" lang="ru-RU"/>
+              <a:t>4</a:t>
+            </a:fld>
+            <a:endParaRPr lang="ru-RU"/>
+          </a:p>
+        </p:txBody>
+      </p:sp>
+    </p:spTree>
+  </p:cSld>
+  <p:clrMapOvr>
+    <a:masterClrMapping/>
+  </p:clrMapOvr>
+</p:sld>
+</file>
+
+<file path=ppt/slides/slide5.xml><?xml version="1.0" encoding="utf-8"?>
+<p:sld xmlns:a="http://schemas.openxmlformats.org/drawingml/2006/main" xmlns:r="http://schemas.openxmlformats.org/officeDocument/2006/relationships" xmlns:p="http://schemas.openxmlformats.org/presentationml/2006/main">
+  <p:cSld name="Slide 5">
+    <p:spTree>
+      <p:nvGrpSpPr>
+        <p:cNvPr id="1" name=""/>
+        <p:cNvGrpSpPr/>
+        <p:nvPr/>
+      </p:nvGrpSpPr>
+      <p:grpSpPr>
+        <a:xfrm>
+          <a:off x="0" y="0"/>
+          <a:ext cx="0" cy="0"/>
+          <a:chOff x="0" y="0"/>
+          <a:chExt cx="0" cy="0"/>
+        </a:xfrm>
+      </p:grpSpPr>
+      <p:sp>
+        <p:nvSpPr>
+          <p:cNvPr id="2" name="Text 1"/>
+          <p:cNvSpPr/>
+          <p:nvPr>
+            <p:ph idx="102" type="title" hasCustomPrompt="1"/>
+          </p:nvPr>
+        </p:nvSpPr>
+        <p:spPr>
+          <a:xfrm>
+            <a:off x="1325880" y="274320"/>
+            <a:ext cx="9539935" cy="914400"/>
+          </a:xfrm>
+          <a:prstGeom prst="rect">
+            <a:avLst/>
+          </a:prstGeom>
+          <a:noFill/>
+          <a:ln/>
+        </p:spPr>
+        <p:txBody>
+          <a:bodyPr wrap="square" lIns="635" tIns="635" rIns="635" bIns="635" rtlCol="0" anchor="ctr"/>
+          <a:lstStyle/>
+          <a:p>
+            <a:pPr algn="l" indent="0" marL="0">
+              <a:buNone/>
+            </a:pPr>
+            <a:r>
+              <a:rPr lang="ru-RU" altLang="en-US" sz="2800" b="1" dirty="0">
+                <a:solidFill>
+                  <a:schemeClr val="tx2"/>
+                </a:solidFill>
+              </a:rPr>
               <a:t>Измерения на борту</a:t>
             </a:r>
             <a:endParaRPr lang="ru-RU" sz="2800" dirty="0"/>
@@ -6831,7 +7943,7 @@
       </p:sp>
       <p:graphicFrame>
         <p:nvGraphicFramePr>
-          <p:cNvPr id="5" name="Table 0"/>
+          <p:cNvPr id="6" name="Table 0"/>
           <p:cNvGraphicFramePr>
             <a:graphicFrameLocks noGrp="1"/>
           </p:cNvGraphicFramePr>
@@ -8858,390 +9970,6 @@
             <a:pPr algn="r"/>
             <a:fld id="{F7021451-1387-4CA6-816F-3879F97B5CBC}" type="slidenum">
               <a:rPr b="0" lang="ru-RU"/>
-              <a:t>4</a:t>
-            </a:fld>
-            <a:endParaRPr lang="ru-RU"/>
-          </a:p>
-        </p:txBody>
-      </p:sp>
-    </p:spTree>
-  </p:cSld>
-  <p:clrMapOvr>
-    <a:masterClrMapping/>
-  </p:clrMapOvr>
-</p:sld>
-</file>
-
-<file path=ppt/slides/slide5.xml><?xml version="1.0" encoding="utf-8"?>
-<p:sld xmlns:a="http://schemas.openxmlformats.org/drawingml/2006/main" xmlns:r="http://schemas.openxmlformats.org/officeDocument/2006/relationships" xmlns:p="http://schemas.openxmlformats.org/presentationml/2006/main">
-  <p:cSld name="Slide 5">
-    <p:spTree>
-      <p:nvGrpSpPr>
-        <p:cNvPr id="1" name=""/>
-        <p:cNvGrpSpPr/>
-        <p:nvPr/>
-      </p:nvGrpSpPr>
-      <p:grpSpPr>
-        <a:xfrm>
-          <a:off x="0" y="0"/>
-          <a:ext cx="0" cy="0"/>
-          <a:chOff x="0" y="0"/>
-          <a:chExt cx="0" cy="0"/>
-        </a:xfrm>
-      </p:grpSpPr>
-      <p:sp>
-        <p:nvSpPr>
-          <p:cNvPr id="2" name="Text 1"/>
-          <p:cNvSpPr/>
-          <p:nvPr>
-            <p:ph idx="102" type="title" hasCustomPrompt="1"/>
-          </p:nvPr>
-        </p:nvSpPr>
-        <p:spPr>
-          <a:xfrm>
-            <a:off x="1325880" y="274320"/>
-            <a:ext cx="9539935" cy="914400"/>
-          </a:xfrm>
-          <a:prstGeom prst="rect">
-            <a:avLst/>
-          </a:prstGeom>
-          <a:noFill/>
-          <a:ln/>
-        </p:spPr>
-        <p:txBody>
-          <a:bodyPr wrap="square" lIns="635" tIns="635" rIns="635" bIns="635" rtlCol="0" anchor="ctr"/>
-          <a:lstStyle/>
-          <a:p>
-            <a:pPr algn="l" indent="0" marL="0">
-              <a:buNone/>
-            </a:pPr>
-            <a:r>
-              <a:rPr lang="ru-RU" altLang="en-US" sz="2800" b="1" dirty="0">
-                <a:solidFill>
-                  <a:schemeClr val="tx2"/>
-                </a:solidFill>
-              </a:rPr>
-              <a:t>Показания на рейсе Новокузнецк – Иркутск</a:t>
-            </a:r>
-            <a:endParaRPr lang="ru-RU" sz="2800" dirty="0"/>
-          </a:p>
-        </p:txBody>
-      </p:sp>
-      <p:pic>
-        <p:nvPicPr>
-          <p:cNvPr id="3" name="Image 0" descr="Дозиметр перед взлётом в аэропорту Новокузнецк: 13,2 мкР/ч">    </p:cNvPr>
-          <p:cNvPicPr>
-            <a:picLocks noChangeAspect="1"/>
-          </p:cNvPicPr>
-          <p:nvPr/>
-        </p:nvPicPr>
-        <p:blipFill>
-          <a:blip r:embed="rId1"/>
-          <a:stretch>
-            <a:fillRect/>
-          </a:stretch>
-        </p:blipFill>
-        <p:spPr>
-          <a:xfrm>
-            <a:off x="548640" y="1234440"/>
-            <a:ext cx="2606040" cy="3694176"/>
-          </a:xfrm>
-          <a:prstGeom prst="rect">
-            <a:avLst/>
-          </a:prstGeom>
-        </p:spPr>
-      </p:pic>
-      <p:sp>
-        <p:nvSpPr>
-          <p:cNvPr id="4" name="Text 1"/>
-          <p:cNvSpPr txBox="1"/>
-          <p:nvPr/>
-        </p:nvSpPr>
-        <p:spPr>
-          <a:xfrm>
-            <a:off x="457200" y="4974336"/>
-            <a:ext cx="2788920" cy="320040"/>
-          </a:xfrm>
-          <a:prstGeom prst="rect">
-            <a:avLst/>
-          </a:prstGeom>
-          <a:noFill/>
-          <a:ln/>
-        </p:spPr>
-        <p:txBody>
-          <a:bodyPr wrap="square" lIns="635" tIns="635" rIns="635" bIns="635" rtlCol="0" anchor="t"/>
-          <a:lstStyle/>
-          <a:p>
-            <a:pPr algn="ctr" indent="0" marL="0">
-              <a:buNone/>
-            </a:pPr>
-            <a:r>
-              <a:rPr lang="ru-RU" altLang="en-US" sz="1400" dirty="0">
-                <a:solidFill>
-                  <a:schemeClr val="tx1"/>
-                </a:solidFill>
-              </a:rPr>
-              <a:t>а</a:t>
-            </a:r>
-            <a:endParaRPr lang="ru-RU" sz="1400" dirty="0"/>
-          </a:p>
-        </p:txBody>
-      </p:sp>
-      <p:pic>
-        <p:nvPicPr>
-          <p:cNvPr id="5" name="Image 1" descr="Дозиметр на эшелоне FL350: 194,8 мкР/ч">    </p:cNvPr>
-          <p:cNvPicPr>
-            <a:picLocks noChangeAspect="1"/>
-          </p:cNvPicPr>
-          <p:nvPr/>
-        </p:nvPicPr>
-        <p:blipFill>
-          <a:blip r:embed="rId2"/>
-          <a:stretch>
-            <a:fillRect/>
-          </a:stretch>
-        </p:blipFill>
-        <p:spPr>
-          <a:xfrm>
-            <a:off x="3378098" y="1234440"/>
-            <a:ext cx="2606040" cy="3694176"/>
-          </a:xfrm>
-          <a:prstGeom prst="rect">
-            <a:avLst/>
-          </a:prstGeom>
-        </p:spPr>
-      </p:pic>
-      <p:sp>
-        <p:nvSpPr>
-          <p:cNvPr id="6" name="Text 2"/>
-          <p:cNvSpPr txBox="1"/>
-          <p:nvPr/>
-        </p:nvSpPr>
-        <p:spPr>
-          <a:xfrm>
-            <a:off x="3286658" y="4974336"/>
-            <a:ext cx="2788920" cy="320040"/>
-          </a:xfrm>
-          <a:prstGeom prst="rect">
-            <a:avLst/>
-          </a:prstGeom>
-          <a:noFill/>
-          <a:ln/>
-        </p:spPr>
-        <p:txBody>
-          <a:bodyPr wrap="square" lIns="635" tIns="635" rIns="635" bIns="635" rtlCol="0" anchor="t"/>
-          <a:lstStyle/>
-          <a:p>
-            <a:pPr algn="ctr" indent="0" marL="0">
-              <a:buNone/>
-            </a:pPr>
-            <a:r>
-              <a:rPr lang="ru-RU" altLang="en-US" sz="1400" dirty="0">
-                <a:solidFill>
-                  <a:schemeClr val="tx1"/>
-                </a:solidFill>
-              </a:rPr>
-              <a:t>б</a:t>
-            </a:r>
-            <a:endParaRPr lang="ru-RU" sz="1400" dirty="0"/>
-          </a:p>
-        </p:txBody>
-      </p:sp>
-      <p:pic>
-        <p:nvPicPr>
-          <p:cNvPr id="7" name="Image 2" descr="Дозиметр после посадки в аэропорту Иркутск: 9,9 мкР/ч">    </p:cNvPr>
-          <p:cNvPicPr>
-            <a:picLocks noChangeAspect="1"/>
-          </p:cNvPicPr>
-          <p:nvPr/>
-        </p:nvPicPr>
-        <p:blipFill>
-          <a:blip r:embed="rId3"/>
-          <a:stretch>
-            <a:fillRect/>
-          </a:stretch>
-        </p:blipFill>
-        <p:spPr>
-          <a:xfrm>
-            <a:off x="6207557" y="1234440"/>
-            <a:ext cx="2606040" cy="3694176"/>
-          </a:xfrm>
-          <a:prstGeom prst="rect">
-            <a:avLst/>
-          </a:prstGeom>
-        </p:spPr>
-      </p:pic>
-      <p:sp>
-        <p:nvSpPr>
-          <p:cNvPr id="8" name="Text 3"/>
-          <p:cNvSpPr txBox="1"/>
-          <p:nvPr/>
-        </p:nvSpPr>
-        <p:spPr>
-          <a:xfrm>
-            <a:off x="6116117" y="4974336"/>
-            <a:ext cx="2788920" cy="320040"/>
-          </a:xfrm>
-          <a:prstGeom prst="rect">
-            <a:avLst/>
-          </a:prstGeom>
-          <a:noFill/>
-          <a:ln/>
-        </p:spPr>
-        <p:txBody>
-          <a:bodyPr wrap="square" lIns="635" tIns="635" rIns="635" bIns="635" rtlCol="0" anchor="t"/>
-          <a:lstStyle/>
-          <a:p>
-            <a:pPr algn="ctr" indent="0" marL="0">
-              <a:buNone/>
-            </a:pPr>
-            <a:r>
-              <a:rPr lang="ru-RU" altLang="en-US" sz="1400" dirty="0">
-                <a:solidFill>
-                  <a:schemeClr val="tx1"/>
-                </a:solidFill>
-              </a:rPr>
-              <a:t>в</a:t>
-            </a:r>
-            <a:endParaRPr lang="ru-RU" sz="1400" dirty="0"/>
-          </a:p>
-        </p:txBody>
-      </p:sp>
-      <p:pic>
-        <p:nvPicPr>
-          <p:cNvPr id="9" name="Image 3" descr="Пилотажный дисплей: эшелон FL350, точка NILRA в 0,6 NM">    </p:cNvPr>
-          <p:cNvPicPr>
-            <a:picLocks noChangeAspect="1"/>
-          </p:cNvPicPr>
-          <p:nvPr/>
-        </p:nvPicPr>
-        <p:blipFill>
-          <a:blip r:embed="rId4"/>
-          <a:stretch>
-            <a:fillRect/>
-          </a:stretch>
-        </p:blipFill>
-        <p:spPr>
-          <a:xfrm>
-            <a:off x="9037015" y="1234440"/>
-            <a:ext cx="2606040" cy="3694176"/>
-          </a:xfrm>
-          <a:prstGeom prst="rect">
-            <a:avLst/>
-          </a:prstGeom>
-        </p:spPr>
-      </p:pic>
-      <p:sp>
-        <p:nvSpPr>
-          <p:cNvPr id="10" name="Text 4"/>
-          <p:cNvSpPr txBox="1"/>
-          <p:nvPr/>
-        </p:nvSpPr>
-        <p:spPr>
-          <a:xfrm>
-            <a:off x="8945575" y="4974336"/>
-            <a:ext cx="2788920" cy="320040"/>
-          </a:xfrm>
-          <a:prstGeom prst="rect">
-            <a:avLst/>
-          </a:prstGeom>
-          <a:noFill/>
-          <a:ln/>
-        </p:spPr>
-        <p:txBody>
-          <a:bodyPr wrap="square" lIns="635" tIns="635" rIns="635" bIns="635" rtlCol="0" anchor="t"/>
-          <a:lstStyle/>
-          <a:p>
-            <a:pPr algn="ctr" indent="0" marL="0">
-              <a:buNone/>
-            </a:pPr>
-            <a:r>
-              <a:rPr lang="ru-RU" altLang="en-US" sz="1400" dirty="0">
-                <a:solidFill>
-                  <a:schemeClr val="tx1"/>
-                </a:solidFill>
-              </a:rPr>
-              <a:t>г</a:t>
-            </a:r>
-            <a:endParaRPr lang="ru-RU" sz="1400" dirty="0"/>
-          </a:p>
-        </p:txBody>
-      </p:sp>
-      <p:sp>
-        <p:nvSpPr>
-          <p:cNvPr id="11" name="Подпись"/>
-          <p:cNvSpPr txBox="1"/>
-          <p:nvPr/>
-        </p:nvSpPr>
-        <p:spPr>
-          <a:xfrm>
-            <a:off x="548640" y="5440680"/>
-            <a:ext cx="11094415" cy="731520"/>
-          </a:xfrm>
-          <a:prstGeom prst="rect">
-            <a:avLst/>
-          </a:prstGeom>
-          <a:noFill/>
-          <a:ln/>
-        </p:spPr>
-        <p:txBody>
-          <a:bodyPr wrap="square" lIns="635" tIns="635" rIns="635" bIns="635" rtlCol="0" anchor="t"/>
-          <a:lstStyle/>
-          <a:p>
-            <a:pPr algn="ctr" indent="0" marL="0">
-              <a:buNone/>
-            </a:pPr>
-            <a:r>
-              <a:rPr lang="ru-RU" altLang="en-US" sz="1600" dirty="0">
-                <a:solidFill>
-                  <a:schemeClr val="tx1"/>
-                </a:solidFill>
-              </a:rPr>
-              <a:t>Рисунок 1 – Текущие показания дозиметра: а – перед взлётом (13,2 мкР/ч); б – на эшелоне FL350 (194,8 мкР/ч); в – после посадки (9,9 мкР/ч); г – точка NILRA на пилотажном дисплее</a:t>
-            </a:r>
-            <a:endParaRPr lang="ru-RU" sz="1600" dirty="0"/>
-          </a:p>
-        </p:txBody>
-      </p:sp>
-      <p:sp>
-        <p:nvSpPr>
-          <p:cNvPr id="25" name="Slide Number Placeholder 0"/>
-          <p:cNvSpPr>
-            <a:spLocks noGrp="1"/>
-          </p:cNvSpPr>
-          <p:nvPr>
-            <p:ph type="sldNum" sz="quarter" idx="4294967295"/>
-          </p:nvPr>
-        </p:nvSpPr>
-        <p:spPr>
-          <a:xfrm>
-            <a:off x="11002975" y="6355080"/>
-            <a:ext cx="731520" cy="320040"/>
-          </a:xfrm>
-          <a:prstGeom prst="rect">
-            <a:avLst/>
-          </a:prstGeom>
-          <a:extLst>
-            <a:ext uri="{C572A759-6A51-4108-AA02-DFA0A04FC94B}">
-              <ma14:wrappingTextBoxFlag xmlns:ma14="http://schemas.microsoft.com/office/mac/drawingml/2011/main" val="0"/>
-            </a:ext>
-          </a:extLst>
-        </p:spPr>
-        <p:txBody>
-          <a:bodyPr/>
-          <a:lstStyle>
-            <a:lvl1pPr>
-              <a:defRPr sz="1400">
-                <a:solidFill>
-                  <a:schemeClr val="tx1"/>
-                </a:solidFill>
-              </a:defRPr>
-            </a:lvl1pPr>
-          </a:lstStyle>
-          <a:p>
-            <a:pPr algn="r"/>
-            <a:fld id="{F7021451-1387-4CA6-816F-3879F97B5CBC}" type="slidenum">
-              <a:rPr b="0" lang="ru-RU"/>
               <a:t>5</a:t>
             </a:fld>
             <a:endParaRPr lang="ru-RU"/>
@@ -9305,705 +10033,46 @@
                   <a:schemeClr val="tx2"/>
                 </a:solidFill>
               </a:rPr>
-              <a:t>Действующее правовое регулирование</a:t>
+              <a:t>Показания на рейсе Новокузнецк – Иркутск</a:t>
             </a:r>
             <a:endParaRPr lang="ru-RU" sz="2800" dirty="0"/>
           </a:p>
         </p:txBody>
       </p:sp>
-      <p:sp>
-        <p:nvSpPr>
-          <p:cNvPr id="3" name="Shape 1"/>
-          <p:cNvSpPr/>
+      <p:pic>
+        <p:nvPicPr>
+          <p:cNvPr id="3" name="Image 0" descr="Дозиметр перед взлётом в аэропорту Новокузнецк: 13,2 мкР/ч">    </p:cNvPr>
+          <p:cNvPicPr>
+            <a:picLocks noChangeAspect="1"/>
+          </p:cNvPicPr>
           <p:nvPr/>
-        </p:nvSpPr>
+        </p:nvPicPr>
+        <p:blipFill>
+          <a:blip r:embed="rId1"/>
+          <a:stretch>
+            <a:fillRect/>
+          </a:stretch>
+        </p:blipFill>
         <p:spPr>
           <a:xfrm>
-            <a:off x="1737360" y="1234440"/>
-            <a:ext cx="8714232" cy="777240"/>
-          </a:xfrm>
-          <a:prstGeom prst="roundRect">
-            <a:avLst>
-              <a:gd name="adj" fmla="val 9412"/>
-            </a:avLst>
-          </a:prstGeom>
-          <a:solidFill>
-            <a:schemeClr val="bg2"/>
-          </a:solidFill>
-          <a:ln w="12700">
-            <a:solidFill>
-              <a:schemeClr val="tx2"/>
-            </a:solidFill>
-            <a:prstDash val="solid"/>
-          </a:ln>
-        </p:spPr>
-      </p:sp>
-      <p:sp>
-        <p:nvSpPr>
-          <p:cNvPr id="4" name="Text 2"/>
-          <p:cNvSpPr txBox="1"/>
-          <p:nvPr/>
-        </p:nvSpPr>
-        <p:spPr>
-          <a:xfrm>
-            <a:off x="1828800" y="1271016"/>
-            <a:ext cx="8531352" cy="704088"/>
+            <a:off x="548640" y="1234440"/>
+            <a:ext cx="2606040" cy="3694176"/>
           </a:xfrm>
           <a:prstGeom prst="rect">
             <a:avLst/>
           </a:prstGeom>
-          <a:noFill/>
-          <a:ln/>
         </p:spPr>
-        <p:txBody>
-          <a:bodyPr wrap="square" lIns="635" tIns="635" rIns="635" bIns="635" rtlCol="0" anchor="ctr"/>
-          <a:lstStyle/>
-          <a:p>
-            <a:pPr algn="ctr" indent="0" marL="0">
-              <a:buNone/>
-            </a:pPr>
-            <a:r>
-              <a:rPr lang="ru-RU" altLang="en-US" sz="1600" b="1" dirty="0">
-                <a:solidFill>
-                  <a:schemeClr val="tx1"/>
-                </a:solidFill>
-              </a:rPr>
-              <a:t>Федеральные законы</a:t>
-            </a:r>
-            <a:endParaRPr lang="ru-RU" sz="1600" dirty="0"/>
-          </a:p>
-          <a:p>
-            <a:pPr algn="ctr" indent="0" marL="0">
-              <a:buNone/>
-            </a:pPr>
-            <a:r>
-              <a:rPr lang="ru-RU" altLang="en-US" sz="1600" dirty="0">
-                <a:solidFill>
-                  <a:schemeClr val="tx1"/>
-                </a:solidFill>
-              </a:rPr>
-              <a:t>№ 3‑ФЗ (ст. 18), № 52‑ФЗ, Воздушный кодекс РФ (ст. 56), Трудовой кодекс РФ (ст. 214, 254, 329)</a:t>
-            </a:r>
-            <a:endParaRPr lang="ru-RU" sz="1600" dirty="0"/>
-          </a:p>
-        </p:txBody>
-      </p:sp>
-      <p:sp>
-        <p:nvSpPr>
-          <p:cNvPr id="5" name="Shape 3"/>
-          <p:cNvSpPr/>
+      </p:pic>
+      <p:sp>
+        <p:nvSpPr>
+          <p:cNvPr id="4" name="Text 1"/>
+          <p:cNvSpPr txBox="1"/>
           <p:nvPr/>
         </p:nvSpPr>
         <p:spPr>
           <a:xfrm>
-            <a:off x="548640" y="2423160"/>
-            <a:ext cx="3429000" cy="1097280"/>
-          </a:xfrm>
-          <a:prstGeom prst="roundRect">
-            <a:avLst>
-              <a:gd name="adj" fmla="val 6667"/>
-            </a:avLst>
-          </a:prstGeom>
-          <a:solidFill>
-            <a:schemeClr val="bg2"/>
-          </a:solidFill>
-          <a:ln w="12700">
-            <a:solidFill>
-              <a:schemeClr val="tx2"/>
-            </a:solidFill>
-            <a:prstDash val="solid"/>
-          </a:ln>
-        </p:spPr>
-      </p:sp>
-      <p:sp>
-        <p:nvSpPr>
-          <p:cNvPr id="6" name="Text 4"/>
-          <p:cNvSpPr txBox="1"/>
-          <p:nvPr/>
-        </p:nvSpPr>
-        <p:spPr>
-          <a:xfrm>
-            <a:off x="640080" y="2459736"/>
-            <a:ext cx="3246120" cy="1024128"/>
-          </a:xfrm>
-          <a:prstGeom prst="rect">
-            <a:avLst/>
-          </a:prstGeom>
-          <a:noFill/>
-          <a:ln/>
-        </p:spPr>
-        <p:txBody>
-          <a:bodyPr wrap="square" lIns="635" tIns="635" rIns="635" bIns="635" rtlCol="0" anchor="ctr"/>
-          <a:lstStyle/>
-          <a:p>
-            <a:pPr algn="ctr" indent="0" marL="0">
-              <a:buNone/>
-            </a:pPr>
-            <a:r>
-              <a:rPr lang="ru-RU" altLang="en-US" sz="1600" b="1" dirty="0">
-                <a:solidFill>
-                  <a:schemeClr val="tx1"/>
-                </a:solidFill>
-              </a:rPr>
-              <a:t>Санитарные нормы</a:t>
-            </a:r>
-            <a:endParaRPr lang="ru-RU" sz="1600" dirty="0"/>
-          </a:p>
-          <a:p>
-            <a:pPr algn="ctr" indent="0" marL="0">
-              <a:buNone/>
-            </a:pPr>
-            <a:r>
-              <a:rPr lang="ru-RU" altLang="en-US" sz="1600" dirty="0">
-                <a:solidFill>
-                  <a:schemeClr val="tx1"/>
-                </a:solidFill>
-              </a:rPr>
-              <a:t>НРБ‑99/2009, пп. 4.1, 4.3: не более 5 мЗв в год</a:t>
-            </a:r>
-            <a:endParaRPr lang="ru-RU" sz="1600" dirty="0"/>
-          </a:p>
-        </p:txBody>
-      </p:sp>
-      <p:sp>
-        <p:nvSpPr>
-          <p:cNvPr id="7" name="Shape 5"/>
-          <p:cNvSpPr/>
-          <p:nvPr/>
-        </p:nvSpPr>
-        <p:spPr>
-          <a:xfrm>
-            <a:off x="2263140" y="2011680"/>
-            <a:ext cx="0" cy="411480"/>
-          </a:xfrm>
-          <a:prstGeom prst="line">
-            <a:avLst/>
-          </a:prstGeom>
-          <a:noFill/>
-          <a:ln w="15875">
-            <a:solidFill>
-              <a:schemeClr val="tx2"/>
-            </a:solidFill>
-            <a:prstDash val="solid"/>
-            <a:tailEnd type="triangle"/>
-          </a:ln>
-        </p:spPr>
-      </p:sp>
-      <p:sp>
-        <p:nvSpPr>
-          <p:cNvPr id="8" name="Shape 6"/>
-          <p:cNvSpPr/>
-          <p:nvPr/>
-        </p:nvSpPr>
-        <p:spPr>
-          <a:xfrm>
-            <a:off x="2263140" y="3520440"/>
-            <a:ext cx="2601468" cy="411480"/>
-          </a:xfrm>
-          <a:prstGeom prst="line">
-            <a:avLst/>
-          </a:prstGeom>
-          <a:noFill/>
-          <a:ln w="15875">
-            <a:solidFill>
-              <a:schemeClr val="tx2"/>
-            </a:solidFill>
-            <a:prstDash val="solid"/>
-            <a:tailEnd type="triangle"/>
-          </a:ln>
-        </p:spPr>
-      </p:sp>
-      <p:sp>
-        <p:nvSpPr>
-          <p:cNvPr id="9" name="Shape 7"/>
-          <p:cNvSpPr/>
-          <p:nvPr/>
-        </p:nvSpPr>
-        <p:spPr>
-          <a:xfrm>
-            <a:off x="4381348" y="2423160"/>
-            <a:ext cx="3429000" cy="1097280"/>
-          </a:xfrm>
-          <a:prstGeom prst="roundRect">
-            <a:avLst>
-              <a:gd name="adj" fmla="val 6667"/>
-            </a:avLst>
-          </a:prstGeom>
-          <a:solidFill>
-            <a:schemeClr val="bg2"/>
-          </a:solidFill>
-          <a:ln w="12700">
-            <a:solidFill>
-              <a:schemeClr val="tx2"/>
-            </a:solidFill>
-            <a:prstDash val="solid"/>
-          </a:ln>
-        </p:spPr>
-      </p:sp>
-      <p:sp>
-        <p:nvSpPr>
-          <p:cNvPr id="10" name="Text 8"/>
-          <p:cNvSpPr txBox="1"/>
-          <p:nvPr/>
-        </p:nvSpPr>
-        <p:spPr>
-          <a:xfrm>
-            <a:off x="4472788" y="2459736"/>
-            <a:ext cx="3246120" cy="1024128"/>
-          </a:xfrm>
-          <a:prstGeom prst="rect">
-            <a:avLst/>
-          </a:prstGeom>
-          <a:noFill/>
-          <a:ln/>
-        </p:spPr>
-        <p:txBody>
-          <a:bodyPr wrap="square" lIns="635" tIns="635" rIns="635" bIns="635" rtlCol="0" anchor="ctr"/>
-          <a:lstStyle/>
-          <a:p>
-            <a:pPr algn="ctr" indent="0" marL="0">
-              <a:buNone/>
-            </a:pPr>
-            <a:r>
-              <a:rPr lang="ru-RU" altLang="en-US" sz="1600" b="1" dirty="0">
-                <a:solidFill>
-                  <a:schemeClr val="tx1"/>
-                </a:solidFill>
-              </a:rPr>
-              <a:t>Охрана труда</a:t>
-            </a:r>
-            <a:endParaRPr lang="ru-RU" sz="1600" dirty="0"/>
-          </a:p>
-          <a:p>
-            <a:pPr algn="ctr" indent="0" marL="0">
-              <a:buNone/>
-            </a:pPr>
-            <a:r>
-              <a:rPr lang="ru-RU" altLang="en-US" sz="1600" dirty="0">
-                <a:solidFill>
-                  <a:schemeClr val="tx1"/>
-                </a:solidFill>
-              </a:rPr>
-              <a:t>приказ Минтруда № 255н: СОУТ в контрольном полёте</a:t>
-            </a:r>
-            <a:endParaRPr lang="ru-RU" sz="1600" dirty="0"/>
-          </a:p>
-        </p:txBody>
-      </p:sp>
-      <p:sp>
-        <p:nvSpPr>
-          <p:cNvPr id="11" name="Shape 9"/>
-          <p:cNvSpPr/>
-          <p:nvPr/>
-        </p:nvSpPr>
-        <p:spPr>
-          <a:xfrm>
-            <a:off x="6095848" y="2011680"/>
-            <a:ext cx="0" cy="411480"/>
-          </a:xfrm>
-          <a:prstGeom prst="line">
-            <a:avLst/>
-          </a:prstGeom>
-          <a:noFill/>
-          <a:ln w="15875">
-            <a:solidFill>
-              <a:schemeClr val="tx2"/>
-            </a:solidFill>
-            <a:prstDash val="solid"/>
-            <a:tailEnd type="triangle"/>
-          </a:ln>
-        </p:spPr>
-      </p:sp>
-      <p:sp>
-        <p:nvSpPr>
-          <p:cNvPr id="12" name="Shape 10"/>
-          <p:cNvSpPr/>
-          <p:nvPr/>
-        </p:nvSpPr>
-        <p:spPr>
-          <a:xfrm>
-            <a:off x="6095848" y="3520440"/>
-            <a:ext cx="3200" cy="411480"/>
-          </a:xfrm>
-          <a:prstGeom prst="line">
-            <a:avLst/>
-          </a:prstGeom>
-          <a:noFill/>
-          <a:ln w="15875">
-            <a:solidFill>
-              <a:schemeClr val="tx2"/>
-            </a:solidFill>
-            <a:prstDash val="solid"/>
-            <a:tailEnd type="triangle"/>
-          </a:ln>
-        </p:spPr>
-      </p:sp>
-      <p:sp>
-        <p:nvSpPr>
-          <p:cNvPr id="13" name="Shape 11"/>
-          <p:cNvSpPr/>
-          <p:nvPr/>
-        </p:nvSpPr>
-        <p:spPr>
-          <a:xfrm>
-            <a:off x="8214055" y="2423160"/>
-            <a:ext cx="3429000" cy="1097280"/>
-          </a:xfrm>
-          <a:prstGeom prst="roundRect">
-            <a:avLst>
-              <a:gd name="adj" fmla="val 6667"/>
-            </a:avLst>
-          </a:prstGeom>
-          <a:solidFill>
-            <a:schemeClr val="bg2"/>
-          </a:solidFill>
-          <a:ln w="12700">
-            <a:solidFill>
-              <a:schemeClr val="tx2"/>
-            </a:solidFill>
-            <a:prstDash val="solid"/>
-          </a:ln>
-        </p:spPr>
-      </p:sp>
-      <p:sp>
-        <p:nvSpPr>
-          <p:cNvPr id="14" name="Text 12"/>
-          <p:cNvSpPr txBox="1"/>
-          <p:nvPr/>
-        </p:nvSpPr>
-        <p:spPr>
-          <a:xfrm>
-            <a:off x="8305495" y="2459736"/>
-            <a:ext cx="3246120" cy="1024128"/>
-          </a:xfrm>
-          <a:prstGeom prst="rect">
-            <a:avLst/>
-          </a:prstGeom>
-          <a:noFill/>
-          <a:ln/>
-        </p:spPr>
-        <p:txBody>
-          <a:bodyPr wrap="square" lIns="635" tIns="635" rIns="635" bIns="635" rtlCol="0" anchor="ctr"/>
-          <a:lstStyle/>
-          <a:p>
-            <a:pPr algn="ctr" indent="0" marL="0">
-              <a:buNone/>
-            </a:pPr>
-            <a:r>
-              <a:rPr lang="ru-RU" altLang="en-US" sz="1600" b="1" dirty="0">
-                <a:solidFill>
-                  <a:schemeClr val="tx1"/>
-                </a:solidFill>
-              </a:rPr>
-              <a:t>Режим труда</a:t>
-            </a:r>
-            <a:endParaRPr lang="ru-RU" sz="1600" dirty="0"/>
-          </a:p>
-          <a:p>
-            <a:pPr algn="ctr" indent="0" marL="0">
-              <a:buNone/>
-            </a:pPr>
-            <a:r>
-              <a:rPr lang="ru-RU" altLang="en-US" sz="1600" dirty="0">
-                <a:solidFill>
-                  <a:schemeClr val="tx1"/>
-                </a:solidFill>
-              </a:rPr>
-              <a:t>приказ Минтранса № 381: до 800 ч в год, с согласия – до 900 ч</a:t>
-            </a:r>
-            <a:endParaRPr lang="ru-RU" sz="1600" dirty="0"/>
-          </a:p>
-        </p:txBody>
-      </p:sp>
-      <p:sp>
-        <p:nvSpPr>
-          <p:cNvPr id="15" name="Shape 13"/>
-          <p:cNvSpPr/>
-          <p:nvPr/>
-        </p:nvSpPr>
-        <p:spPr>
-          <a:xfrm>
-            <a:off x="9928555" y="2011680"/>
-            <a:ext cx="0" cy="411480"/>
-          </a:xfrm>
-          <a:prstGeom prst="line">
-            <a:avLst/>
-          </a:prstGeom>
-          <a:noFill/>
-          <a:ln w="15875">
-            <a:solidFill>
-              <a:schemeClr val="tx2"/>
-            </a:solidFill>
-            <a:prstDash val="solid"/>
-            <a:tailEnd type="triangle"/>
-          </a:ln>
-        </p:spPr>
-      </p:sp>
-      <p:sp>
-        <p:nvSpPr>
-          <p:cNvPr id="16" name="Shape 14"/>
-          <p:cNvSpPr/>
-          <p:nvPr/>
-        </p:nvSpPr>
-        <p:spPr>
-          <a:xfrm flipH="1">
-            <a:off x="7333488" y="3520440"/>
-            <a:ext cx="2595067" cy="411480"/>
-          </a:xfrm>
-          <a:prstGeom prst="line">
-            <a:avLst/>
-          </a:prstGeom>
-          <a:noFill/>
-          <a:ln w="15875">
-            <a:solidFill>
-              <a:schemeClr val="tx2"/>
-            </a:solidFill>
-            <a:prstDash val="solid"/>
-            <a:tailEnd type="triangle"/>
-          </a:ln>
-        </p:spPr>
-      </p:sp>
-      <p:sp>
-        <p:nvSpPr>
-          <p:cNvPr id="17" name="Shape 15"/>
-          <p:cNvSpPr/>
-          <p:nvPr/>
-        </p:nvSpPr>
-        <p:spPr>
-          <a:xfrm>
-            <a:off x="4041648" y="3931920"/>
-            <a:ext cx="4114800" cy="685800"/>
-          </a:xfrm>
-          <a:prstGeom prst="roundRect">
-            <a:avLst>
-              <a:gd name="adj" fmla="val 10667"/>
-            </a:avLst>
-          </a:prstGeom>
-          <a:solidFill>
-            <a:schemeClr val="bg2"/>
-          </a:solidFill>
-          <a:ln w="12700">
-            <a:solidFill>
-              <a:schemeClr val="tx2"/>
-            </a:solidFill>
-            <a:prstDash val="solid"/>
-          </a:ln>
-        </p:spPr>
-      </p:sp>
-      <p:sp>
-        <p:nvSpPr>
-          <p:cNvPr id="18" name="Text 16"/>
-          <p:cNvSpPr txBox="1"/>
-          <p:nvPr/>
-        </p:nvSpPr>
-        <p:spPr>
-          <a:xfrm>
-            <a:off x="4133088" y="3968496"/>
-            <a:ext cx="3931920" cy="612648"/>
-          </a:xfrm>
-          <a:prstGeom prst="rect">
-            <a:avLst/>
-          </a:prstGeom>
-          <a:noFill/>
-          <a:ln/>
-        </p:spPr>
-        <p:txBody>
-          <a:bodyPr wrap="square" lIns="635" tIns="635" rIns="635" bIns="635" rtlCol="0" anchor="ctr"/>
-          <a:lstStyle/>
-          <a:p>
-            <a:pPr algn="ctr" indent="0" marL="0">
-              <a:buNone/>
-            </a:pPr>
-            <a:r>
-              <a:rPr lang="ru-RU" altLang="en-US" sz="1600" b="1" dirty="0">
-                <a:solidFill>
-                  <a:schemeClr val="tx1"/>
-                </a:solidFill>
-              </a:rPr>
-              <a:t>Член экипажа</a:t>
-            </a:r>
-            <a:endParaRPr lang="ru-RU" sz="1600" dirty="0"/>
-          </a:p>
-          <a:p>
-            <a:pPr algn="ctr" indent="0" marL="0">
-              <a:buNone/>
-            </a:pPr>
-            <a:r>
-              <a:rPr lang="ru-RU" altLang="en-US" sz="1600" dirty="0">
-                <a:solidFill>
-                  <a:schemeClr val="tx1"/>
-                </a:solidFill>
-              </a:rPr>
-              <a:t>лётный и кабинный экипаж</a:t>
-            </a:r>
-            <a:endParaRPr lang="ru-RU" sz="1600" dirty="0"/>
-          </a:p>
-        </p:txBody>
-      </p:sp>
-      <p:sp>
-        <p:nvSpPr>
-          <p:cNvPr id="19" name="Shape 17"/>
-          <p:cNvSpPr/>
-          <p:nvPr/>
-        </p:nvSpPr>
-        <p:spPr>
-          <a:xfrm>
-            <a:off x="548640" y="4892040"/>
-            <a:ext cx="5349240" cy="777240"/>
-          </a:xfrm>
-          <a:prstGeom prst="roundRect">
-            <a:avLst>
-              <a:gd name="adj" fmla="val 9412"/>
-            </a:avLst>
-          </a:prstGeom>
-          <a:solidFill>
-            <a:schemeClr val="bg1"/>
-          </a:solidFill>
-          <a:ln w="12700">
-            <a:solidFill>
-              <a:schemeClr val="tx2"/>
-            </a:solidFill>
-            <a:prstDash val="dash"/>
-          </a:ln>
-        </p:spPr>
-      </p:sp>
-      <p:sp>
-        <p:nvSpPr>
-          <p:cNvPr id="20" name="Text 18"/>
-          <p:cNvSpPr txBox="1"/>
-          <p:nvPr/>
-        </p:nvSpPr>
-        <p:spPr>
-          <a:xfrm>
-            <a:off x="640080" y="4928616"/>
-            <a:ext cx="5166360" cy="704088"/>
-          </a:xfrm>
-          <a:prstGeom prst="rect">
-            <a:avLst/>
-          </a:prstGeom>
-          <a:noFill/>
-          <a:ln/>
-        </p:spPr>
-        <p:txBody>
-          <a:bodyPr wrap="square" lIns="635" tIns="635" rIns="635" bIns="635" rtlCol="0" anchor="ctr"/>
-          <a:lstStyle/>
-          <a:p>
-            <a:pPr algn="ctr" indent="0" marL="0">
-              <a:buNone/>
-            </a:pPr>
-            <a:r>
-              <a:rPr lang="ru-RU" altLang="en-US" sz="1600" b="1" dirty="0">
-                <a:solidFill>
-                  <a:schemeClr val="tx1"/>
-                </a:solidFill>
-              </a:rPr>
-              <a:t>Утратили силу:</a:t>
-            </a:r>
-            <a:endParaRPr lang="ru-RU" sz="1600" dirty="0"/>
-          </a:p>
-          <a:p>
-            <a:pPr algn="ctr" indent="0" marL="0">
-              <a:buNone/>
-            </a:pPr>
-            <a:r>
-              <a:rPr lang="ru-RU" altLang="en-US" sz="1600" dirty="0">
-                <a:solidFill>
-                  <a:schemeClr val="tx1"/>
-                </a:solidFill>
-              </a:rPr>
-              <a:t>СанПиН 2.5.1.2423‑08 (2021), СанПиН 2.6.1.2800‑10 (2025)</a:t>
-            </a:r>
-            <a:endParaRPr lang="ru-RU" sz="1600" dirty="0"/>
-          </a:p>
-        </p:txBody>
-      </p:sp>
-      <p:sp>
-        <p:nvSpPr>
-          <p:cNvPr id="21" name="Shape 19"/>
-          <p:cNvSpPr/>
-          <p:nvPr/>
-        </p:nvSpPr>
-        <p:spPr>
-          <a:xfrm>
-            <a:off x="6293815" y="4892040"/>
-            <a:ext cx="5349240" cy="777240"/>
-          </a:xfrm>
-          <a:prstGeom prst="roundRect">
-            <a:avLst>
-              <a:gd name="adj" fmla="val 9412"/>
-            </a:avLst>
-          </a:prstGeom>
-          <a:solidFill>
-            <a:schemeClr val="bg1"/>
-          </a:solidFill>
-          <a:ln w="12700">
-            <a:solidFill>
-              <a:schemeClr val="tx2"/>
-            </a:solidFill>
-            <a:prstDash val="dash"/>
-          </a:ln>
-        </p:spPr>
-      </p:sp>
-      <p:sp>
-        <p:nvSpPr>
-          <p:cNvPr id="22" name="Text 20"/>
-          <p:cNvSpPr txBox="1"/>
-          <p:nvPr/>
-        </p:nvSpPr>
-        <p:spPr>
-          <a:xfrm>
-            <a:off x="6385255" y="4928616"/>
-            <a:ext cx="5166360" cy="704088"/>
-          </a:xfrm>
-          <a:prstGeom prst="rect">
-            <a:avLst/>
-          </a:prstGeom>
-          <a:noFill/>
-          <a:ln/>
-        </p:spPr>
-        <p:txBody>
-          <a:bodyPr wrap="square" lIns="635" tIns="635" rIns="635" bIns="635" rtlCol="0" anchor="ctr"/>
-          <a:lstStyle/>
-          <a:p>
-            <a:pPr algn="ctr" indent="0" marL="0">
-              <a:buNone/>
-            </a:pPr>
-            <a:r>
-              <a:rPr lang="ru-RU" altLang="en-US" sz="1600" b="1" dirty="0">
-                <a:solidFill>
-                  <a:schemeClr val="tx1"/>
-                </a:solidFill>
-              </a:rPr>
-              <a:t>Не установлено:</a:t>
-            </a:r>
-            <a:endParaRPr lang="ru-RU" sz="1600" dirty="0"/>
-          </a:p>
-          <a:p>
-            <a:pPr algn="ctr" indent="0" marL="0">
-              <a:buNone/>
-            </a:pPr>
-            <a:r>
-              <a:rPr lang="ru-RU" altLang="en-US" sz="1600" dirty="0">
-                <a:solidFill>
-                  <a:schemeClr val="tx1"/>
-                </a:solidFill>
-              </a:rPr>
-              <a:t>кто и как рассчитывает индивидуальную дозу</a:t>
-            </a:r>
-            <a:endParaRPr lang="ru-RU" sz="1600" dirty="0"/>
-          </a:p>
-        </p:txBody>
-      </p:sp>
-      <p:sp>
-        <p:nvSpPr>
-          <p:cNvPr id="23" name="Подпись"/>
-          <p:cNvSpPr txBox="1"/>
-          <p:nvPr/>
-        </p:nvSpPr>
-        <p:spPr>
-          <a:xfrm>
-            <a:off x="548640" y="5760720"/>
-            <a:ext cx="11094415" cy="594360"/>
+            <a:off x="457200" y="4974336"/>
+            <a:ext cx="2788920" cy="320040"/>
           </a:xfrm>
           <a:prstGeom prst="rect">
             <a:avLst/>
@@ -10019,12 +10088,228 @@
               <a:buNone/>
             </a:pPr>
             <a:r>
+              <a:rPr lang="ru-RU" altLang="en-US" sz="1400" dirty="0">
+                <a:solidFill>
+                  <a:schemeClr val="tx1"/>
+                </a:solidFill>
+              </a:rPr>
+              <a:t>а</a:t>
+            </a:r>
+            <a:endParaRPr lang="ru-RU" sz="1400" dirty="0"/>
+          </a:p>
+        </p:txBody>
+      </p:sp>
+      <p:pic>
+        <p:nvPicPr>
+          <p:cNvPr id="5" name="Image 1" descr="Дозиметр на эшелоне FL350: 194,8 мкР/ч">    </p:cNvPr>
+          <p:cNvPicPr>
+            <a:picLocks noChangeAspect="1"/>
+          </p:cNvPicPr>
+          <p:nvPr/>
+        </p:nvPicPr>
+        <p:blipFill>
+          <a:blip r:embed="rId2"/>
+          <a:stretch>
+            <a:fillRect/>
+          </a:stretch>
+        </p:blipFill>
+        <p:spPr>
+          <a:xfrm>
+            <a:off x="3378098" y="1234440"/>
+            <a:ext cx="2606040" cy="3694176"/>
+          </a:xfrm>
+          <a:prstGeom prst="rect">
+            <a:avLst/>
+          </a:prstGeom>
+        </p:spPr>
+      </p:pic>
+      <p:sp>
+        <p:nvSpPr>
+          <p:cNvPr id="6" name="Text 2"/>
+          <p:cNvSpPr txBox="1"/>
+          <p:nvPr/>
+        </p:nvSpPr>
+        <p:spPr>
+          <a:xfrm>
+            <a:off x="3286658" y="4974336"/>
+            <a:ext cx="2788920" cy="320040"/>
+          </a:xfrm>
+          <a:prstGeom prst="rect">
+            <a:avLst/>
+          </a:prstGeom>
+          <a:noFill/>
+          <a:ln/>
+        </p:spPr>
+        <p:txBody>
+          <a:bodyPr wrap="square" lIns="635" tIns="635" rIns="635" bIns="635" rtlCol="0" anchor="t"/>
+          <a:lstStyle/>
+          <a:p>
+            <a:pPr algn="ctr" indent="0" marL="0">
+              <a:buNone/>
+            </a:pPr>
+            <a:r>
+              <a:rPr lang="ru-RU" altLang="en-US" sz="1400" dirty="0">
+                <a:solidFill>
+                  <a:schemeClr val="tx1"/>
+                </a:solidFill>
+              </a:rPr>
+              <a:t>б</a:t>
+            </a:r>
+            <a:endParaRPr lang="ru-RU" sz="1400" dirty="0"/>
+          </a:p>
+        </p:txBody>
+      </p:sp>
+      <p:pic>
+        <p:nvPicPr>
+          <p:cNvPr id="7" name="Image 2" descr="Дозиметр после посадки в аэропорту Иркутск: 9,9 мкР/ч">    </p:cNvPr>
+          <p:cNvPicPr>
+            <a:picLocks noChangeAspect="1"/>
+          </p:cNvPicPr>
+          <p:nvPr/>
+        </p:nvPicPr>
+        <p:blipFill>
+          <a:blip r:embed="rId3"/>
+          <a:stretch>
+            <a:fillRect/>
+          </a:stretch>
+        </p:blipFill>
+        <p:spPr>
+          <a:xfrm>
+            <a:off x="6207557" y="1234440"/>
+            <a:ext cx="2606040" cy="3694176"/>
+          </a:xfrm>
+          <a:prstGeom prst="rect">
+            <a:avLst/>
+          </a:prstGeom>
+        </p:spPr>
+      </p:pic>
+      <p:sp>
+        <p:nvSpPr>
+          <p:cNvPr id="8" name="Text 3"/>
+          <p:cNvSpPr txBox="1"/>
+          <p:nvPr/>
+        </p:nvSpPr>
+        <p:spPr>
+          <a:xfrm>
+            <a:off x="6116117" y="4974336"/>
+            <a:ext cx="2788920" cy="320040"/>
+          </a:xfrm>
+          <a:prstGeom prst="rect">
+            <a:avLst/>
+          </a:prstGeom>
+          <a:noFill/>
+          <a:ln/>
+        </p:spPr>
+        <p:txBody>
+          <a:bodyPr wrap="square" lIns="635" tIns="635" rIns="635" bIns="635" rtlCol="0" anchor="t"/>
+          <a:lstStyle/>
+          <a:p>
+            <a:pPr algn="ctr" indent="0" marL="0">
+              <a:buNone/>
+            </a:pPr>
+            <a:r>
+              <a:rPr lang="ru-RU" altLang="en-US" sz="1400" dirty="0">
+                <a:solidFill>
+                  <a:schemeClr val="tx1"/>
+                </a:solidFill>
+              </a:rPr>
+              <a:t>в</a:t>
+            </a:r>
+            <a:endParaRPr lang="ru-RU" sz="1400" dirty="0"/>
+          </a:p>
+        </p:txBody>
+      </p:sp>
+      <p:pic>
+        <p:nvPicPr>
+          <p:cNvPr id="9" name="Image 3" descr="Пилотажный дисплей: эшелон FL350, точка NILRA в 0,6 NM">    </p:cNvPr>
+          <p:cNvPicPr>
+            <a:picLocks noChangeAspect="1"/>
+          </p:cNvPicPr>
+          <p:nvPr/>
+        </p:nvPicPr>
+        <p:blipFill>
+          <a:blip r:embed="rId4"/>
+          <a:stretch>
+            <a:fillRect/>
+          </a:stretch>
+        </p:blipFill>
+        <p:spPr>
+          <a:xfrm>
+            <a:off x="9037015" y="1234440"/>
+            <a:ext cx="2606040" cy="3694176"/>
+          </a:xfrm>
+          <a:prstGeom prst="rect">
+            <a:avLst/>
+          </a:prstGeom>
+        </p:spPr>
+      </p:pic>
+      <p:sp>
+        <p:nvSpPr>
+          <p:cNvPr id="10" name="Text 4"/>
+          <p:cNvSpPr txBox="1"/>
+          <p:nvPr/>
+        </p:nvSpPr>
+        <p:spPr>
+          <a:xfrm>
+            <a:off x="8945575" y="4974336"/>
+            <a:ext cx="2788920" cy="320040"/>
+          </a:xfrm>
+          <a:prstGeom prst="rect">
+            <a:avLst/>
+          </a:prstGeom>
+          <a:noFill/>
+          <a:ln/>
+        </p:spPr>
+        <p:txBody>
+          <a:bodyPr wrap="square" lIns="635" tIns="635" rIns="635" bIns="635" rtlCol="0" anchor="t"/>
+          <a:lstStyle/>
+          <a:p>
+            <a:pPr algn="ctr" indent="0" marL="0">
+              <a:buNone/>
+            </a:pPr>
+            <a:r>
+              <a:rPr lang="ru-RU" altLang="en-US" sz="1400" dirty="0">
+                <a:solidFill>
+                  <a:schemeClr val="tx1"/>
+                </a:solidFill>
+              </a:rPr>
+              <a:t>г</a:t>
+            </a:r>
+            <a:endParaRPr lang="ru-RU" sz="1400" dirty="0"/>
+          </a:p>
+        </p:txBody>
+      </p:sp>
+      <p:sp>
+        <p:nvSpPr>
+          <p:cNvPr id="11" name="Подпись"/>
+          <p:cNvSpPr txBox="1"/>
+          <p:nvPr/>
+        </p:nvSpPr>
+        <p:spPr>
+          <a:xfrm>
+            <a:off x="548640" y="5440680"/>
+            <a:ext cx="11094415" cy="731520"/>
+          </a:xfrm>
+          <a:prstGeom prst="rect">
+            <a:avLst/>
+          </a:prstGeom>
+          <a:noFill/>
+          <a:ln/>
+        </p:spPr>
+        <p:txBody>
+          <a:bodyPr wrap="square" lIns="635" tIns="635" rIns="635" bIns="635" rtlCol="0" anchor="t"/>
+          <a:lstStyle/>
+          <a:p>
+            <a:pPr algn="ctr" indent="0" marL="0">
+              <a:buNone/>
+            </a:pPr>
+            <a:r>
               <a:rPr lang="ru-RU" altLang="en-US" sz="1600" dirty="0">
                 <a:solidFill>
                   <a:schemeClr val="tx1"/>
                 </a:solidFill>
               </a:rPr>
-              <a:t>Рисунок 2 – Система правового регулирования защиты членов экипажей от космического излучения (составлено авторами)</a:t>
+              <a:t>Рисунок 3 – Текущие показания дозиметра: а – перед взлётом (13,2 мкР/ч); б – на эшелоне FL350 (194,8 мкР/ч); в – после посадки (9,9 мкР/ч); г – точка NILRA на пилотажном дисплее</a:t>
             </a:r>
             <a:endParaRPr lang="ru-RU" sz="1600" dirty="0"/>
           </a:p>
@@ -10132,6 +10417,1025 @@
                   <a:schemeClr val="tx2"/>
                 </a:solidFill>
               </a:rPr>
+              <a:t>Действующее правовое регулирование</a:t>
+            </a:r>
+            <a:endParaRPr lang="ru-RU" sz="2800" dirty="0"/>
+          </a:p>
+        </p:txBody>
+      </p:sp>
+      <p:sp>
+        <p:nvSpPr>
+          <p:cNvPr id="3" name="Shape 1"/>
+          <p:cNvSpPr/>
+          <p:nvPr/>
+        </p:nvSpPr>
+        <p:spPr>
+          <a:xfrm>
+            <a:off x="1737360" y="1234440"/>
+            <a:ext cx="8714232" cy="777240"/>
+          </a:xfrm>
+          <a:prstGeom prst="roundRect">
+            <a:avLst>
+              <a:gd name="adj" fmla="val 9412"/>
+            </a:avLst>
+          </a:prstGeom>
+          <a:solidFill>
+            <a:schemeClr val="bg2"/>
+          </a:solidFill>
+          <a:ln w="12700">
+            <a:solidFill>
+              <a:schemeClr val="tx2"/>
+            </a:solidFill>
+            <a:prstDash val="solid"/>
+          </a:ln>
+        </p:spPr>
+      </p:sp>
+      <p:sp>
+        <p:nvSpPr>
+          <p:cNvPr id="4" name="Text 2"/>
+          <p:cNvSpPr txBox="1"/>
+          <p:nvPr/>
+        </p:nvSpPr>
+        <p:spPr>
+          <a:xfrm>
+            <a:off x="1828800" y="1271016"/>
+            <a:ext cx="8531352" cy="704088"/>
+          </a:xfrm>
+          <a:prstGeom prst="rect">
+            <a:avLst/>
+          </a:prstGeom>
+          <a:noFill/>
+          <a:ln/>
+        </p:spPr>
+        <p:txBody>
+          <a:bodyPr wrap="square" lIns="635" tIns="635" rIns="635" bIns="635" rtlCol="0" anchor="ctr"/>
+          <a:lstStyle/>
+          <a:p>
+            <a:pPr algn="ctr" indent="0" marL="0">
+              <a:buNone/>
+            </a:pPr>
+            <a:r>
+              <a:rPr lang="ru-RU" altLang="en-US" sz="1600" b="1" dirty="0">
+                <a:solidFill>
+                  <a:schemeClr val="tx1"/>
+                </a:solidFill>
+              </a:rPr>
+              <a:t>Федеральные законы</a:t>
+            </a:r>
+            <a:endParaRPr lang="ru-RU" sz="1600" dirty="0"/>
+          </a:p>
+          <a:p>
+            <a:pPr algn="ctr" indent="0" marL="0">
+              <a:buNone/>
+            </a:pPr>
+            <a:r>
+              <a:rPr lang="ru-RU" altLang="en-US" sz="1600" dirty="0">
+                <a:solidFill>
+                  <a:schemeClr val="tx1"/>
+                </a:solidFill>
+              </a:rPr>
+              <a:t>№ 3‑ФЗ (ст. 18), № 52‑ФЗ, Воздушный кодекс РФ (ст. 56), Трудовой кодекс РФ (ст. 214, 254, 329)</a:t>
+            </a:r>
+            <a:endParaRPr lang="ru-RU" sz="1600" dirty="0"/>
+          </a:p>
+        </p:txBody>
+      </p:sp>
+      <p:sp>
+        <p:nvSpPr>
+          <p:cNvPr id="5" name="Shape 3"/>
+          <p:cNvSpPr/>
+          <p:nvPr/>
+        </p:nvSpPr>
+        <p:spPr>
+          <a:xfrm>
+            <a:off x="548640" y="2423160"/>
+            <a:ext cx="3429000" cy="1097280"/>
+          </a:xfrm>
+          <a:prstGeom prst="roundRect">
+            <a:avLst>
+              <a:gd name="adj" fmla="val 6667"/>
+            </a:avLst>
+          </a:prstGeom>
+          <a:solidFill>
+            <a:schemeClr val="bg2"/>
+          </a:solidFill>
+          <a:ln w="12700">
+            <a:solidFill>
+              <a:schemeClr val="tx2"/>
+            </a:solidFill>
+            <a:prstDash val="solid"/>
+          </a:ln>
+        </p:spPr>
+      </p:sp>
+      <p:sp>
+        <p:nvSpPr>
+          <p:cNvPr id="6" name="Text 4"/>
+          <p:cNvSpPr txBox="1"/>
+          <p:nvPr/>
+        </p:nvSpPr>
+        <p:spPr>
+          <a:xfrm>
+            <a:off x="640080" y="2459736"/>
+            <a:ext cx="3246120" cy="1024128"/>
+          </a:xfrm>
+          <a:prstGeom prst="rect">
+            <a:avLst/>
+          </a:prstGeom>
+          <a:noFill/>
+          <a:ln/>
+        </p:spPr>
+        <p:txBody>
+          <a:bodyPr wrap="square" lIns="635" tIns="635" rIns="635" bIns="635" rtlCol="0" anchor="ctr"/>
+          <a:lstStyle/>
+          <a:p>
+            <a:pPr algn="ctr" indent="0" marL="0">
+              <a:buNone/>
+            </a:pPr>
+            <a:r>
+              <a:rPr lang="ru-RU" altLang="en-US" sz="1600" b="1" dirty="0">
+                <a:solidFill>
+                  <a:schemeClr val="tx1"/>
+                </a:solidFill>
+              </a:rPr>
+              <a:t>Санитарные нормы</a:t>
+            </a:r>
+            <a:endParaRPr lang="ru-RU" sz="1600" dirty="0"/>
+          </a:p>
+          <a:p>
+            <a:pPr algn="ctr" indent="0" marL="0">
+              <a:buNone/>
+            </a:pPr>
+            <a:r>
+              <a:rPr lang="ru-RU" altLang="en-US" sz="1600" dirty="0">
+                <a:solidFill>
+                  <a:schemeClr val="tx1"/>
+                </a:solidFill>
+              </a:rPr>
+              <a:t>Нормы радиационной безопасности (НРБ‑99/2009), пп. 4.1, 4.3: не более 5 мЗв в год</a:t>
+            </a:r>
+            <a:endParaRPr lang="ru-RU" sz="1600" dirty="0"/>
+          </a:p>
+        </p:txBody>
+      </p:sp>
+      <p:sp>
+        <p:nvSpPr>
+          <p:cNvPr id="7" name="Shape 5"/>
+          <p:cNvSpPr/>
+          <p:nvPr/>
+        </p:nvSpPr>
+        <p:spPr>
+          <a:xfrm>
+            <a:off x="2263140" y="2011680"/>
+            <a:ext cx="0" cy="411480"/>
+          </a:xfrm>
+          <a:prstGeom prst="line">
+            <a:avLst/>
+          </a:prstGeom>
+          <a:noFill/>
+          <a:ln w="15875">
+            <a:solidFill>
+              <a:schemeClr val="tx2"/>
+            </a:solidFill>
+            <a:prstDash val="solid"/>
+            <a:tailEnd type="triangle"/>
+          </a:ln>
+        </p:spPr>
+      </p:sp>
+      <p:sp>
+        <p:nvSpPr>
+          <p:cNvPr id="8" name="Shape 6"/>
+          <p:cNvSpPr/>
+          <p:nvPr/>
+        </p:nvSpPr>
+        <p:spPr>
+          <a:xfrm>
+            <a:off x="2263140" y="3520440"/>
+            <a:ext cx="2601468" cy="411480"/>
+          </a:xfrm>
+          <a:prstGeom prst="line">
+            <a:avLst/>
+          </a:prstGeom>
+          <a:noFill/>
+          <a:ln w="15875">
+            <a:solidFill>
+              <a:schemeClr val="tx2"/>
+            </a:solidFill>
+            <a:prstDash val="solid"/>
+            <a:tailEnd type="triangle"/>
+          </a:ln>
+        </p:spPr>
+      </p:sp>
+      <p:sp>
+        <p:nvSpPr>
+          <p:cNvPr id="9" name="Shape 7"/>
+          <p:cNvSpPr/>
+          <p:nvPr/>
+        </p:nvSpPr>
+        <p:spPr>
+          <a:xfrm>
+            <a:off x="4381348" y="2423160"/>
+            <a:ext cx="3429000" cy="1097280"/>
+          </a:xfrm>
+          <a:prstGeom prst="roundRect">
+            <a:avLst>
+              <a:gd name="adj" fmla="val 6667"/>
+            </a:avLst>
+          </a:prstGeom>
+          <a:solidFill>
+            <a:schemeClr val="bg2"/>
+          </a:solidFill>
+          <a:ln w="12700">
+            <a:solidFill>
+              <a:schemeClr val="tx2"/>
+            </a:solidFill>
+            <a:prstDash val="solid"/>
+          </a:ln>
+        </p:spPr>
+      </p:sp>
+      <p:sp>
+        <p:nvSpPr>
+          <p:cNvPr id="10" name="Text 8"/>
+          <p:cNvSpPr txBox="1"/>
+          <p:nvPr/>
+        </p:nvSpPr>
+        <p:spPr>
+          <a:xfrm>
+            <a:off x="4472788" y="2459736"/>
+            <a:ext cx="3246120" cy="1024128"/>
+          </a:xfrm>
+          <a:prstGeom prst="rect">
+            <a:avLst/>
+          </a:prstGeom>
+          <a:noFill/>
+          <a:ln/>
+        </p:spPr>
+        <p:txBody>
+          <a:bodyPr wrap="square" lIns="635" tIns="635" rIns="635" bIns="635" rtlCol="0" anchor="ctr"/>
+          <a:lstStyle/>
+          <a:p>
+            <a:pPr algn="ctr" indent="0" marL="0">
+              <a:buNone/>
+            </a:pPr>
+            <a:r>
+              <a:rPr lang="ru-RU" altLang="en-US" sz="1600" b="1" dirty="0">
+                <a:solidFill>
+                  <a:schemeClr val="tx1"/>
+                </a:solidFill>
+              </a:rPr>
+              <a:t>Охрана труда</a:t>
+            </a:r>
+            <a:endParaRPr lang="ru-RU" sz="1600" dirty="0"/>
+          </a:p>
+          <a:p>
+            <a:pPr algn="ctr" indent="0" marL="0">
+              <a:buNone/>
+            </a:pPr>
+            <a:r>
+              <a:rPr lang="ru-RU" altLang="en-US" sz="1600" dirty="0">
+                <a:solidFill>
+                  <a:schemeClr val="tx1"/>
+                </a:solidFill>
+              </a:rPr>
+              <a:t>приказ Минтруда № 255н: специальная оценка условий труда (СОУТ)</a:t>
+            </a:r>
+            <a:endParaRPr lang="ru-RU" sz="1600" dirty="0"/>
+          </a:p>
+        </p:txBody>
+      </p:sp>
+      <p:sp>
+        <p:nvSpPr>
+          <p:cNvPr id="11" name="Shape 9"/>
+          <p:cNvSpPr/>
+          <p:nvPr/>
+        </p:nvSpPr>
+        <p:spPr>
+          <a:xfrm>
+            <a:off x="6095848" y="2011680"/>
+            <a:ext cx="0" cy="411480"/>
+          </a:xfrm>
+          <a:prstGeom prst="line">
+            <a:avLst/>
+          </a:prstGeom>
+          <a:noFill/>
+          <a:ln w="15875">
+            <a:solidFill>
+              <a:schemeClr val="tx2"/>
+            </a:solidFill>
+            <a:prstDash val="solid"/>
+            <a:tailEnd type="triangle"/>
+          </a:ln>
+        </p:spPr>
+      </p:sp>
+      <p:sp>
+        <p:nvSpPr>
+          <p:cNvPr id="12" name="Shape 10"/>
+          <p:cNvSpPr/>
+          <p:nvPr/>
+        </p:nvSpPr>
+        <p:spPr>
+          <a:xfrm>
+            <a:off x="6095848" y="3520440"/>
+            <a:ext cx="3200" cy="411480"/>
+          </a:xfrm>
+          <a:prstGeom prst="line">
+            <a:avLst/>
+          </a:prstGeom>
+          <a:noFill/>
+          <a:ln w="15875">
+            <a:solidFill>
+              <a:schemeClr val="tx2"/>
+            </a:solidFill>
+            <a:prstDash val="solid"/>
+            <a:tailEnd type="triangle"/>
+          </a:ln>
+        </p:spPr>
+      </p:sp>
+      <p:sp>
+        <p:nvSpPr>
+          <p:cNvPr id="13" name="Shape 11"/>
+          <p:cNvSpPr/>
+          <p:nvPr/>
+        </p:nvSpPr>
+        <p:spPr>
+          <a:xfrm>
+            <a:off x="8214055" y="2423160"/>
+            <a:ext cx="3429000" cy="1097280"/>
+          </a:xfrm>
+          <a:prstGeom prst="roundRect">
+            <a:avLst>
+              <a:gd name="adj" fmla="val 6667"/>
+            </a:avLst>
+          </a:prstGeom>
+          <a:solidFill>
+            <a:schemeClr val="bg2"/>
+          </a:solidFill>
+          <a:ln w="12700">
+            <a:solidFill>
+              <a:schemeClr val="tx2"/>
+            </a:solidFill>
+            <a:prstDash val="solid"/>
+          </a:ln>
+        </p:spPr>
+      </p:sp>
+      <p:sp>
+        <p:nvSpPr>
+          <p:cNvPr id="14" name="Text 12"/>
+          <p:cNvSpPr txBox="1"/>
+          <p:nvPr/>
+        </p:nvSpPr>
+        <p:spPr>
+          <a:xfrm>
+            <a:off x="8305495" y="2459736"/>
+            <a:ext cx="3246120" cy="1024128"/>
+          </a:xfrm>
+          <a:prstGeom prst="rect">
+            <a:avLst/>
+          </a:prstGeom>
+          <a:noFill/>
+          <a:ln/>
+        </p:spPr>
+        <p:txBody>
+          <a:bodyPr wrap="square" lIns="635" tIns="635" rIns="635" bIns="635" rtlCol="0" anchor="ctr"/>
+          <a:lstStyle/>
+          <a:p>
+            <a:pPr algn="ctr" indent="0" marL="0">
+              <a:buNone/>
+            </a:pPr>
+            <a:r>
+              <a:rPr lang="ru-RU" altLang="en-US" sz="1600" b="1" dirty="0">
+                <a:solidFill>
+                  <a:schemeClr val="tx1"/>
+                </a:solidFill>
+              </a:rPr>
+              <a:t>Режим труда</a:t>
+            </a:r>
+            <a:endParaRPr lang="ru-RU" sz="1600" dirty="0"/>
+          </a:p>
+          <a:p>
+            <a:pPr algn="ctr" indent="0" marL="0">
+              <a:buNone/>
+            </a:pPr>
+            <a:r>
+              <a:rPr lang="ru-RU" altLang="en-US" sz="1600" dirty="0">
+                <a:solidFill>
+                  <a:schemeClr val="tx1"/>
+                </a:solidFill>
+              </a:rPr>
+              <a:t>приказ Минтранса № 381: до 800 ч в год, с согласия – до 900 ч</a:t>
+            </a:r>
+            <a:endParaRPr lang="ru-RU" sz="1600" dirty="0"/>
+          </a:p>
+        </p:txBody>
+      </p:sp>
+      <p:sp>
+        <p:nvSpPr>
+          <p:cNvPr id="15" name="Shape 13"/>
+          <p:cNvSpPr/>
+          <p:nvPr/>
+        </p:nvSpPr>
+        <p:spPr>
+          <a:xfrm>
+            <a:off x="9928555" y="2011680"/>
+            <a:ext cx="0" cy="411480"/>
+          </a:xfrm>
+          <a:prstGeom prst="line">
+            <a:avLst/>
+          </a:prstGeom>
+          <a:noFill/>
+          <a:ln w="15875">
+            <a:solidFill>
+              <a:schemeClr val="tx2"/>
+            </a:solidFill>
+            <a:prstDash val="solid"/>
+            <a:tailEnd type="triangle"/>
+          </a:ln>
+        </p:spPr>
+      </p:sp>
+      <p:sp>
+        <p:nvSpPr>
+          <p:cNvPr id="16" name="Shape 14"/>
+          <p:cNvSpPr/>
+          <p:nvPr/>
+        </p:nvSpPr>
+        <p:spPr>
+          <a:xfrm flipH="1">
+            <a:off x="7333488" y="3520440"/>
+            <a:ext cx="2595067" cy="411480"/>
+          </a:xfrm>
+          <a:prstGeom prst="line">
+            <a:avLst/>
+          </a:prstGeom>
+          <a:noFill/>
+          <a:ln w="15875">
+            <a:solidFill>
+              <a:schemeClr val="tx2"/>
+            </a:solidFill>
+            <a:prstDash val="solid"/>
+            <a:tailEnd type="triangle"/>
+          </a:ln>
+        </p:spPr>
+      </p:sp>
+      <p:sp>
+        <p:nvSpPr>
+          <p:cNvPr id="17" name="Shape 15"/>
+          <p:cNvSpPr/>
+          <p:nvPr/>
+        </p:nvSpPr>
+        <p:spPr>
+          <a:xfrm>
+            <a:off x="4041648" y="3931920"/>
+            <a:ext cx="4114800" cy="685800"/>
+          </a:xfrm>
+          <a:prstGeom prst="roundRect">
+            <a:avLst>
+              <a:gd name="adj" fmla="val 10667"/>
+            </a:avLst>
+          </a:prstGeom>
+          <a:solidFill>
+            <a:schemeClr val="bg2"/>
+          </a:solidFill>
+          <a:ln w="12700">
+            <a:solidFill>
+              <a:schemeClr val="tx2"/>
+            </a:solidFill>
+            <a:prstDash val="solid"/>
+          </a:ln>
+        </p:spPr>
+      </p:sp>
+      <p:sp>
+        <p:nvSpPr>
+          <p:cNvPr id="18" name="Text 16"/>
+          <p:cNvSpPr txBox="1"/>
+          <p:nvPr/>
+        </p:nvSpPr>
+        <p:spPr>
+          <a:xfrm>
+            <a:off x="4133088" y="3968496"/>
+            <a:ext cx="3931920" cy="612648"/>
+          </a:xfrm>
+          <a:prstGeom prst="rect">
+            <a:avLst/>
+          </a:prstGeom>
+          <a:noFill/>
+          <a:ln/>
+        </p:spPr>
+        <p:txBody>
+          <a:bodyPr wrap="square" lIns="635" tIns="635" rIns="635" bIns="635" rtlCol="0" anchor="ctr"/>
+          <a:lstStyle/>
+          <a:p>
+            <a:pPr algn="ctr" indent="0" marL="0">
+              <a:buNone/>
+            </a:pPr>
+            <a:r>
+              <a:rPr lang="ru-RU" altLang="en-US" sz="1600" b="1" dirty="0">
+                <a:solidFill>
+                  <a:schemeClr val="tx1"/>
+                </a:solidFill>
+              </a:rPr>
+              <a:t>Член экипажа</a:t>
+            </a:r>
+            <a:endParaRPr lang="ru-RU" sz="1600" dirty="0"/>
+          </a:p>
+          <a:p>
+            <a:pPr algn="ctr" indent="0" marL="0">
+              <a:buNone/>
+            </a:pPr>
+            <a:r>
+              <a:rPr lang="ru-RU" altLang="en-US" sz="1600" dirty="0">
+                <a:solidFill>
+                  <a:schemeClr val="tx1"/>
+                </a:solidFill>
+              </a:rPr>
+              <a:t>лётный и кабинный экипаж</a:t>
+            </a:r>
+            <a:endParaRPr lang="ru-RU" sz="1600" dirty="0"/>
+          </a:p>
+        </p:txBody>
+      </p:sp>
+      <p:sp>
+        <p:nvSpPr>
+          <p:cNvPr id="19" name="Shape 17"/>
+          <p:cNvSpPr/>
+          <p:nvPr/>
+        </p:nvSpPr>
+        <p:spPr>
+          <a:xfrm>
+            <a:off x="548640" y="4892040"/>
+            <a:ext cx="5349240" cy="777240"/>
+          </a:xfrm>
+          <a:prstGeom prst="roundRect">
+            <a:avLst>
+              <a:gd name="adj" fmla="val 9412"/>
+            </a:avLst>
+          </a:prstGeom>
+          <a:solidFill>
+            <a:schemeClr val="bg1"/>
+          </a:solidFill>
+          <a:ln w="12700">
+            <a:solidFill>
+              <a:schemeClr val="tx2"/>
+            </a:solidFill>
+            <a:prstDash val="dash"/>
+          </a:ln>
+        </p:spPr>
+      </p:sp>
+      <p:sp>
+        <p:nvSpPr>
+          <p:cNvPr id="20" name="Text 18"/>
+          <p:cNvSpPr txBox="1"/>
+          <p:nvPr/>
+        </p:nvSpPr>
+        <p:spPr>
+          <a:xfrm>
+            <a:off x="640080" y="4928616"/>
+            <a:ext cx="5166360" cy="704088"/>
+          </a:xfrm>
+          <a:prstGeom prst="rect">
+            <a:avLst/>
+          </a:prstGeom>
+          <a:noFill/>
+          <a:ln/>
+        </p:spPr>
+        <p:txBody>
+          <a:bodyPr wrap="square" lIns="635" tIns="635" rIns="635" bIns="635" rtlCol="0" anchor="ctr"/>
+          <a:lstStyle/>
+          <a:p>
+            <a:pPr algn="ctr" indent="0" marL="0">
+              <a:buNone/>
+            </a:pPr>
+            <a:r>
+              <a:rPr lang="ru-RU" altLang="en-US" sz="1600" b="1" dirty="0">
+                <a:solidFill>
+                  <a:schemeClr val="tx1"/>
+                </a:solidFill>
+              </a:rPr>
+              <a:t>Утратили силу:</a:t>
+            </a:r>
+            <a:endParaRPr lang="ru-RU" sz="1600" dirty="0"/>
+          </a:p>
+          <a:p>
+            <a:pPr algn="ctr" indent="0" marL="0">
+              <a:buNone/>
+            </a:pPr>
+            <a:r>
+              <a:rPr lang="ru-RU" altLang="en-US" sz="1600" dirty="0">
+                <a:solidFill>
+                  <a:schemeClr val="tx1"/>
+                </a:solidFill>
+              </a:rPr>
+              <a:t>СанПиН 2.5.1.2423‑08 (2021), СанПиН 2.6.1.2800‑10 (2025)</a:t>
+            </a:r>
+            <a:endParaRPr lang="ru-RU" sz="1600" dirty="0"/>
+          </a:p>
+        </p:txBody>
+      </p:sp>
+      <p:sp>
+        <p:nvSpPr>
+          <p:cNvPr id="21" name="Shape 19"/>
+          <p:cNvSpPr/>
+          <p:nvPr/>
+        </p:nvSpPr>
+        <p:spPr>
+          <a:xfrm>
+            <a:off x="6293815" y="4892040"/>
+            <a:ext cx="5349240" cy="777240"/>
+          </a:xfrm>
+          <a:prstGeom prst="roundRect">
+            <a:avLst>
+              <a:gd name="adj" fmla="val 9412"/>
+            </a:avLst>
+          </a:prstGeom>
+          <a:solidFill>
+            <a:schemeClr val="bg1"/>
+          </a:solidFill>
+          <a:ln w="12700">
+            <a:solidFill>
+              <a:schemeClr val="tx2"/>
+            </a:solidFill>
+            <a:prstDash val="dash"/>
+          </a:ln>
+        </p:spPr>
+      </p:sp>
+      <p:sp>
+        <p:nvSpPr>
+          <p:cNvPr id="22" name="Text 20"/>
+          <p:cNvSpPr txBox="1"/>
+          <p:nvPr/>
+        </p:nvSpPr>
+        <p:spPr>
+          <a:xfrm>
+            <a:off x="6385255" y="4928616"/>
+            <a:ext cx="5166360" cy="704088"/>
+          </a:xfrm>
+          <a:prstGeom prst="rect">
+            <a:avLst/>
+          </a:prstGeom>
+          <a:noFill/>
+          <a:ln/>
+        </p:spPr>
+        <p:txBody>
+          <a:bodyPr wrap="square" lIns="635" tIns="635" rIns="635" bIns="635" rtlCol="0" anchor="ctr"/>
+          <a:lstStyle/>
+          <a:p>
+            <a:pPr algn="ctr" indent="0" marL="0">
+              <a:buNone/>
+            </a:pPr>
+            <a:r>
+              <a:rPr lang="ru-RU" altLang="en-US" sz="1600" b="1" dirty="0">
+                <a:solidFill>
+                  <a:schemeClr val="tx1"/>
+                </a:solidFill>
+              </a:rPr>
+              <a:t>Не обнаружено:</a:t>
+            </a:r>
+            <a:endParaRPr lang="ru-RU" sz="1600" dirty="0"/>
+          </a:p>
+          <a:p>
+            <a:pPr algn="ctr" indent="0" marL="0">
+              <a:buNone/>
+            </a:pPr>
+            <a:r>
+              <a:rPr lang="ru-RU" altLang="en-US" sz="1600" dirty="0">
+                <a:solidFill>
+                  <a:schemeClr val="tx1"/>
+                </a:solidFill>
+              </a:rPr>
+              <a:t>норм о том, кто и как рассчитывает индивидуальную дозу</a:t>
+            </a:r>
+            <a:endParaRPr lang="ru-RU" sz="1600" dirty="0"/>
+          </a:p>
+        </p:txBody>
+      </p:sp>
+      <p:sp>
+        <p:nvSpPr>
+          <p:cNvPr id="23" name="Подпись"/>
+          <p:cNvSpPr txBox="1"/>
+          <p:nvPr/>
+        </p:nvSpPr>
+        <p:spPr>
+          <a:xfrm>
+            <a:off x="548640" y="5760720"/>
+            <a:ext cx="11094415" cy="594360"/>
+          </a:xfrm>
+          <a:prstGeom prst="rect">
+            <a:avLst/>
+          </a:prstGeom>
+          <a:noFill/>
+          <a:ln/>
+        </p:spPr>
+        <p:txBody>
+          <a:bodyPr wrap="square" lIns="635" tIns="635" rIns="635" bIns="635" rtlCol="0" anchor="t"/>
+          <a:lstStyle/>
+          <a:p>
+            <a:pPr algn="ctr" indent="0" marL="0">
+              <a:buNone/>
+            </a:pPr>
+            <a:r>
+              <a:rPr lang="ru-RU" altLang="en-US" sz="1600" dirty="0">
+                <a:solidFill>
+                  <a:schemeClr val="tx1"/>
+                </a:solidFill>
+              </a:rPr>
+              <a:t>Рисунок 4 – Система правового регулирования защиты членов экипажей от космического излучения (составлено авторами)</a:t>
+            </a:r>
+            <a:endParaRPr lang="ru-RU" sz="1600" dirty="0"/>
+          </a:p>
+        </p:txBody>
+      </p:sp>
+      <p:sp>
+        <p:nvSpPr>
+          <p:cNvPr id="25" name="Slide Number Placeholder 0"/>
+          <p:cNvSpPr>
+            <a:spLocks noGrp="1"/>
+          </p:cNvSpPr>
+          <p:nvPr>
+            <p:ph type="sldNum" sz="quarter" idx="4294967295"/>
+          </p:nvPr>
+        </p:nvSpPr>
+        <p:spPr>
+          <a:xfrm>
+            <a:off x="11002975" y="6355080"/>
+            <a:ext cx="731520" cy="320040"/>
+          </a:xfrm>
+          <a:prstGeom prst="rect">
+            <a:avLst/>
+          </a:prstGeom>
+          <a:extLst>
+            <a:ext uri="{C572A759-6A51-4108-AA02-DFA0A04FC94B}">
+              <ma14:wrappingTextBoxFlag xmlns:ma14="http://schemas.microsoft.com/office/mac/drawingml/2011/main" val="0"/>
+            </a:ext>
+          </a:extLst>
+        </p:spPr>
+        <p:txBody>
+          <a:bodyPr/>
+          <a:lstStyle>
+            <a:lvl1pPr>
+              <a:defRPr sz="1400">
+                <a:solidFill>
+                  <a:schemeClr val="tx1"/>
+                </a:solidFill>
+              </a:defRPr>
+            </a:lvl1pPr>
+          </a:lstStyle>
+          <a:p>
+            <a:pPr algn="r"/>
+            <a:fld id="{F7021451-1387-4CA6-816F-3879F97B5CBC}" type="slidenum">
+              <a:rPr b="0" lang="ru-RU"/>
+              <a:t>7</a:t>
+            </a:fld>
+            <a:endParaRPr lang="ru-RU"/>
+          </a:p>
+        </p:txBody>
+      </p:sp>
+    </p:spTree>
+  </p:cSld>
+  <p:clrMapOvr>
+    <a:masterClrMapping/>
+  </p:clrMapOvr>
+</p:sld>
+</file>
+
+<file path=ppt/slides/slide8.xml><?xml version="1.0" encoding="utf-8"?>
+<p:sld xmlns:a="http://schemas.openxmlformats.org/drawingml/2006/main" xmlns:r="http://schemas.openxmlformats.org/officeDocument/2006/relationships" xmlns:p="http://schemas.openxmlformats.org/presentationml/2006/main">
+  <p:cSld name="Slide 8">
+    <p:spTree>
+      <p:nvGrpSpPr>
+        <p:cNvPr id="1" name=""/>
+        <p:cNvGrpSpPr/>
+        <p:nvPr/>
+      </p:nvGrpSpPr>
+      <p:grpSpPr>
+        <a:xfrm>
+          <a:off x="0" y="0"/>
+          <a:ext cx="0" cy="0"/>
+          <a:chOff x="0" y="0"/>
+          <a:chExt cx="0" cy="0"/>
+        </a:xfrm>
+      </p:grpSpPr>
+      <p:sp>
+        <p:nvSpPr>
+          <p:cNvPr id="2" name="Text 1"/>
+          <p:cNvSpPr/>
+          <p:nvPr>
+            <p:ph idx="102" type="title" hasCustomPrompt="1"/>
+          </p:nvPr>
+        </p:nvSpPr>
+        <p:spPr>
+          <a:xfrm>
+            <a:off x="1325880" y="274320"/>
+            <a:ext cx="9539935" cy="914400"/>
+          </a:xfrm>
+          <a:prstGeom prst="rect">
+            <a:avLst/>
+          </a:prstGeom>
+          <a:noFill/>
+          <a:ln/>
+        </p:spPr>
+        <p:txBody>
+          <a:bodyPr wrap="square" lIns="635" tIns="635" rIns="635" bIns="635" rtlCol="0" anchor="ctr"/>
+          <a:lstStyle/>
+          <a:p>
+            <a:pPr algn="l" indent="0" marL="0">
+              <a:buNone/>
+            </a:pPr>
+            <a:r>
+              <a:rPr lang="ru-RU" altLang="en-US" sz="2800" b="1" dirty="0">
+                <a:solidFill>
+                  <a:schemeClr val="tx2"/>
+                </a:solidFill>
+              </a:rPr>
+              <a:t>Тексты действующих норм</a:t>
+            </a:r>
+            <a:endParaRPr lang="ru-RU" sz="2800" dirty="0"/>
+          </a:p>
+        </p:txBody>
+      </p:sp>
+      <p:pic>
+        <p:nvPicPr>
+          <p:cNvPr id="3" name="Image 0" descr="Фрагмент текста НРБ-99/2009, пп. 4.1 и 4.3">    </p:cNvPr>
+          <p:cNvPicPr>
+            <a:picLocks noChangeAspect="1"/>
+          </p:cNvPicPr>
+          <p:nvPr/>
+        </p:nvPicPr>
+        <p:blipFill>
+          <a:blip r:embed="rId1"/>
+          <a:stretch>
+            <a:fillRect/>
+          </a:stretch>
+        </p:blipFill>
+        <p:spPr>
+          <a:xfrm>
+            <a:off x="1889608" y="1325880"/>
+            <a:ext cx="8412480" cy="2976724"/>
+          </a:xfrm>
+          <a:prstGeom prst="rect">
+            <a:avLst/>
+          </a:prstGeom>
+        </p:spPr>
+      </p:pic>
+      <p:pic>
+        <p:nvPicPr>
+          <p:cNvPr id="4" name="Image 1" descr="Фрагмент текста ст. 56 Воздушного кодекса РФ">    </p:cNvPr>
+          <p:cNvPicPr>
+            <a:picLocks noChangeAspect="1"/>
+          </p:cNvPicPr>
+          <p:nvPr/>
+        </p:nvPicPr>
+        <p:blipFill>
+          <a:blip r:embed="rId2"/>
+          <a:stretch>
+            <a:fillRect/>
+          </a:stretch>
+        </p:blipFill>
+        <p:spPr>
+          <a:xfrm>
+            <a:off x="1889608" y="4439764"/>
+            <a:ext cx="8412480" cy="1811919"/>
+          </a:xfrm>
+          <a:prstGeom prst="rect">
+            <a:avLst/>
+          </a:prstGeom>
+        </p:spPr>
+      </p:pic>
+      <p:sp>
+        <p:nvSpPr>
+          <p:cNvPr id="5" name="Подпись"/>
+          <p:cNvSpPr txBox="1"/>
+          <p:nvPr/>
+        </p:nvSpPr>
+        <p:spPr>
+          <a:xfrm>
+            <a:off x="548640" y="6388842"/>
+            <a:ext cx="11094415" cy="640080"/>
+          </a:xfrm>
+          <a:prstGeom prst="rect">
+            <a:avLst/>
+          </a:prstGeom>
+          <a:noFill/>
+          <a:ln/>
+        </p:spPr>
+        <p:txBody>
+          <a:bodyPr wrap="square" lIns="635" tIns="635" rIns="635" bIns="635" rtlCol="0" anchor="t"/>
+          <a:lstStyle/>
+          <a:p>
+            <a:pPr algn="ctr" indent="0" marL="0">
+              <a:buNone/>
+            </a:pPr>
+            <a:r>
+              <a:rPr lang="ru-RU" altLang="en-US" sz="1600" dirty="0">
+                <a:solidFill>
+                  <a:schemeClr val="tx1"/>
+                </a:solidFill>
+              </a:rPr>
+              <a:t>Рисунок 5 – Фрагменты текста НРБ‑99/2009 (пп. 4.1, 4.3) [5] и Воздушного кодекса РФ (ст. 56) [6]</a:t>
+            </a:r>
+            <a:endParaRPr lang="ru-RU" sz="1600" dirty="0"/>
+          </a:p>
+        </p:txBody>
+      </p:sp>
+      <p:sp>
+        <p:nvSpPr>
+          <p:cNvPr id="25" name="Slide Number Placeholder 0"/>
+          <p:cNvSpPr>
+            <a:spLocks noGrp="1"/>
+          </p:cNvSpPr>
+          <p:nvPr>
+            <p:ph type="sldNum" sz="quarter" idx="4294967295"/>
+          </p:nvPr>
+        </p:nvSpPr>
+        <p:spPr>
+          <a:xfrm>
+            <a:off x="11002975" y="6355080"/>
+            <a:ext cx="731520" cy="320040"/>
+          </a:xfrm>
+          <a:prstGeom prst="rect">
+            <a:avLst/>
+          </a:prstGeom>
+          <a:extLst>
+            <a:ext uri="{C572A759-6A51-4108-AA02-DFA0A04FC94B}">
+              <ma14:wrappingTextBoxFlag xmlns:ma14="http://schemas.microsoft.com/office/mac/drawingml/2011/main" val="0"/>
+            </a:ext>
+          </a:extLst>
+        </p:spPr>
+        <p:txBody>
+          <a:bodyPr/>
+          <a:lstStyle>
+            <a:lvl1pPr>
+              <a:defRPr sz="1400">
+                <a:solidFill>
+                  <a:schemeClr val="tx1"/>
+                </a:solidFill>
+              </a:defRPr>
+            </a:lvl1pPr>
+          </a:lstStyle>
+          <a:p>
+            <a:pPr algn="r"/>
+            <a:fld id="{F7021451-1387-4CA6-816F-3879F97B5CBC}" type="slidenum">
+              <a:rPr b="0" lang="ru-RU"/>
+              <a:t>8</a:t>
+            </a:fld>
+            <a:endParaRPr lang="ru-RU"/>
+          </a:p>
+        </p:txBody>
+      </p:sp>
+    </p:spTree>
+  </p:cSld>
+  <p:clrMapOvr>
+    <a:masterClrMapping/>
+  </p:clrMapOvr>
+</p:sld>
+</file>
+
+<file path=ppt/slides/slide9.xml><?xml version="1.0" encoding="utf-8"?>
+<p:sld xmlns:a="http://schemas.openxmlformats.org/drawingml/2006/main" xmlns:r="http://schemas.openxmlformats.org/officeDocument/2006/relationships" xmlns:p="http://schemas.openxmlformats.org/presentationml/2006/main">
+  <p:cSld name="Slide 9">
+    <p:spTree>
+      <p:nvGrpSpPr>
+        <p:cNvPr id="1" name=""/>
+        <p:cNvGrpSpPr/>
+        <p:nvPr/>
+      </p:nvGrpSpPr>
+      <p:grpSpPr>
+        <a:xfrm>
+          <a:off x="0" y="0"/>
+          <a:ext cx="0" cy="0"/>
+          <a:chOff x="0" y="0"/>
+          <a:chExt cx="0" cy="0"/>
+        </a:xfrm>
+      </p:grpSpPr>
+      <p:sp>
+        <p:nvSpPr>
+          <p:cNvPr id="2" name="Text 1"/>
+          <p:cNvSpPr/>
+          <p:nvPr>
+            <p:ph idx="102" type="title" hasCustomPrompt="1"/>
+          </p:nvPr>
+        </p:nvSpPr>
+        <p:spPr>
+          <a:xfrm>
+            <a:off x="1325880" y="274320"/>
+            <a:ext cx="9539935" cy="914400"/>
+          </a:xfrm>
+          <a:prstGeom prst="rect">
+            <a:avLst/>
+          </a:prstGeom>
+          <a:noFill/>
+          <a:ln/>
+        </p:spPr>
+        <p:txBody>
+          <a:bodyPr wrap="square" lIns="635" tIns="635" rIns="635" bIns="635" rtlCol="0" anchor="ctr"/>
+          <a:lstStyle/>
+          <a:p>
+            <a:pPr algn="l" indent="0" marL="0">
+              <a:buNone/>
+            </a:pPr>
+            <a:r>
+              <a:rPr lang="ru-RU" altLang="en-US" sz="2800" b="1" dirty="0">
+                <a:solidFill>
+                  <a:schemeClr val="tx2"/>
+                </a:solidFill>
+              </a:rPr>
               <a:t>Изменения специального регулирования</a:t>
             </a:r>
             <a:endParaRPr lang="ru-RU" sz="2800" dirty="0"/>
@@ -10176,7 +11480,7 @@
       </p:sp>
       <p:graphicFrame>
         <p:nvGraphicFramePr>
-          <p:cNvPr id="8" name="Table 0"/>
+          <p:cNvPr id="10" name="Table 0"/>
           <p:cNvGraphicFramePr>
             <a:graphicFrameLocks noGrp="1"/>
           </p:cNvGraphicFramePr>
@@ -10425,7 +11729,7 @@
                           <a:ea typeface="Calibri" pitchFamily="34" charset="-122"/>
                           <a:cs typeface="Calibri" pitchFamily="34" charset="-120"/>
                         </a:rPr>
-                        <a:t>СанПиН 2.5.1.2423‑08 (условия труда и отдыха лётного состава ГА)</a:t>
+                        <a:t>СанПиН 2.5.1.2423‑08 (условия труда и отдыха лётного состава гражданской авиации)</a:t>
                       </a:r>
                       <a:endParaRPr lang="ru-RU" sz="2000" dirty="0">
                         <a:latin typeface="Calibri" charset="0"/>
@@ -10690,7 +11994,7 @@
                           <a:ea typeface="Calibri" pitchFamily="34" charset="-122"/>
                           <a:cs typeface="Calibri" pitchFamily="34" charset="-120"/>
                         </a:rPr>
-                        <a:t>отдельный раздел об облучении экипажей ВС гражданской авиации</a:t>
+                        <a:t>отдельный раздел об облучении экипажей воздушных судов гражданской авиации</a:t>
                       </a:r>
                       <a:endParaRPr lang="ru-RU" sz="2000" dirty="0">
                         <a:latin typeface="Calibri" charset="0"/>
@@ -11044,414 +12348,6 @@
               <a:t>Итог: предел дозы сохранился, но специальных требований к его соблюдению в действующих актах не обнаружено</a:t>
             </a:r>
             <a:endParaRPr lang="ru-RU" sz="2000" dirty="0"/>
-          </a:p>
-        </p:txBody>
-      </p:sp>
-      <p:sp>
-        <p:nvSpPr>
-          <p:cNvPr id="25" name="Slide Number Placeholder 0"/>
-          <p:cNvSpPr>
-            <a:spLocks noGrp="1"/>
-          </p:cNvSpPr>
-          <p:nvPr>
-            <p:ph type="sldNum" sz="quarter" idx="4294967295"/>
-          </p:nvPr>
-        </p:nvSpPr>
-        <p:spPr>
-          <a:xfrm>
-            <a:off x="11002975" y="6355080"/>
-            <a:ext cx="731520" cy="320040"/>
-          </a:xfrm>
-          <a:prstGeom prst="rect">
-            <a:avLst/>
-          </a:prstGeom>
-          <a:extLst>
-            <a:ext uri="{C572A759-6A51-4108-AA02-DFA0A04FC94B}">
-              <ma14:wrappingTextBoxFlag xmlns:ma14="http://schemas.microsoft.com/office/mac/drawingml/2011/main" val="0"/>
-            </a:ext>
-          </a:extLst>
-        </p:spPr>
-        <p:txBody>
-          <a:bodyPr/>
-          <a:lstStyle>
-            <a:lvl1pPr>
-              <a:defRPr sz="1400">
-                <a:solidFill>
-                  <a:schemeClr val="tx1"/>
-                </a:solidFill>
-              </a:defRPr>
-            </a:lvl1pPr>
-          </a:lstStyle>
-          <a:p>
-            <a:pPr algn="r"/>
-            <a:fld id="{F7021451-1387-4CA6-816F-3879F97B5CBC}" type="slidenum">
-              <a:rPr b="0" lang="ru-RU"/>
-              <a:t>7</a:t>
-            </a:fld>
-            <a:endParaRPr lang="ru-RU"/>
-          </a:p>
-        </p:txBody>
-      </p:sp>
-    </p:spTree>
-  </p:cSld>
-  <p:clrMapOvr>
-    <a:masterClrMapping/>
-  </p:clrMapOvr>
-</p:sld>
-</file>
-
-<file path=ppt/slides/slide8.xml><?xml version="1.0" encoding="utf-8"?>
-<p:sld xmlns:a="http://schemas.openxmlformats.org/drawingml/2006/main" xmlns:r="http://schemas.openxmlformats.org/officeDocument/2006/relationships" xmlns:p="http://schemas.openxmlformats.org/presentationml/2006/main">
-  <p:cSld name="Slide 8">
-    <p:spTree>
-      <p:nvGrpSpPr>
-        <p:cNvPr id="1" name=""/>
-        <p:cNvGrpSpPr/>
-        <p:nvPr/>
-      </p:nvGrpSpPr>
-      <p:grpSpPr>
-        <a:xfrm>
-          <a:off x="0" y="0"/>
-          <a:ext cx="0" cy="0"/>
-          <a:chOff x="0" y="0"/>
-          <a:chExt cx="0" cy="0"/>
-        </a:xfrm>
-      </p:grpSpPr>
-      <p:sp>
-        <p:nvSpPr>
-          <p:cNvPr id="2" name="Text 1"/>
-          <p:cNvSpPr/>
-          <p:nvPr>
-            <p:ph idx="102" type="title" hasCustomPrompt="1"/>
-          </p:nvPr>
-        </p:nvSpPr>
-        <p:spPr>
-          <a:xfrm>
-            <a:off x="1325880" y="274320"/>
-            <a:ext cx="9539935" cy="914400"/>
-          </a:xfrm>
-          <a:prstGeom prst="rect">
-            <a:avLst/>
-          </a:prstGeom>
-          <a:noFill/>
-          <a:ln/>
-        </p:spPr>
-        <p:txBody>
-          <a:bodyPr wrap="square" lIns="635" tIns="635" rIns="635" bIns="635" rtlCol="0" anchor="ctr"/>
-          <a:lstStyle/>
-          <a:p>
-            <a:pPr algn="l" indent="0" marL="0">
-              <a:buNone/>
-            </a:pPr>
-            <a:r>
-              <a:rPr lang="ru-RU" altLang="en-US" sz="2800" b="1" dirty="0">
-                <a:solidFill>
-                  <a:schemeClr val="tx2"/>
-                </a:solidFill>
-              </a:rPr>
-              <a:t>Выявленные пробелы (1)</a:t>
-            </a:r>
-            <a:endParaRPr lang="ru-RU" sz="2800" dirty="0"/>
-          </a:p>
-        </p:txBody>
-      </p:sp>
-      <p:sp>
-        <p:nvSpPr>
-          <p:cNvPr id="3" name="Text 1"/>
-          <p:cNvSpPr/>
-          <p:nvPr>
-            <p:ph idx="103" type="body" hasCustomPrompt="1"/>
-          </p:nvPr>
-        </p:nvSpPr>
-        <p:spPr>
-          <a:xfrm>
-            <a:off x="548640" y="1371600"/>
-            <a:ext cx="11094415" cy="4846320"/>
-          </a:xfrm>
-          <a:prstGeom prst="rect">
-            <a:avLst/>
-          </a:prstGeom>
-          <a:noFill/>
-          <a:ln/>
-        </p:spPr>
-        <p:txBody>
-          <a:bodyPr wrap="square" lIns="635" tIns="635" rIns="635" bIns="635" rtlCol="0" anchor="t"/>
-          <a:lstStyle/>
-          <a:p>
-            <a:pPr algn="l" marL="304800" indent="-304800">
-              <a:spcAft>
-                <a:spcPts val="1000"/>
-              </a:spcAft>
-              <a:buSzPct val="100000"/>
-              <a:buChar char="–"/>
-            </a:pPr>
-            <a:r>
-              <a:rPr lang="ru-RU" altLang="en-US" sz="2400" dirty="0">
-                <a:solidFill>
-                  <a:schemeClr val="tx1"/>
-                </a:solidFill>
-              </a:rPr>
-              <a:t>Кроме п. 4.3 НРБ‑99/2009, специальных норм об облучении экипажей в действующих актах не обнаружено</a:t>
-            </a:r>
-            <a:endParaRPr lang="ru-RU" sz="2400" dirty="0"/>
-          </a:p>
-          <a:p>
-            <a:pPr algn="l" marL="304800" indent="-304800">
-              <a:spcAft>
-                <a:spcPts val="1000"/>
-              </a:spcAft>
-              <a:buSzPct val="100000"/>
-              <a:buChar char="–"/>
-            </a:pPr>
-            <a:r>
-              <a:rPr lang="ru-RU" altLang="en-US" sz="2400" dirty="0">
-                <a:solidFill>
-                  <a:schemeClr val="tx1"/>
-                </a:solidFill>
-              </a:rPr>
-              <a:t>Не установлено, кто обязан рассчитывать индивидуальную дозу члена экипажа и по какой методике</a:t>
-            </a:r>
-            <a:endParaRPr lang="ru-RU" sz="2400" dirty="0"/>
-          </a:p>
-          <a:p>
-            <a:pPr algn="l" marL="304800" indent="-304800">
-              <a:spcAft>
-                <a:spcPts val="1000"/>
-              </a:spcAft>
-              <a:buSzPct val="100000"/>
-              <a:buChar char="–"/>
-            </a:pPr>
-            <a:r>
-              <a:rPr lang="ru-RU" altLang="en-US" sz="2400" dirty="0">
-                <a:solidFill>
-                  <a:schemeClr val="tx1"/>
-                </a:solidFill>
-              </a:rPr>
-              <a:t>Не обнаружен порядок передачи доз экипажей в ЕСКИД, хотя ст. 18 закона № 3‑ФЗ требует учёта доз [3]</a:t>
-            </a:r>
-            <a:endParaRPr lang="ru-RU" sz="2400" dirty="0"/>
-          </a:p>
-          <a:p>
-            <a:pPr algn="l" marL="304800" indent="-304800">
-              <a:spcAft>
-                <a:spcPts val="1000"/>
-              </a:spcAft>
-              <a:buSzPct val="100000"/>
-              <a:buChar char="–"/>
-            </a:pPr>
-            <a:r>
-              <a:rPr lang="ru-RU" altLang="en-US" sz="2400" dirty="0">
-                <a:solidFill>
-                  <a:schemeClr val="tx1"/>
-                </a:solidFill>
-              </a:rPr>
-              <a:t>Следствие: соблюдение предела 5 мЗв в год для конкретного человека проверить нельзя</a:t>
-            </a:r>
-            <a:endParaRPr lang="ru-RU" sz="2400" dirty="0"/>
-          </a:p>
-        </p:txBody>
-      </p:sp>
-      <p:sp>
-        <p:nvSpPr>
-          <p:cNvPr id="25" name="Slide Number Placeholder 0"/>
-          <p:cNvSpPr>
-            <a:spLocks noGrp="1"/>
-          </p:cNvSpPr>
-          <p:nvPr>
-            <p:ph type="sldNum" sz="quarter" idx="4294967295"/>
-          </p:nvPr>
-        </p:nvSpPr>
-        <p:spPr>
-          <a:xfrm>
-            <a:off x="11002975" y="6355080"/>
-            <a:ext cx="731520" cy="320040"/>
-          </a:xfrm>
-          <a:prstGeom prst="rect">
-            <a:avLst/>
-          </a:prstGeom>
-          <a:extLst>
-            <a:ext uri="{C572A759-6A51-4108-AA02-DFA0A04FC94B}">
-              <ma14:wrappingTextBoxFlag xmlns:ma14="http://schemas.microsoft.com/office/mac/drawingml/2011/main" val="0"/>
-            </a:ext>
-          </a:extLst>
-        </p:spPr>
-        <p:txBody>
-          <a:bodyPr/>
-          <a:lstStyle>
-            <a:lvl1pPr>
-              <a:defRPr sz="1400">
-                <a:solidFill>
-                  <a:schemeClr val="tx1"/>
-                </a:solidFill>
-              </a:defRPr>
-            </a:lvl1pPr>
-          </a:lstStyle>
-          <a:p>
-            <a:pPr algn="r"/>
-            <a:fld id="{F7021451-1387-4CA6-816F-3879F97B5CBC}" type="slidenum">
-              <a:rPr b="0" lang="ru-RU"/>
-              <a:t>8</a:t>
-            </a:fld>
-            <a:endParaRPr lang="ru-RU"/>
-          </a:p>
-        </p:txBody>
-      </p:sp>
-    </p:spTree>
-  </p:cSld>
-  <p:clrMapOvr>
-    <a:masterClrMapping/>
-  </p:clrMapOvr>
-</p:sld>
-</file>
-
-<file path=ppt/slides/slide9.xml><?xml version="1.0" encoding="utf-8"?>
-<p:sld xmlns:a="http://schemas.openxmlformats.org/drawingml/2006/main" xmlns:r="http://schemas.openxmlformats.org/officeDocument/2006/relationships" xmlns:p="http://schemas.openxmlformats.org/presentationml/2006/main">
-  <p:cSld name="Slide 9">
-    <p:spTree>
-      <p:nvGrpSpPr>
-        <p:cNvPr id="1" name=""/>
-        <p:cNvGrpSpPr/>
-        <p:nvPr/>
-      </p:nvGrpSpPr>
-      <p:grpSpPr>
-        <a:xfrm>
-          <a:off x="0" y="0"/>
-          <a:ext cx="0" cy="0"/>
-          <a:chOff x="0" y="0"/>
-          <a:chExt cx="0" cy="0"/>
-        </a:xfrm>
-      </p:grpSpPr>
-      <p:sp>
-        <p:nvSpPr>
-          <p:cNvPr id="2" name="Text 1"/>
-          <p:cNvSpPr/>
-          <p:nvPr>
-            <p:ph idx="102" type="title" hasCustomPrompt="1"/>
-          </p:nvPr>
-        </p:nvSpPr>
-        <p:spPr>
-          <a:xfrm>
-            <a:off x="1325880" y="274320"/>
-            <a:ext cx="9539935" cy="914400"/>
-          </a:xfrm>
-          <a:prstGeom prst="rect">
-            <a:avLst/>
-          </a:prstGeom>
-          <a:noFill/>
-          <a:ln/>
-        </p:spPr>
-        <p:txBody>
-          <a:bodyPr wrap="square" lIns="635" tIns="635" rIns="635" bIns="635" rtlCol="0" anchor="ctr"/>
-          <a:lstStyle/>
-          <a:p>
-            <a:pPr algn="l" indent="0" marL="0">
-              <a:buNone/>
-            </a:pPr>
-            <a:r>
-              <a:rPr lang="ru-RU" altLang="en-US" sz="2800" b="1" dirty="0">
-                <a:solidFill>
-                  <a:schemeClr val="tx2"/>
-                </a:solidFill>
-              </a:rPr>
-              <a:t>Выявленные пробелы (2)</a:t>
-            </a:r>
-            <a:endParaRPr lang="ru-RU" sz="2800" dirty="0"/>
-          </a:p>
-        </p:txBody>
-      </p:sp>
-      <p:sp>
-        <p:nvSpPr>
-          <p:cNvPr id="3" name="Text 1"/>
-          <p:cNvSpPr/>
-          <p:nvPr>
-            <p:ph idx="103" type="body" hasCustomPrompt="1"/>
-          </p:nvPr>
-        </p:nvSpPr>
-        <p:spPr>
-          <a:xfrm>
-            <a:off x="548640" y="1371600"/>
-            <a:ext cx="11094415" cy="4846320"/>
-          </a:xfrm>
-          <a:prstGeom prst="rect">
-            <a:avLst/>
-          </a:prstGeom>
-          <a:noFill/>
-          <a:ln/>
-        </p:spPr>
-        <p:txBody>
-          <a:bodyPr wrap="square" lIns="635" tIns="635" rIns="635" bIns="635" rtlCol="0" anchor="t"/>
-          <a:lstStyle/>
-          <a:p>
-            <a:pPr algn="l" marL="304800" indent="-304800">
-              <a:spcAft>
-                <a:spcPts val="1000"/>
-              </a:spcAft>
-              <a:buSzPct val="100000"/>
-              <a:buChar char="–"/>
-            </a:pPr>
-            <a:r>
-              <a:rPr lang="ru-RU" altLang="en-US" sz="2400" dirty="0">
-                <a:solidFill>
-                  <a:schemeClr val="tx1"/>
-                </a:solidFill>
-              </a:rPr>
-              <a:t>СОУТ проводится в одном контрольном полёте и не отражает годовую дозу на разных маршрутах [10]</a:t>
-            </a:r>
-            <a:endParaRPr lang="ru-RU" sz="2400" dirty="0"/>
-          </a:p>
-          <a:p>
-            <a:pPr algn="l" marL="304800" indent="-304800">
-              <a:spcAft>
-                <a:spcPts val="1000"/>
-              </a:spcAft>
-              <a:buSzPct val="100000"/>
-              <a:buChar char="–"/>
-            </a:pPr>
-            <a:r>
-              <a:rPr lang="ru-RU" altLang="en-US" sz="2400" dirty="0">
-                <a:solidFill>
-                  <a:schemeClr val="tx1"/>
-                </a:solidFill>
-              </a:rPr>
-              <a:t>Лимиты налёта (800 ч, с согласия – 900 ч в год) не учитывают дозу; согласие даётся без знания своей дозы [11]</a:t>
-            </a:r>
-            <a:endParaRPr lang="ru-RU" sz="2400" dirty="0"/>
-          </a:p>
-          <a:p>
-            <a:pPr algn="l" marL="304800" indent="-304800">
-              <a:spcAft>
-                <a:spcPts val="1000"/>
-              </a:spcAft>
-              <a:buSzPct val="100000"/>
-              <a:buChar char="–"/>
-            </a:pPr>
-            <a:r>
-              <a:rPr lang="ru-RU" altLang="en-US" sz="2400" dirty="0">
-                <a:solidFill>
-                  <a:schemeClr val="tx1"/>
-                </a:solidFill>
-              </a:rPr>
-              <a:t>Общая обязанность информировать о рисках есть (ст. 214 ТК РФ), но сообщать работнику его индивидуальную дозу никто не обязан</a:t>
-            </a:r>
-            <a:endParaRPr lang="ru-RU" sz="2400" dirty="0"/>
-          </a:p>
-          <a:p>
-            <a:pPr algn="l" marL="304800" indent="-304800">
-              <a:spcAft>
-                <a:spcPts val="1000"/>
-              </a:spcAft>
-              <a:buSzPct val="100000"/>
-              <a:buChar char="–"/>
-            </a:pPr>
-            <a:r>
-              <a:rPr lang="ru-RU" altLang="en-US" sz="2400" dirty="0">
-                <a:solidFill>
-                  <a:schemeClr val="tx1"/>
-                </a:solidFill>
-              </a:rPr>
-              <a:t>Для беременных членов экипажа нет дозового правила – действуют только общие гарантии ст. 254 ТК РФ</a:t>
-            </a:r>
-            <a:endParaRPr lang="ru-RU" sz="2400" dirty="0"/>
           </a:p>
         </p:txBody>
       </p:sp>
